--- a/Project2/Reports/Nagel_Project2_Presentation.pptx
+++ b/Project2/Reports/Nagel_Project2_Presentation.pptx
@@ -5,7 +5,7 @@
     <p:sldMasterId id="2147483648" r:id="rId1"/>
   </p:sldMasterIdLst>
   <p:notesMasterIdLst>
-    <p:notesMasterId r:id="rId11"/>
+    <p:notesMasterId r:id="rId9"/>
   </p:notesMasterIdLst>
   <p:sldIdLst>
     <p:sldId id="256" r:id="rId2"/>
@@ -13,10 +13,8 @@
     <p:sldId id="258" r:id="rId4"/>
     <p:sldId id="266" r:id="rId5"/>
     <p:sldId id="267" r:id="rId6"/>
-    <p:sldId id="259" r:id="rId7"/>
-    <p:sldId id="264" r:id="rId8"/>
-    <p:sldId id="263" r:id="rId9"/>
-    <p:sldId id="265" r:id="rId10"/>
+    <p:sldId id="268" r:id="rId7"/>
+    <p:sldId id="269" r:id="rId8"/>
   </p:sldIdLst>
   <p:sldSz cx="12192000" cy="6858000"/>
   <p:notesSz cx="6858000" cy="9144000"/>
@@ -127,6 +125,7 @@
 <p1510:revInfo xmlns:a="http://schemas.openxmlformats.org/drawingml/2006/main" xmlns:r="http://schemas.openxmlformats.org/officeDocument/2006/relationships" xmlns:p1510="http://schemas.microsoft.com/office/powerpoint/2015/10/main">
   <p1510:revLst>
     <p1510:client id="{3212E657-F5D7-4664-8A9E-1644CE52F55C}" v="261" dt="2026-03-29T21:07:56.261"/>
+    <p1510:client id="{B00CA9B7-25BF-415B-B09C-CC0C495BD931}" v="322" dt="2026-03-30T16:07:28.454"/>
   </p1510:revLst>
 </p1510:revInfo>
 </file>
@@ -135,8 +134,8 @@
 <pc:chgInfo xmlns:a="http://schemas.openxmlformats.org/drawingml/2006/main" xmlns:r="http://schemas.openxmlformats.org/officeDocument/2006/relationships" xmlns:ac="http://schemas.microsoft.com/office/drawing/2013/main/command" xmlns:pc="http://schemas.microsoft.com/office/powerpoint/2013/main/command">
   <pc:docChgLst>
     <pc:chgData name="Joe Nagel" userId="7dedc618e2aa6ce6" providerId="LiveId" clId="{9ECCC3C5-1F9C-40AE-8D6E-A626AAE8C160}"/>
-    <pc:docChg chg="undo redo custSel addSld delSld modSld">
-      <pc:chgData name="Joe Nagel" userId="7dedc618e2aa6ce6" providerId="LiveId" clId="{9ECCC3C5-1F9C-40AE-8D6E-A626AAE8C160}" dt="2026-03-02T18:48:41.574" v="3665" actId="20577"/>
+    <pc:docChg chg="undo redo custSel addSld delSld modSld sldOrd">
+      <pc:chgData name="Joe Nagel" userId="7dedc618e2aa6ce6" providerId="LiveId" clId="{9ECCC3C5-1F9C-40AE-8D6E-A626AAE8C160}" dt="2026-03-30T16:11:49.033" v="5260" actId="404"/>
       <pc:docMkLst>
         <pc:docMk/>
       </pc:docMkLst>
@@ -179,13 +178,13 @@
         </pc:spChg>
       </pc:sldChg>
       <pc:sldChg chg="addSp delSp modSp mod">
-        <pc:chgData name="Joe Nagel" userId="7dedc618e2aa6ce6" providerId="LiveId" clId="{9ECCC3C5-1F9C-40AE-8D6E-A626AAE8C160}" dt="2026-03-02T16:40:56.807" v="3286" actId="14100"/>
+        <pc:chgData name="Joe Nagel" userId="7dedc618e2aa6ce6" providerId="LiveId" clId="{9ECCC3C5-1F9C-40AE-8D6E-A626AAE8C160}" dt="2026-03-30T00:25:54.282" v="3692" actId="27636"/>
         <pc:sldMkLst>
           <pc:docMk/>
           <pc:sldMk cId="25113018" sldId="258"/>
         </pc:sldMkLst>
         <pc:spChg chg="mod">
-          <ac:chgData name="Joe Nagel" userId="7dedc618e2aa6ce6" providerId="LiveId" clId="{9ECCC3C5-1F9C-40AE-8D6E-A626AAE8C160}" dt="2026-03-02T16:40:06.894" v="3280" actId="20577"/>
+          <ac:chgData name="Joe Nagel" userId="7dedc618e2aa6ce6" providerId="LiveId" clId="{9ECCC3C5-1F9C-40AE-8D6E-A626AAE8C160}" dt="2026-03-30T00:25:54.282" v="3692" actId="27636"/>
           <ac:spMkLst>
             <pc:docMk/>
             <pc:sldMk cId="25113018" sldId="258"/>
@@ -193,12 +192,157 @@
           </ac:spMkLst>
         </pc:spChg>
       </pc:sldChg>
-      <pc:sldChg chg="addSp delSp modSp mod">
-        <pc:chgData name="Joe Nagel" userId="7dedc618e2aa6ce6" providerId="LiveId" clId="{9ECCC3C5-1F9C-40AE-8D6E-A626AAE8C160}" dt="2026-03-02T18:39:58.136" v="3629" actId="20577"/>
+      <pc:sldChg chg="addSp delSp modSp del mod">
+        <pc:chgData name="Joe Nagel" userId="7dedc618e2aa6ce6" providerId="LiveId" clId="{9ECCC3C5-1F9C-40AE-8D6E-A626AAE8C160}" dt="2026-03-30T01:11:05.813" v="5163" actId="47"/>
         <pc:sldMkLst>
           <pc:docMk/>
           <pc:sldMk cId="3889094601" sldId="259"/>
         </pc:sldMkLst>
+      </pc:sldChg>
+      <pc:sldChg chg="del">
+        <pc:chgData name="Joe Nagel" userId="7dedc618e2aa6ce6" providerId="LiveId" clId="{9ECCC3C5-1F9C-40AE-8D6E-A626AAE8C160}" dt="2026-03-30T01:11:06.829" v="5165" actId="47"/>
+        <pc:sldMkLst>
+          <pc:docMk/>
+          <pc:sldMk cId="2057151651" sldId="263"/>
+        </pc:sldMkLst>
+      </pc:sldChg>
+      <pc:sldChg chg="del">
+        <pc:chgData name="Joe Nagel" userId="7dedc618e2aa6ce6" providerId="LiveId" clId="{9ECCC3C5-1F9C-40AE-8D6E-A626AAE8C160}" dt="2026-03-30T01:11:06.417" v="5164" actId="47"/>
+        <pc:sldMkLst>
+          <pc:docMk/>
+          <pc:sldMk cId="3053330656" sldId="264"/>
+        </pc:sldMkLst>
+      </pc:sldChg>
+      <pc:sldChg chg="del">
+        <pc:chgData name="Joe Nagel" userId="7dedc618e2aa6ce6" providerId="LiveId" clId="{9ECCC3C5-1F9C-40AE-8D6E-A626AAE8C160}" dt="2026-03-30T01:11:07.412" v="5166" actId="47"/>
+        <pc:sldMkLst>
+          <pc:docMk/>
+          <pc:sldMk cId="2926171787" sldId="265"/>
+        </pc:sldMkLst>
+      </pc:sldChg>
+      <pc:sldChg chg="modSp mod">
+        <pc:chgData name="Joe Nagel" userId="7dedc618e2aa6ce6" providerId="LiveId" clId="{9ECCC3C5-1F9C-40AE-8D6E-A626AAE8C160}" dt="2026-03-30T16:11:49.033" v="5260" actId="404"/>
+        <pc:sldMkLst>
+          <pc:docMk/>
+          <pc:sldMk cId="1164731917" sldId="266"/>
+        </pc:sldMkLst>
+        <pc:spChg chg="mod">
+          <ac:chgData name="Joe Nagel" userId="7dedc618e2aa6ce6" providerId="LiveId" clId="{9ECCC3C5-1F9C-40AE-8D6E-A626AAE8C160}" dt="2026-03-30T16:11:49.033" v="5260" actId="404"/>
+          <ac:spMkLst>
+            <pc:docMk/>
+            <pc:sldMk cId="1164731917" sldId="266"/>
+            <ac:spMk id="3" creationId="{5E9F71DB-A424-9130-C281-38B6D6257EEF}"/>
+          </ac:spMkLst>
+        </pc:spChg>
+      </pc:sldChg>
+      <pc:sldChg chg="modSp mod">
+        <pc:chgData name="Joe Nagel" userId="7dedc618e2aa6ce6" providerId="LiveId" clId="{9ECCC3C5-1F9C-40AE-8D6E-A626AAE8C160}" dt="2026-03-30T16:07:28.454" v="5182" actId="20577"/>
+        <pc:sldMkLst>
+          <pc:docMk/>
+          <pc:sldMk cId="2786423435" sldId="267"/>
+        </pc:sldMkLst>
+        <pc:spChg chg="mod">
+          <ac:chgData name="Joe Nagel" userId="7dedc618e2aa6ce6" providerId="LiveId" clId="{9ECCC3C5-1F9C-40AE-8D6E-A626AAE8C160}" dt="2026-03-30T16:07:28.454" v="5182" actId="20577"/>
+          <ac:spMkLst>
+            <pc:docMk/>
+            <pc:sldMk cId="2786423435" sldId="267"/>
+            <ac:spMk id="3" creationId="{796FEFB7-4389-490B-1B56-26F946C50484}"/>
+          </ac:spMkLst>
+        </pc:spChg>
+        <pc:picChg chg="mod">
+          <ac:chgData name="Joe Nagel" userId="7dedc618e2aa6ce6" providerId="LiveId" clId="{9ECCC3C5-1F9C-40AE-8D6E-A626AAE8C160}" dt="2026-03-30T00:38:35.039" v="4182" actId="1076"/>
+          <ac:picMkLst>
+            <pc:docMk/>
+            <pc:sldMk cId="2786423435" sldId="267"/>
+            <ac:picMk id="6" creationId="{8FEBFD63-E3DB-C15E-D933-1A607CAD5736}"/>
+          </ac:picMkLst>
+        </pc:picChg>
+        <pc:picChg chg="mod">
+          <ac:chgData name="Joe Nagel" userId="7dedc618e2aa6ce6" providerId="LiveId" clId="{9ECCC3C5-1F9C-40AE-8D6E-A626AAE8C160}" dt="2026-03-30T00:38:36.794" v="4183" actId="1076"/>
+          <ac:picMkLst>
+            <pc:docMk/>
+            <pc:sldMk cId="2786423435" sldId="267"/>
+            <ac:picMk id="8" creationId="{3029FCC0-C7F0-7BFE-3A31-EC127ADD3B54}"/>
+          </ac:picMkLst>
+        </pc:picChg>
+      </pc:sldChg>
+      <pc:sldChg chg="modSp add mod ord">
+        <pc:chgData name="Joe Nagel" userId="7dedc618e2aa6ce6" providerId="LiveId" clId="{9ECCC3C5-1F9C-40AE-8D6E-A626AAE8C160}" dt="2026-03-30T01:04:42.540" v="4758" actId="27636"/>
+        <pc:sldMkLst>
+          <pc:docMk/>
+          <pc:sldMk cId="1923005346" sldId="268"/>
+        </pc:sldMkLst>
+        <pc:spChg chg="mod">
+          <ac:chgData name="Joe Nagel" userId="7dedc618e2aa6ce6" providerId="LiveId" clId="{9ECCC3C5-1F9C-40AE-8D6E-A626AAE8C160}" dt="2026-03-30T00:41:27.517" v="4262" actId="20577"/>
+          <ac:spMkLst>
+            <pc:docMk/>
+            <pc:sldMk cId="1923005346" sldId="268"/>
+            <ac:spMk id="2" creationId="{B7E15DF0-49E9-0ACB-5E39-EFFA5F276AF2}"/>
+          </ac:spMkLst>
+        </pc:spChg>
+        <pc:spChg chg="mod">
+          <ac:chgData name="Joe Nagel" userId="7dedc618e2aa6ce6" providerId="LiveId" clId="{9ECCC3C5-1F9C-40AE-8D6E-A626AAE8C160}" dt="2026-03-30T01:04:42.540" v="4758" actId="27636"/>
+          <ac:spMkLst>
+            <pc:docMk/>
+            <pc:sldMk cId="1923005346" sldId="268"/>
+            <ac:spMk id="3" creationId="{02C28FE3-DE16-B5B9-C27A-53B0A3A05701}"/>
+          </ac:spMkLst>
+        </pc:spChg>
+      </pc:sldChg>
+      <pc:sldChg chg="addSp delSp modSp add mod ord">
+        <pc:chgData name="Joe Nagel" userId="7dedc618e2aa6ce6" providerId="LiveId" clId="{9ECCC3C5-1F9C-40AE-8D6E-A626AAE8C160}" dt="2026-03-30T01:09:48.583" v="5162" actId="1076"/>
+        <pc:sldMkLst>
+          <pc:docMk/>
+          <pc:sldMk cId="2377842193" sldId="269"/>
+        </pc:sldMkLst>
+        <pc:spChg chg="mod">
+          <ac:chgData name="Joe Nagel" userId="7dedc618e2aa6ce6" providerId="LiveId" clId="{9ECCC3C5-1F9C-40AE-8D6E-A626AAE8C160}" dt="2026-03-30T01:04:52.270" v="4763" actId="20577"/>
+          <ac:spMkLst>
+            <pc:docMk/>
+            <pc:sldMk cId="2377842193" sldId="269"/>
+            <ac:spMk id="2" creationId="{FA787F43-16FC-B2B3-E4E4-1CB095759AC0}"/>
+          </ac:spMkLst>
+        </pc:spChg>
+        <pc:spChg chg="mod">
+          <ac:chgData name="Joe Nagel" userId="7dedc618e2aa6ce6" providerId="LiveId" clId="{9ECCC3C5-1F9C-40AE-8D6E-A626AAE8C160}" dt="2026-03-30T01:08:59.006" v="5155" actId="14100"/>
+          <ac:spMkLst>
+            <pc:docMk/>
+            <pc:sldMk cId="2377842193" sldId="269"/>
+            <ac:spMk id="3" creationId="{F1FBDDB5-737A-F6D8-7EBA-503A951DEA3C}"/>
+          </ac:spMkLst>
+        </pc:spChg>
+        <pc:picChg chg="del">
+          <ac:chgData name="Joe Nagel" userId="7dedc618e2aa6ce6" providerId="LiveId" clId="{9ECCC3C5-1F9C-40AE-8D6E-A626AAE8C160}" dt="2026-03-30T01:08:07.487" v="5120" actId="478"/>
+          <ac:picMkLst>
+            <pc:docMk/>
+            <pc:sldMk cId="2377842193" sldId="269"/>
+            <ac:picMk id="6" creationId="{52CC1669-5800-A1CE-6CB9-B51B86A741CC}"/>
+          </ac:picMkLst>
+        </pc:picChg>
+        <pc:picChg chg="add del mod">
+          <ac:chgData name="Joe Nagel" userId="7dedc618e2aa6ce6" providerId="LiveId" clId="{9ECCC3C5-1F9C-40AE-8D6E-A626AAE8C160}" dt="2026-03-30T01:09:39.740" v="5159" actId="478"/>
+          <ac:picMkLst>
+            <pc:docMk/>
+            <pc:sldMk cId="2377842193" sldId="269"/>
+            <ac:picMk id="7" creationId="{A6C5ACCE-AFD2-6A27-2A0C-83D6BBA31345}"/>
+          </ac:picMkLst>
+        </pc:picChg>
+        <pc:picChg chg="del">
+          <ac:chgData name="Joe Nagel" userId="7dedc618e2aa6ce6" providerId="LiveId" clId="{9ECCC3C5-1F9C-40AE-8D6E-A626AAE8C160}" dt="2026-03-30T01:08:08.722" v="5121" actId="478"/>
+          <ac:picMkLst>
+            <pc:docMk/>
+            <pc:sldMk cId="2377842193" sldId="269"/>
+            <ac:picMk id="8" creationId="{A56F384B-02F2-52DF-CD21-00ABA2652BB0}"/>
+          </ac:picMkLst>
+        </pc:picChg>
+        <pc:picChg chg="add mod">
+          <ac:chgData name="Joe Nagel" userId="7dedc618e2aa6ce6" providerId="LiveId" clId="{9ECCC3C5-1F9C-40AE-8D6E-A626AAE8C160}" dt="2026-03-30T01:09:48.583" v="5162" actId="1076"/>
+          <ac:picMkLst>
+            <pc:docMk/>
+            <pc:sldMk cId="2377842193" sldId="269"/>
+            <ac:picMk id="10" creationId="{2B55E850-0884-AA74-BC0A-E8ED0CC215C9}"/>
+          </ac:picMkLst>
+        </pc:picChg>
       </pc:sldChg>
     </pc:docChg>
   </pc:docChgLst>
@@ -571,7 +715,7 @@
           <a:p>
             <a:fld id="{EE737CE6-89CC-4B26-BF23-83552D005AE3}" type="datetimeFigureOut">
               <a:rPr lang="en-US" smtClean="0"/>
-              <a:t>3/29/2026</a:t>
+              <a:t>3/30/2026</a:t>
             </a:fld>
             <a:endParaRPr lang="en-US"/>
           </a:p>
@@ -838,414 +982,6 @@
 </p:notesMaster>
 </file>
 
-<file path=ppt/notesSlides/notesSlide1.xml><?xml version="1.0" encoding="utf-8"?>
-<p:notes xmlns:a="http://schemas.openxmlformats.org/drawingml/2006/main" xmlns:r="http://schemas.openxmlformats.org/officeDocument/2006/relationships" xmlns:p="http://schemas.openxmlformats.org/presentationml/2006/main">
-  <p:cSld>
-    <p:spTree>
-      <p:nvGrpSpPr>
-        <p:cNvPr id="1" name=""/>
-        <p:cNvGrpSpPr/>
-        <p:nvPr/>
-      </p:nvGrpSpPr>
-      <p:grpSpPr>
-        <a:xfrm>
-          <a:off x="0" y="0"/>
-          <a:ext cx="0" cy="0"/>
-          <a:chOff x="0" y="0"/>
-          <a:chExt cx="0" cy="0"/>
-        </a:xfrm>
-      </p:grpSpPr>
-      <p:sp>
-        <p:nvSpPr>
-          <p:cNvPr id="2" name="Slide Image Placeholder 1"/>
-          <p:cNvSpPr>
-            <a:spLocks noGrp="1" noRot="1" noChangeAspect="1"/>
-          </p:cNvSpPr>
-          <p:nvPr>
-            <p:ph type="sldImg"/>
-          </p:nvPr>
-        </p:nvSpPr>
-        <p:spPr/>
-      </p:sp>
-      <p:sp>
-        <p:nvSpPr>
-          <p:cNvPr id="3" name="Notes Placeholder 2"/>
-          <p:cNvSpPr>
-            <a:spLocks noGrp="1"/>
-          </p:cNvSpPr>
-          <p:nvPr>
-            <p:ph type="body" idx="1"/>
-          </p:nvPr>
-        </p:nvSpPr>
-        <p:spPr/>
-        <p:txBody>
-          <a:bodyPr/>
-          <a:lstStyle/>
-          <a:p>
-            <a:endParaRPr lang="en-US" dirty="0"/>
-          </a:p>
-        </p:txBody>
-      </p:sp>
-      <p:sp>
-        <p:nvSpPr>
-          <p:cNvPr id="4" name="Slide Number Placeholder 3"/>
-          <p:cNvSpPr>
-            <a:spLocks noGrp="1"/>
-          </p:cNvSpPr>
-          <p:nvPr>
-            <p:ph type="sldNum" sz="quarter" idx="5"/>
-          </p:nvPr>
-        </p:nvSpPr>
-        <p:spPr/>
-        <p:txBody>
-          <a:bodyPr/>
-          <a:lstStyle/>
-          <a:p>
-            <a:fld id="{1D44A30F-841D-4919-B9D3-042B4608580B}" type="slidenum">
-              <a:rPr lang="en-US" smtClean="0"/>
-              <a:t>6</a:t>
-            </a:fld>
-            <a:endParaRPr lang="en-US"/>
-          </a:p>
-        </p:txBody>
-      </p:sp>
-    </p:spTree>
-    <p:extLst>
-      <p:ext uri="{BB962C8B-B14F-4D97-AF65-F5344CB8AC3E}">
-        <p14:creationId xmlns:p14="http://schemas.microsoft.com/office/powerpoint/2010/main" val="1244443015"/>
-      </p:ext>
-    </p:extLst>
-  </p:cSld>
-  <p:clrMapOvr>
-    <a:masterClrMapping/>
-  </p:clrMapOvr>
-</p:notes>
-</file>
-
-<file path=ppt/notesSlides/notesSlide2.xml><?xml version="1.0" encoding="utf-8"?>
-<p:notes xmlns:a="http://schemas.openxmlformats.org/drawingml/2006/main" xmlns:r="http://schemas.openxmlformats.org/officeDocument/2006/relationships" xmlns:p="http://schemas.openxmlformats.org/presentationml/2006/main">
-  <p:cSld>
-    <p:spTree>
-      <p:nvGrpSpPr>
-        <p:cNvPr id="1" name="">
-          <a:extLst>
-            <a:ext uri="{FF2B5EF4-FFF2-40B4-BE49-F238E27FC236}">
-              <a16:creationId xmlns:a16="http://schemas.microsoft.com/office/drawing/2014/main" id="{864ED6D6-8217-D812-1C3B-682A583B2A8D}"/>
-            </a:ext>
-          </a:extLst>
-        </p:cNvPr>
-        <p:cNvGrpSpPr/>
-        <p:nvPr/>
-      </p:nvGrpSpPr>
-      <p:grpSpPr>
-        <a:xfrm>
-          <a:off x="0" y="0"/>
-          <a:ext cx="0" cy="0"/>
-          <a:chOff x="0" y="0"/>
-          <a:chExt cx="0" cy="0"/>
-        </a:xfrm>
-      </p:grpSpPr>
-      <p:sp>
-        <p:nvSpPr>
-          <p:cNvPr id="2" name="Slide Image Placeholder 1">
-            <a:extLst>
-              <a:ext uri="{FF2B5EF4-FFF2-40B4-BE49-F238E27FC236}">
-                <a16:creationId xmlns:a16="http://schemas.microsoft.com/office/drawing/2014/main" id="{F74388A2-D711-432B-68A9-9FE693E851C5}"/>
-              </a:ext>
-            </a:extLst>
-          </p:cNvPr>
-          <p:cNvSpPr>
-            <a:spLocks noGrp="1" noRot="1" noChangeAspect="1"/>
-          </p:cNvSpPr>
-          <p:nvPr>
-            <p:ph type="sldImg"/>
-          </p:nvPr>
-        </p:nvSpPr>
-        <p:spPr/>
-      </p:sp>
-      <p:sp>
-        <p:nvSpPr>
-          <p:cNvPr id="3" name="Notes Placeholder 2">
-            <a:extLst>
-              <a:ext uri="{FF2B5EF4-FFF2-40B4-BE49-F238E27FC236}">
-                <a16:creationId xmlns:a16="http://schemas.microsoft.com/office/drawing/2014/main" id="{5C3BB00E-B0A6-00F9-24C0-49A41A97EDF3}"/>
-              </a:ext>
-            </a:extLst>
-          </p:cNvPr>
-          <p:cNvSpPr>
-            <a:spLocks noGrp="1"/>
-          </p:cNvSpPr>
-          <p:nvPr>
-            <p:ph type="body" idx="1"/>
-          </p:nvPr>
-        </p:nvSpPr>
-        <p:spPr/>
-        <p:txBody>
-          <a:bodyPr/>
-          <a:lstStyle/>
-          <a:p>
-            <a:endParaRPr lang="en-US" dirty="0"/>
-          </a:p>
-        </p:txBody>
-      </p:sp>
-      <p:sp>
-        <p:nvSpPr>
-          <p:cNvPr id="4" name="Slide Number Placeholder 3">
-            <a:extLst>
-              <a:ext uri="{FF2B5EF4-FFF2-40B4-BE49-F238E27FC236}">
-                <a16:creationId xmlns:a16="http://schemas.microsoft.com/office/drawing/2014/main" id="{41B24F18-AE06-3080-5D28-71FAFB14B956}"/>
-              </a:ext>
-            </a:extLst>
-          </p:cNvPr>
-          <p:cNvSpPr>
-            <a:spLocks noGrp="1"/>
-          </p:cNvSpPr>
-          <p:nvPr>
-            <p:ph type="sldNum" sz="quarter" idx="5"/>
-          </p:nvPr>
-        </p:nvSpPr>
-        <p:spPr/>
-        <p:txBody>
-          <a:bodyPr/>
-          <a:lstStyle/>
-          <a:p>
-            <a:fld id="{1D44A30F-841D-4919-B9D3-042B4608580B}" type="slidenum">
-              <a:rPr lang="en-US" smtClean="0"/>
-              <a:t>7</a:t>
-            </a:fld>
-            <a:endParaRPr lang="en-US"/>
-          </a:p>
-        </p:txBody>
-      </p:sp>
-    </p:spTree>
-    <p:extLst>
-      <p:ext uri="{BB962C8B-B14F-4D97-AF65-F5344CB8AC3E}">
-        <p14:creationId xmlns:p14="http://schemas.microsoft.com/office/powerpoint/2010/main" val="3775692111"/>
-      </p:ext>
-    </p:extLst>
-  </p:cSld>
-  <p:clrMapOvr>
-    <a:masterClrMapping/>
-  </p:clrMapOvr>
-</p:notes>
-</file>
-
-<file path=ppt/notesSlides/notesSlide3.xml><?xml version="1.0" encoding="utf-8"?>
-<p:notes xmlns:a="http://schemas.openxmlformats.org/drawingml/2006/main" xmlns:r="http://schemas.openxmlformats.org/officeDocument/2006/relationships" xmlns:p="http://schemas.openxmlformats.org/presentationml/2006/main">
-  <p:cSld>
-    <p:spTree>
-      <p:nvGrpSpPr>
-        <p:cNvPr id="1" name="">
-          <a:extLst>
-            <a:ext uri="{FF2B5EF4-FFF2-40B4-BE49-F238E27FC236}">
-              <a16:creationId xmlns:a16="http://schemas.microsoft.com/office/drawing/2014/main" id="{4CE211FB-B4DD-13D1-BF6D-E3AE00F96EE0}"/>
-            </a:ext>
-          </a:extLst>
-        </p:cNvPr>
-        <p:cNvGrpSpPr/>
-        <p:nvPr/>
-      </p:nvGrpSpPr>
-      <p:grpSpPr>
-        <a:xfrm>
-          <a:off x="0" y="0"/>
-          <a:ext cx="0" cy="0"/>
-          <a:chOff x="0" y="0"/>
-          <a:chExt cx="0" cy="0"/>
-        </a:xfrm>
-      </p:grpSpPr>
-      <p:sp>
-        <p:nvSpPr>
-          <p:cNvPr id="2" name="Slide Image Placeholder 1">
-            <a:extLst>
-              <a:ext uri="{FF2B5EF4-FFF2-40B4-BE49-F238E27FC236}">
-                <a16:creationId xmlns:a16="http://schemas.microsoft.com/office/drawing/2014/main" id="{97686612-00F1-07CC-1783-BF0B7736A74E}"/>
-              </a:ext>
-            </a:extLst>
-          </p:cNvPr>
-          <p:cNvSpPr>
-            <a:spLocks noGrp="1" noRot="1" noChangeAspect="1"/>
-          </p:cNvSpPr>
-          <p:nvPr>
-            <p:ph type="sldImg"/>
-          </p:nvPr>
-        </p:nvSpPr>
-        <p:spPr/>
-      </p:sp>
-      <p:sp>
-        <p:nvSpPr>
-          <p:cNvPr id="3" name="Notes Placeholder 2">
-            <a:extLst>
-              <a:ext uri="{FF2B5EF4-FFF2-40B4-BE49-F238E27FC236}">
-                <a16:creationId xmlns:a16="http://schemas.microsoft.com/office/drawing/2014/main" id="{D5526E2D-A669-9746-4DA8-0759EE5B3B60}"/>
-              </a:ext>
-            </a:extLst>
-          </p:cNvPr>
-          <p:cNvSpPr>
-            <a:spLocks noGrp="1"/>
-          </p:cNvSpPr>
-          <p:nvPr>
-            <p:ph type="body" idx="1"/>
-          </p:nvPr>
-        </p:nvSpPr>
-        <p:spPr/>
-        <p:txBody>
-          <a:bodyPr/>
-          <a:lstStyle/>
-          <a:p>
-            <a:endParaRPr lang="en-US" dirty="0"/>
-          </a:p>
-        </p:txBody>
-      </p:sp>
-      <p:sp>
-        <p:nvSpPr>
-          <p:cNvPr id="4" name="Slide Number Placeholder 3">
-            <a:extLst>
-              <a:ext uri="{FF2B5EF4-FFF2-40B4-BE49-F238E27FC236}">
-                <a16:creationId xmlns:a16="http://schemas.microsoft.com/office/drawing/2014/main" id="{C494DF81-EDD7-2514-1996-D1CE8A2BCD62}"/>
-              </a:ext>
-            </a:extLst>
-          </p:cNvPr>
-          <p:cNvSpPr>
-            <a:spLocks noGrp="1"/>
-          </p:cNvSpPr>
-          <p:nvPr>
-            <p:ph type="sldNum" sz="quarter" idx="5"/>
-          </p:nvPr>
-        </p:nvSpPr>
-        <p:spPr/>
-        <p:txBody>
-          <a:bodyPr/>
-          <a:lstStyle/>
-          <a:p>
-            <a:fld id="{1D44A30F-841D-4919-B9D3-042B4608580B}" type="slidenum">
-              <a:rPr lang="en-US" smtClean="0"/>
-              <a:t>8</a:t>
-            </a:fld>
-            <a:endParaRPr lang="en-US"/>
-          </a:p>
-        </p:txBody>
-      </p:sp>
-    </p:spTree>
-    <p:extLst>
-      <p:ext uri="{BB962C8B-B14F-4D97-AF65-F5344CB8AC3E}">
-        <p14:creationId xmlns:p14="http://schemas.microsoft.com/office/powerpoint/2010/main" val="2571500104"/>
-      </p:ext>
-    </p:extLst>
-  </p:cSld>
-  <p:clrMapOvr>
-    <a:masterClrMapping/>
-  </p:clrMapOvr>
-</p:notes>
-</file>
-
-<file path=ppt/notesSlides/notesSlide4.xml><?xml version="1.0" encoding="utf-8"?>
-<p:notes xmlns:a="http://schemas.openxmlformats.org/drawingml/2006/main" xmlns:r="http://schemas.openxmlformats.org/officeDocument/2006/relationships" xmlns:p="http://schemas.openxmlformats.org/presentationml/2006/main">
-  <p:cSld>
-    <p:spTree>
-      <p:nvGrpSpPr>
-        <p:cNvPr id="1" name="">
-          <a:extLst>
-            <a:ext uri="{FF2B5EF4-FFF2-40B4-BE49-F238E27FC236}">
-              <a16:creationId xmlns:a16="http://schemas.microsoft.com/office/drawing/2014/main" id="{BFD3087A-1D11-F3ED-A2A3-FCDEC7DD34BA}"/>
-            </a:ext>
-          </a:extLst>
-        </p:cNvPr>
-        <p:cNvGrpSpPr/>
-        <p:nvPr/>
-      </p:nvGrpSpPr>
-      <p:grpSpPr>
-        <a:xfrm>
-          <a:off x="0" y="0"/>
-          <a:ext cx="0" cy="0"/>
-          <a:chOff x="0" y="0"/>
-          <a:chExt cx="0" cy="0"/>
-        </a:xfrm>
-      </p:grpSpPr>
-      <p:sp>
-        <p:nvSpPr>
-          <p:cNvPr id="2" name="Slide Image Placeholder 1">
-            <a:extLst>
-              <a:ext uri="{FF2B5EF4-FFF2-40B4-BE49-F238E27FC236}">
-                <a16:creationId xmlns:a16="http://schemas.microsoft.com/office/drawing/2014/main" id="{184F2A84-D3AD-F195-3C4E-39A4CE7D71DD}"/>
-              </a:ext>
-            </a:extLst>
-          </p:cNvPr>
-          <p:cNvSpPr>
-            <a:spLocks noGrp="1" noRot="1" noChangeAspect="1"/>
-          </p:cNvSpPr>
-          <p:nvPr>
-            <p:ph type="sldImg"/>
-          </p:nvPr>
-        </p:nvSpPr>
-        <p:spPr/>
-      </p:sp>
-      <p:sp>
-        <p:nvSpPr>
-          <p:cNvPr id="3" name="Notes Placeholder 2">
-            <a:extLst>
-              <a:ext uri="{FF2B5EF4-FFF2-40B4-BE49-F238E27FC236}">
-                <a16:creationId xmlns:a16="http://schemas.microsoft.com/office/drawing/2014/main" id="{7EBF9FF0-727E-0B77-0FDF-44114BF61D78}"/>
-              </a:ext>
-            </a:extLst>
-          </p:cNvPr>
-          <p:cNvSpPr>
-            <a:spLocks noGrp="1"/>
-          </p:cNvSpPr>
-          <p:nvPr>
-            <p:ph type="body" idx="1"/>
-          </p:nvPr>
-        </p:nvSpPr>
-        <p:spPr/>
-        <p:txBody>
-          <a:bodyPr/>
-          <a:lstStyle/>
-          <a:p>
-            <a:endParaRPr lang="en-US" dirty="0"/>
-          </a:p>
-        </p:txBody>
-      </p:sp>
-      <p:sp>
-        <p:nvSpPr>
-          <p:cNvPr id="4" name="Slide Number Placeholder 3">
-            <a:extLst>
-              <a:ext uri="{FF2B5EF4-FFF2-40B4-BE49-F238E27FC236}">
-                <a16:creationId xmlns:a16="http://schemas.microsoft.com/office/drawing/2014/main" id="{05994979-1457-BE44-CDFA-15477E1E012F}"/>
-              </a:ext>
-            </a:extLst>
-          </p:cNvPr>
-          <p:cNvSpPr>
-            <a:spLocks noGrp="1"/>
-          </p:cNvSpPr>
-          <p:nvPr>
-            <p:ph type="sldNum" sz="quarter" idx="5"/>
-          </p:nvPr>
-        </p:nvSpPr>
-        <p:spPr/>
-        <p:txBody>
-          <a:bodyPr/>
-          <a:lstStyle/>
-          <a:p>
-            <a:fld id="{1D44A30F-841D-4919-B9D3-042B4608580B}" type="slidenum">
-              <a:rPr lang="en-US" smtClean="0"/>
-              <a:t>9</a:t>
-            </a:fld>
-            <a:endParaRPr lang="en-US"/>
-          </a:p>
-        </p:txBody>
-      </p:sp>
-    </p:spTree>
-    <p:extLst>
-      <p:ext uri="{BB962C8B-B14F-4D97-AF65-F5344CB8AC3E}">
-        <p14:creationId xmlns:p14="http://schemas.microsoft.com/office/powerpoint/2010/main" val="2398228325"/>
-      </p:ext>
-    </p:extLst>
-  </p:cSld>
-  <p:clrMapOvr>
-    <a:masterClrMapping/>
-  </p:clrMapOvr>
-</p:notes>
-</file>
-
 <file path=ppt/slideLayouts/slideLayout1.xml><?xml version="1.0" encoding="utf-8"?>
 <p:sldLayout xmlns:a="http://schemas.openxmlformats.org/drawingml/2006/main" xmlns:r="http://schemas.openxmlformats.org/officeDocument/2006/relationships" xmlns:p="http://schemas.openxmlformats.org/presentationml/2006/main" type="title" preserve="1">
   <p:cSld name="Title Slide">
@@ -1393,7 +1129,7 @@
           <a:p>
             <a:fld id="{BA94432C-A2F8-4335-967E-A9297080D7C3}" type="datetimeFigureOut">
               <a:rPr lang="en-US" smtClean="0"/>
-              <a:t>3/29/2026</a:t>
+              <a:t>3/30/2026</a:t>
             </a:fld>
             <a:endParaRPr lang="en-US"/>
           </a:p>
@@ -1591,7 +1327,7 @@
           <a:p>
             <a:fld id="{BA94432C-A2F8-4335-967E-A9297080D7C3}" type="datetimeFigureOut">
               <a:rPr lang="en-US" smtClean="0"/>
-              <a:t>3/29/2026</a:t>
+              <a:t>3/30/2026</a:t>
             </a:fld>
             <a:endParaRPr lang="en-US"/>
           </a:p>
@@ -1799,7 +1535,7 @@
           <a:p>
             <a:fld id="{BA94432C-A2F8-4335-967E-A9297080D7C3}" type="datetimeFigureOut">
               <a:rPr lang="en-US" smtClean="0"/>
-              <a:t>3/29/2026</a:t>
+              <a:t>3/30/2026</a:t>
             </a:fld>
             <a:endParaRPr lang="en-US"/>
           </a:p>
@@ -1997,7 +1733,7 @@
           <a:p>
             <a:fld id="{BA94432C-A2F8-4335-967E-A9297080D7C3}" type="datetimeFigureOut">
               <a:rPr lang="en-US" smtClean="0"/>
-              <a:t>3/29/2026</a:t>
+              <a:t>3/30/2026</a:t>
             </a:fld>
             <a:endParaRPr lang="en-US"/>
           </a:p>
@@ -2272,7 +2008,7 @@
           <a:p>
             <a:fld id="{BA94432C-A2F8-4335-967E-A9297080D7C3}" type="datetimeFigureOut">
               <a:rPr lang="en-US" smtClean="0"/>
-              <a:t>3/29/2026</a:t>
+              <a:t>3/30/2026</a:t>
             </a:fld>
             <a:endParaRPr lang="en-US"/>
           </a:p>
@@ -2537,7 +2273,7 @@
           <a:p>
             <a:fld id="{BA94432C-A2F8-4335-967E-A9297080D7C3}" type="datetimeFigureOut">
               <a:rPr lang="en-US" smtClean="0"/>
-              <a:t>3/29/2026</a:t>
+              <a:t>3/30/2026</a:t>
             </a:fld>
             <a:endParaRPr lang="en-US"/>
           </a:p>
@@ -2949,7 +2685,7 @@
           <a:p>
             <a:fld id="{BA94432C-A2F8-4335-967E-A9297080D7C3}" type="datetimeFigureOut">
               <a:rPr lang="en-US" smtClean="0"/>
-              <a:t>3/29/2026</a:t>
+              <a:t>3/30/2026</a:t>
             </a:fld>
             <a:endParaRPr lang="en-US"/>
           </a:p>
@@ -3090,7 +2826,7 @@
           <a:p>
             <a:fld id="{BA94432C-A2F8-4335-967E-A9297080D7C3}" type="datetimeFigureOut">
               <a:rPr lang="en-US" smtClean="0"/>
-              <a:t>3/29/2026</a:t>
+              <a:t>3/30/2026</a:t>
             </a:fld>
             <a:endParaRPr lang="en-US"/>
           </a:p>
@@ -3203,7 +2939,7 @@
           <a:p>
             <a:fld id="{BA94432C-A2F8-4335-967E-A9297080D7C3}" type="datetimeFigureOut">
               <a:rPr lang="en-US" smtClean="0"/>
-              <a:t>3/29/2026</a:t>
+              <a:t>3/30/2026</a:t>
             </a:fld>
             <a:endParaRPr lang="en-US"/>
           </a:p>
@@ -3514,7 +3250,7 @@
           <a:p>
             <a:fld id="{BA94432C-A2F8-4335-967E-A9297080D7C3}" type="datetimeFigureOut">
               <a:rPr lang="en-US" smtClean="0"/>
-              <a:t>3/29/2026</a:t>
+              <a:t>3/30/2026</a:t>
             </a:fld>
             <a:endParaRPr lang="en-US"/>
           </a:p>
@@ -3802,7 +3538,7 @@
           <a:p>
             <a:fld id="{BA94432C-A2F8-4335-967E-A9297080D7C3}" type="datetimeFigureOut">
               <a:rPr lang="en-US" smtClean="0"/>
-              <a:t>3/29/2026</a:t>
+              <a:t>3/30/2026</a:t>
             </a:fld>
             <a:endParaRPr lang="en-US"/>
           </a:p>
@@ -4043,7 +3779,7 @@
           <a:p>
             <a:fld id="{BA94432C-A2F8-4335-967E-A9297080D7C3}" type="datetimeFigureOut">
               <a:rPr lang="en-US" smtClean="0"/>
-              <a:t>3/29/2026</a:t>
+              <a:t>3/30/2026</a:t>
             </a:fld>
             <a:endParaRPr lang="en-US"/>
           </a:p>
@@ -5144,128 +4880,128 @@
         </p:nvSpPr>
         <p:spPr>
           <a:xfrm>
-            <a:off x="1189182" y="1825625"/>
-            <a:ext cx="4523974" cy="4351338"/>
+            <a:off x="1189182" y="1825624"/>
+            <a:ext cx="4523974" cy="4801419"/>
           </a:xfrm>
         </p:spPr>
         <p:txBody>
           <a:bodyPr>
-            <a:normAutofit fontScale="70000" lnSpcReduction="20000"/>
+            <a:normAutofit fontScale="92500" lnSpcReduction="10000"/>
           </a:bodyPr>
           <a:lstStyle/>
           <a:p>
             <a:r>
-              <a:rPr lang="en-US" sz="2400" dirty="0"/>
+              <a:rPr lang="en-US" sz="1800" dirty="0"/>
               <a:t>Sample Size</a:t>
             </a:r>
           </a:p>
           <a:p>
             <a:pPr lvl="1"/>
             <a:r>
-              <a:rPr lang="en-US" sz="2000" dirty="0"/>
+              <a:rPr lang="en-US" sz="1600" dirty="0"/>
               <a:t>Target 175</a:t>
             </a:r>
           </a:p>
           <a:p>
             <a:pPr lvl="1"/>
             <a:r>
-              <a:rPr lang="en-US" sz="2000" dirty="0"/>
+              <a:rPr lang="en-US" sz="1600" dirty="0"/>
               <a:t>Accounting for 10% attrition</a:t>
             </a:r>
           </a:p>
           <a:p>
             <a:r>
-              <a:rPr lang="en-US" sz="2400" dirty="0"/>
+              <a:rPr lang="en-US" sz="1800" dirty="0"/>
               <a:t>Outcomes (Baseline – Year 1)</a:t>
             </a:r>
           </a:p>
           <a:p>
             <a:pPr lvl="1"/>
             <a:r>
-              <a:rPr lang="en-US" sz="2000" dirty="0"/>
+              <a:rPr lang="en-US" sz="1600" dirty="0"/>
               <a:t>AD-Signature Cortial Thickness (continuous)</a:t>
             </a:r>
           </a:p>
           <a:p>
             <a:pPr lvl="1"/>
             <a:r>
-              <a:rPr lang="en-US" sz="2000" dirty="0"/>
+              <a:rPr lang="en-US" sz="1600" dirty="0"/>
               <a:t>Cognitive measures (continuous)</a:t>
             </a:r>
           </a:p>
           <a:p>
             <a:r>
-              <a:rPr lang="en-US" sz="2400" dirty="0"/>
+              <a:rPr lang="en-US" sz="1800" dirty="0"/>
               <a:t>Inflammation Measures</a:t>
             </a:r>
           </a:p>
           <a:p>
             <a:pPr lvl="1"/>
             <a:r>
+              <a:rPr lang="en-US" sz="1500" dirty="0"/>
+              <a:t>Cytokines: IL-6, TNF-alpha</a:t>
+            </a:r>
+          </a:p>
+          <a:p>
+            <a:pPr lvl="1"/>
+            <a:r>
+              <a:rPr lang="en-US" sz="1500" dirty="0"/>
+              <a:t>Chemokines: MCP-1, eotaxin-1</a:t>
+            </a:r>
+          </a:p>
+          <a:p>
+            <a:r>
               <a:rPr lang="en-US" sz="1800" dirty="0"/>
-              <a:t>Cytokines: IL-6, TNF-alpha</a:t>
+              <a:t>Covariates</a:t>
             </a:r>
           </a:p>
           <a:p>
             <a:pPr lvl="1"/>
             <a:r>
-              <a:rPr lang="en-US" sz="1800" dirty="0"/>
-              <a:t>Chemokines: MCP-1, eotaxin-1</a:t>
-            </a:r>
-          </a:p>
-          <a:p>
-            <a:r>
-              <a:rPr lang="en-US" sz="2400" dirty="0"/>
-              <a:t>Covariates</a:t>
+              <a:rPr lang="en-US" sz="1600" dirty="0"/>
+              <a:t>Demographics</a:t>
+            </a:r>
+          </a:p>
+          <a:p>
+            <a:pPr lvl="2"/>
+            <a:r>
+              <a:rPr lang="en-US" sz="1500" dirty="0"/>
+              <a:t>Age, Sex</a:t>
             </a:r>
           </a:p>
           <a:p>
             <a:pPr lvl="1"/>
             <a:r>
-              <a:rPr lang="en-US" sz="2000" dirty="0"/>
-              <a:t>Demographics</a:t>
+              <a:rPr lang="en-US" sz="1600" dirty="0"/>
+              <a:t>Cardiovascular risk markers</a:t>
             </a:r>
           </a:p>
           <a:p>
             <a:pPr lvl="2"/>
             <a:r>
+              <a:rPr lang="en-US" sz="1500" dirty="0"/>
+              <a:t>BMI, blood pressure, history of hypercholesterolemia</a:t>
+            </a:r>
+          </a:p>
+          <a:p>
+            <a:pPr lvl="1"/>
+            <a:r>
               <a:rPr lang="en-US" sz="1600" dirty="0"/>
-              <a:t>Age, Sex</a:t>
+              <a:t>NSAID use</a:t>
             </a:r>
           </a:p>
           <a:p>
             <a:pPr lvl="1"/>
             <a:r>
-              <a:rPr lang="en-US" sz="2000" dirty="0"/>
-              <a:t>Cardiovascular risk markers</a:t>
+              <a:rPr lang="en-US" sz="1600" dirty="0"/>
+              <a:t>Immune-related health conditions</a:t>
             </a:r>
           </a:p>
           <a:p>
             <a:pPr lvl="2"/>
             <a:r>
-              <a:rPr lang="en-US" sz="1600" dirty="0"/>
-              <a:t>BMI, blood pressure, history of hypercholesterolemia</a:t>
-            </a:r>
-          </a:p>
-          <a:p>
-            <a:pPr lvl="1"/>
-            <a:r>
-              <a:rPr lang="en-US" sz="2000" dirty="0"/>
-              <a:t>NSAID use</a:t>
-            </a:r>
-          </a:p>
-          <a:p>
-            <a:pPr lvl="1"/>
-            <a:r>
-              <a:rPr lang="en-US" sz="2000" dirty="0"/>
-              <a:t>Immune-related health conditions</a:t>
-            </a:r>
-          </a:p>
-          <a:p>
-            <a:pPr lvl="2"/>
-            <a:r>
-              <a:rPr lang="en-US" sz="1600" dirty="0"/>
-              <a:t>Crohn's disease, irritable bowel syndrome, and arthritis</a:t>
+              <a:rPr lang="en-US" sz="1500" dirty="0"/>
+              <a:t>Crohn's disease, irritable bowel syndrome (IBS), and arthritis</a:t>
             </a:r>
           </a:p>
         </p:txBody>
@@ -5447,143 +5183,161 @@
             <p:spPr>
               <a:xfrm>
                 <a:off x="1189181" y="1825625"/>
-                <a:ext cx="7862053" cy="4351338"/>
+                <a:ext cx="10311520" cy="4351338"/>
               </a:xfrm>
             </p:spPr>
             <p:txBody>
-              <a:bodyPr>
-                <a:normAutofit fontScale="92500" lnSpcReduction="20000"/>
+              <a:bodyPr numCol="2">
+                <a:normAutofit/>
               </a:bodyPr>
               <a:lstStyle/>
               <a:p>
                 <a:r>
-                  <a:rPr lang="en-US" sz="1600" dirty="0"/>
+                  <a:rPr lang="en-US" sz="2000" dirty="0"/>
                   <a:t>Primary models</a:t>
                 </a:r>
               </a:p>
               <a:p>
                 <a:pPr lvl="1"/>
                 <a:r>
-                  <a:rPr lang="en-US" sz="1200" dirty="0"/>
+                  <a:rPr lang="en-US" sz="1600" dirty="0"/>
                   <a:t>Linear Regressions of Change in Outcomes (baseline – Year 1)</a:t>
                 </a:r>
               </a:p>
               <a:p>
                 <a:r>
-                  <a:rPr lang="en-US" sz="1600" dirty="0"/>
+                  <a:rPr lang="en-US" sz="2000" dirty="0"/>
                   <a:t>Hypothesis 1a</a:t>
                 </a:r>
               </a:p>
               <a:p>
                 <a:pPr lvl="1"/>
                 <a:r>
-                  <a:rPr lang="en-US" sz="1200" dirty="0"/>
+                  <a:rPr lang="en-US" sz="1600" dirty="0"/>
                   <a:t>Outcome Change by </a:t>
                 </a:r>
                 <a:r>
-                  <a:rPr lang="en-US" sz="1200" b="1" dirty="0"/>
+                  <a:rPr lang="en-US" sz="1600" b="1" dirty="0"/>
                   <a:t>Baseline Inflammation Measures</a:t>
                 </a:r>
               </a:p>
               <a:p>
                 <a:pPr lvl="1"/>
                 <a:r>
-                  <a:rPr lang="en-US" sz="1200" dirty="0"/>
+                  <a:rPr lang="en-US" sz="1600" dirty="0"/>
                   <a:t>Adjusting for baseline outcome</a:t>
                 </a:r>
               </a:p>
               <a:p>
                 <a:r>
-                  <a:rPr lang="en-US" sz="1600" dirty="0"/>
+                  <a:rPr lang="en-US" sz="2000" dirty="0"/>
                   <a:t>Hypothesis 2a</a:t>
                 </a:r>
               </a:p>
               <a:p>
                 <a:pPr lvl="1"/>
                 <a:r>
-                  <a:rPr lang="en-US" sz="1200" dirty="0"/>
+                  <a:rPr lang="en-US" sz="1600" dirty="0"/>
                   <a:t>Outcome Change by </a:t>
                 </a:r>
                 <a:r>
-                  <a:rPr lang="en-US" sz="1200" b="1" dirty="0"/>
-                  <a:t>Change in Inflammation Measures</a:t>
+                  <a:rPr lang="en-US" sz="1600" b="1" dirty="0"/>
+                  <a:t>Change in Inflammation Measures </a:t>
+                </a:r>
+                <a:r>
+                  <a:rPr lang="en-US" sz="1600" dirty="0"/>
+                  <a:t>(baseline – Year 1)</a:t>
                 </a:r>
               </a:p>
               <a:p>
                 <a:pPr lvl="1"/>
                 <a:r>
-                  <a:rPr lang="en-US" sz="1200" dirty="0"/>
+                  <a:rPr lang="en-US" sz="1600" dirty="0"/>
                   <a:t>Adjusting for baseline outcome</a:t>
                 </a:r>
               </a:p>
               <a:p>
                 <a:r>
-                  <a:rPr lang="en-US" sz="1600" dirty="0"/>
+                  <a:rPr lang="en-US" sz="2000" dirty="0"/>
                   <a:t>Covariates</a:t>
                 </a:r>
               </a:p>
               <a:p>
                 <a:pPr lvl="1"/>
                 <a:r>
-                  <a:rPr lang="en-US" sz="1200" dirty="0"/>
+                  <a:rPr lang="en-US" sz="1600" dirty="0"/>
                   <a:t>Age, Sex, Variables Related to Inflammation (determined with exploratory analysis)</a:t>
                 </a:r>
               </a:p>
               <a:p>
                 <a:r>
-                  <a:rPr lang="en-US" sz="1600" dirty="0"/>
+                  <a:rPr lang="en-US" sz="2000" dirty="0"/>
                   <a:t>Testing</a:t>
                 </a:r>
               </a:p>
               <a:p>
                 <a:pPr lvl="1"/>
                 <a:r>
-                  <a:rPr lang="en-US" sz="1200" dirty="0"/>
+                  <a:rPr lang="en-US" sz="1600" dirty="0"/>
                   <a:t>Omnibus Test of Inflammation Measures</a:t>
                 </a:r>
               </a:p>
               <a:p>
                 <a:pPr lvl="1"/>
                 <a:r>
-                  <a:rPr lang="en-US" sz="1200" dirty="0"/>
+                  <a:rPr lang="en-US" sz="1600" dirty="0"/>
                   <a:t>Follow-up using standardized estimates and CIs if significant</a:t>
                 </a:r>
               </a:p>
               <a:p>
                 <a:r>
-                  <a:rPr lang="en-US" sz="1600" dirty="0"/>
+                  <a:rPr lang="en-US" sz="2000" dirty="0"/>
                   <a:t>Multicollinearity Plan</a:t>
                 </a:r>
               </a:p>
               <a:p>
                 <a:pPr lvl="1"/>
                 <a:r>
-                  <a:rPr lang="en-US" sz="1200" dirty="0"/>
+                  <a:rPr lang="en-US" sz="1600" dirty="0"/>
                   <a:t>Fit outcome change by each inflammation measure </a:t>
                 </a:r>
                 <a:r>
-                  <a:rPr lang="en-US" sz="1200" b="1" dirty="0"/>
+                  <a:rPr lang="en-US" sz="1600" b="1" dirty="0"/>
                   <a:t>separately</a:t>
                 </a:r>
               </a:p>
               <a:p>
                 <a:r>
-                  <a:rPr lang="en-US" sz="1600" dirty="0"/>
+                  <a:rPr lang="en-US" sz="2000" dirty="0"/>
                   <a:t>Type I Error Control</a:t>
                 </a:r>
               </a:p>
               <a:p>
                 <a:pPr lvl="1"/>
                 <a:r>
-                  <a:rPr lang="en-US" sz="1200" dirty="0"/>
+                  <a:rPr lang="en-US" sz="1600" dirty="0"/>
                   <a:t>Gatekeep with omnibus tests</a:t>
                 </a:r>
               </a:p>
               <a:p>
                 <a:pPr lvl="1"/>
                 <a:r>
-                  <a:rPr lang="en-US" sz="1200" dirty="0"/>
+                  <a:rPr lang="en-US" sz="1600" dirty="0"/>
                   <a:t>Bonferroni correction for testing two main outcomes</a:t>
+                </a:r>
+              </a:p>
+              <a:p>
+                <a:pPr lvl="2"/>
+                <a:r>
+                  <a:rPr lang="en-US" sz="1400" dirty="0"/>
+                  <a:t>Cortical Thickness</a:t>
+                </a:r>
+              </a:p>
+              <a:p>
+                <a:pPr lvl="2"/>
+                <a:r>
+                  <a:rPr lang="en-US" sz="1400" dirty="0"/>
+                  <a:t>Cognitive Measures</a:t>
                 </a:r>
               </a:p>
               <a:p>
@@ -5594,20 +5348,20 @@
                       <m:rPr>
                         <m:sty m:val="p"/>
                       </m:rPr>
-                      <a:rPr lang="en-US" sz="1200" b="0" i="1" smtClean="0">
+                      <a:rPr lang="en-US" sz="1600" b="0" i="1" smtClean="0">
                         <a:latin typeface="Cambria Math" panose="02040503050406030204" pitchFamily="18" charset="0"/>
                       </a:rPr>
                       <m:t>α</m:t>
                     </m:r>
                     <m:r>
-                      <a:rPr lang="en-US" sz="1200" b="0" i="1" smtClean="0">
+                      <a:rPr lang="en-US" sz="1600" b="0" i="1" smtClean="0">
                         <a:latin typeface="Cambria Math" panose="02040503050406030204" pitchFamily="18" charset="0"/>
                       </a:rPr>
                       <m:t>=0.05/2=0.025</m:t>
                     </m:r>
                   </m:oMath>
                 </a14:m>
-                <a:endParaRPr lang="en-US" sz="1200" dirty="0"/>
+                <a:endParaRPr lang="en-US" sz="1600" dirty="0"/>
               </a:p>
             </p:txBody>
           </p:sp>
@@ -5632,12 +5386,12 @@
             <p:spPr>
               <a:xfrm>
                 <a:off x="1189181" y="1825625"/>
-                <a:ext cx="7862053" cy="4351338"/>
+                <a:ext cx="10311520" cy="4351338"/>
               </a:xfrm>
               <a:blipFill>
                 <a:blip r:embed="rId2"/>
                 <a:stretch>
-                  <a:fillRect l="-233" t="-1401"/>
+                  <a:fillRect l="-532" t="-1261" r="-414"/>
                 </a:stretch>
               </a:blipFill>
             </p:spPr>
@@ -5808,12 +5562,12 @@
             </p:spPr>
             <p:txBody>
               <a:bodyPr>
-                <a:normAutofit/>
+                <a:normAutofit lnSpcReduction="10000"/>
               </a:bodyPr>
               <a:lstStyle/>
               <a:p>
                 <a:r>
-                  <a:rPr lang="en-US" sz="1500" dirty="0"/>
+                  <a:rPr lang="en-US" sz="1800" dirty="0"/>
                   <a:t>Sample Size: </a:t>
                 </a:r>
                 <a14:m>
@@ -5822,24 +5576,24 @@
                       <m:rPr>
                         <m:sty m:val="p"/>
                       </m:rPr>
-                      <a:rPr lang="en-US" sz="1500" b="0" i="1" smtClean="0">
+                      <a:rPr lang="en-US" sz="1800" b="0" i="1" smtClean="0">
                         <a:latin typeface="Cambria Math" panose="02040503050406030204" pitchFamily="18" charset="0"/>
                       </a:rPr>
                       <m:t>n</m:t>
                     </m:r>
                     <m:r>
-                      <a:rPr lang="en-US" sz="1500" b="0" i="1" smtClean="0">
+                      <a:rPr lang="en-US" sz="1800" b="0" i="1" smtClean="0">
                         <a:latin typeface="Cambria Math" panose="02040503050406030204" pitchFamily="18" charset="0"/>
                       </a:rPr>
                       <m:t>=175</m:t>
                     </m:r>
                   </m:oMath>
                 </a14:m>
-                <a:endParaRPr lang="en-US" sz="1500" dirty="0"/>
+                <a:endParaRPr lang="en-US" sz="1800" dirty="0"/>
               </a:p>
               <a:p>
                 <a:r>
-                  <a:rPr lang="en-US" sz="1500" dirty="0"/>
+                  <a:rPr lang="en-US" sz="1800" dirty="0"/>
                   <a:t>Type I Error Rate: </a:t>
                 </a:r>
                 <a14:m>
@@ -5848,46 +5602,46 @@
                       <m:rPr>
                         <m:sty m:val="p"/>
                       </m:rPr>
-                      <a:rPr lang="en-US" sz="1500" b="0" i="1" smtClean="0">
+                      <a:rPr lang="en-US" sz="1800" b="0" i="1" smtClean="0">
                         <a:latin typeface="Cambria Math" panose="02040503050406030204" pitchFamily="18" charset="0"/>
                       </a:rPr>
                       <m:t>α</m:t>
                     </m:r>
                     <m:r>
-                      <a:rPr lang="en-US" sz="1500" b="0" i="1" smtClean="0">
+                      <a:rPr lang="en-US" sz="1800" b="0" i="1" smtClean="0">
                         <a:latin typeface="Cambria Math" panose="02040503050406030204" pitchFamily="18" charset="0"/>
                       </a:rPr>
                       <m:t>=0.025</m:t>
                     </m:r>
                   </m:oMath>
                 </a14:m>
-                <a:endParaRPr lang="en-US" sz="1500" dirty="0"/>
+                <a:endParaRPr lang="en-US" sz="1800" dirty="0"/>
               </a:p>
               <a:p>
                 <a:r>
-                  <a:rPr lang="en-US" sz="1500" dirty="0"/>
-                  <a:t>Omnibus Test Power</a:t>
+                  <a:rPr lang="en-US" sz="1800" dirty="0"/>
+                  <a:t>Effect Estimates</a:t>
                 </a:r>
               </a:p>
               <a:p>
                 <a:pPr lvl="1"/>
                 <a:r>
-                  <a:rPr lang="en-US" sz="1100" dirty="0"/>
-                  <a:t>Effect Size: Proportion of Variance Explained (</a:t>
+                  <a:rPr lang="en-US" sz="1600" dirty="0"/>
+                  <a:t>Omnibus test: Proportion of Variance Explained (</a:t>
                 </a:r>
                 <a14:m>
                   <m:oMath xmlns:m="http://schemas.openxmlformats.org/officeDocument/2006/math">
                     <m:sSup>
                       <m:sSupPr>
                         <m:ctrlPr>
-                          <a:rPr lang="en-US" sz="1100" b="0" i="1" smtClean="0">
+                          <a:rPr lang="en-US" sz="1600" b="0" i="1" smtClean="0">
                             <a:latin typeface="Cambria Math" panose="02040503050406030204" pitchFamily="18" charset="0"/>
                           </a:rPr>
                         </m:ctrlPr>
                       </m:sSupPr>
                       <m:e>
                         <m:r>
-                          <a:rPr lang="en-US" sz="1100" b="0" i="1" smtClean="0">
+                          <a:rPr lang="en-US" sz="1600" b="0" i="1" smtClean="0">
                             <a:latin typeface="Cambria Math" panose="02040503050406030204" pitchFamily="18" charset="0"/>
                           </a:rPr>
                           <m:t>𝑅</m:t>
@@ -5895,7 +5649,7 @@
                       </m:e>
                       <m:sup>
                         <m:r>
-                          <a:rPr lang="en-US" sz="1100" b="0" i="1" smtClean="0">
+                          <a:rPr lang="en-US" sz="1600" b="0" i="1" smtClean="0">
                             <a:latin typeface="Cambria Math" panose="02040503050406030204" pitchFamily="18" charset="0"/>
                           </a:rPr>
                           <m:t>2</m:t>
@@ -5905,7 +5659,207 @@
                   </m:oMath>
                 </a14:m>
                 <a:r>
-                  <a:rPr lang="en-US" sz="1100" dirty="0"/>
+                  <a:rPr lang="en-US" sz="1600" dirty="0"/>
+                  <a:t>)</a:t>
+                </a:r>
+              </a:p>
+              <a:p>
+                <a:pPr lvl="1"/>
+                <a:r>
+                  <a:rPr lang="en-US" sz="1600" dirty="0"/>
+                  <a:t>Single predictors: Correlation (</a:t>
+                </a:r>
+                <a14:m>
+                  <m:oMath xmlns:m="http://schemas.openxmlformats.org/officeDocument/2006/math">
+                    <m:r>
+                      <m:rPr>
+                        <m:sty m:val="p"/>
+                      </m:rPr>
+                      <a:rPr lang="en-US" sz="1600" b="0" i="1" smtClean="0">
+                        <a:latin typeface="Cambria Math" panose="02040503050406030204" pitchFamily="18" charset="0"/>
+                      </a:rPr>
+                      <m:t>ρ</m:t>
+                    </m:r>
+                  </m:oMath>
+                </a14:m>
+                <a:r>
+                  <a:rPr lang="en-US" sz="1600" dirty="0"/>
+                  <a:t>)</a:t>
+                </a:r>
+              </a:p>
+              <a:p>
+                <a:r>
+                  <a:rPr lang="en-US" sz="1800" dirty="0"/>
+                  <a:t>Effects Estimated from Preliminary Data</a:t>
+                </a:r>
+              </a:p>
+              <a:p>
+                <a:pPr lvl="1"/>
+                <a14:m>
+                  <m:oMath xmlns:m="http://schemas.openxmlformats.org/officeDocument/2006/math">
+                    <m:sSup>
+                      <m:sSupPr>
+                        <m:ctrlPr>
+                          <a:rPr lang="en-US" sz="1600" b="0" i="1" smtClean="0">
+                            <a:latin typeface="Cambria Math" panose="02040503050406030204" pitchFamily="18" charset="0"/>
+                          </a:rPr>
+                        </m:ctrlPr>
+                      </m:sSupPr>
+                      <m:e>
+                        <m:r>
+                          <a:rPr lang="en-US" sz="1600" b="0" i="1" smtClean="0">
+                            <a:latin typeface="Cambria Math" panose="02040503050406030204" pitchFamily="18" charset="0"/>
+                          </a:rPr>
+                          <m:t>𝑅</m:t>
+                        </m:r>
+                      </m:e>
+                      <m:sup>
+                        <m:r>
+                          <a:rPr lang="en-US" sz="1600" b="0" i="1" smtClean="0">
+                            <a:latin typeface="Cambria Math" panose="02040503050406030204" pitchFamily="18" charset="0"/>
+                          </a:rPr>
+                          <m:t>2</m:t>
+                        </m:r>
+                      </m:sup>
+                    </m:sSup>
+                  </m:oMath>
+                </a14:m>
+                <a:r>
+                  <a:rPr lang="en-US" sz="1600" dirty="0"/>
+                  <a:t>: 0.11 to 0.48</a:t>
+                </a:r>
+              </a:p>
+              <a:p>
+                <a:pPr lvl="1"/>
+                <a14:m>
+                  <m:oMath xmlns:m="http://schemas.openxmlformats.org/officeDocument/2006/math">
+                    <m:r>
+                      <a:rPr lang="en-US" sz="1600" b="0" i="1" smtClean="0">
+                        <a:latin typeface="Cambria Math" panose="02040503050406030204" pitchFamily="18" charset="0"/>
+                      </a:rPr>
+                      <m:t>𝜌</m:t>
+                    </m:r>
+                  </m:oMath>
+                </a14:m>
+                <a:r>
+                  <a:rPr lang="en-US" sz="1600" dirty="0"/>
+                  <a:t>: 0.26 to 0.69</a:t>
+                </a:r>
+              </a:p>
+              <a:p>
+                <a:r>
+                  <a:rPr lang="en-US" sz="2000" dirty="0"/>
+                  <a:t>Results</a:t>
+                </a:r>
+              </a:p>
+              <a:p>
+                <a:pPr lvl="1"/>
+                <a:r>
+                  <a:rPr lang="en-US" sz="1600" dirty="0"/>
+                  <a:t>95% power for </a:t>
+                </a:r>
+                <a14:m>
+                  <m:oMath xmlns:m="http://schemas.openxmlformats.org/officeDocument/2006/math">
+                    <m:sSup>
+                      <m:sSupPr>
+                        <m:ctrlPr>
+                          <a:rPr lang="en-US" sz="1600" b="0" i="1" smtClean="0">
+                            <a:latin typeface="Cambria Math" panose="02040503050406030204" pitchFamily="18" charset="0"/>
+                          </a:rPr>
+                        </m:ctrlPr>
+                      </m:sSupPr>
+                      <m:e>
+                        <m:r>
+                          <a:rPr lang="en-US" sz="1600" b="0" i="1" smtClean="0">
+                            <a:latin typeface="Cambria Math" panose="02040503050406030204" pitchFamily="18" charset="0"/>
+                          </a:rPr>
+                          <m:t>𝑅</m:t>
+                        </m:r>
+                      </m:e>
+                      <m:sup>
+                        <m:r>
+                          <a:rPr lang="en-US" sz="1600" b="0" i="1" smtClean="0">
+                            <a:latin typeface="Cambria Math" panose="02040503050406030204" pitchFamily="18" charset="0"/>
+                          </a:rPr>
+                          <m:t>2</m:t>
+                        </m:r>
+                      </m:sup>
+                    </m:sSup>
+                    <m:r>
+                      <a:rPr lang="en-US" sz="1600" b="0" i="1" smtClean="0">
+                        <a:latin typeface="Cambria Math" panose="02040503050406030204" pitchFamily="18" charset="0"/>
+                      </a:rPr>
+                      <m:t>=0.11</m:t>
+                    </m:r>
+                  </m:oMath>
+                </a14:m>
+                <a:endParaRPr lang="en-US" sz="1600" dirty="0"/>
+              </a:p>
+              <a:p>
+                <a:pPr lvl="1"/>
+                <a:r>
+                  <a:rPr lang="en-US" sz="1600" dirty="0"/>
+                  <a:t>89% power for </a:t>
+                </a:r>
+                <a14:m>
+                  <m:oMath xmlns:m="http://schemas.openxmlformats.org/officeDocument/2006/math">
+                    <m:r>
+                      <a:rPr lang="en-US" sz="1600" b="0" i="1" smtClean="0">
+                        <a:latin typeface="Cambria Math" panose="02040503050406030204" pitchFamily="18" charset="0"/>
+                      </a:rPr>
+                      <m:t>𝜌</m:t>
+                    </m:r>
+                    <m:r>
+                      <a:rPr lang="en-US" sz="1600" b="0" i="1" smtClean="0">
+                        <a:latin typeface="Cambria Math" panose="02040503050406030204" pitchFamily="18" charset="0"/>
+                      </a:rPr>
+                      <m:t>=0.26</m:t>
+                    </m:r>
+                  </m:oMath>
+                </a14:m>
+                <a:endParaRPr lang="en-US" sz="1600" dirty="0"/>
+              </a:p>
+              <a:p>
+                <a:r>
+                  <a:rPr lang="en-US" sz="1800" dirty="0"/>
+                  <a:t>Software</a:t>
+                </a:r>
+              </a:p>
+              <a:p>
+                <a:pPr lvl="1"/>
+                <a:r>
+                  <a:rPr lang="en-US" sz="1600" dirty="0"/>
+                  <a:t>Omnibus test: </a:t>
+                </a:r>
+                <a:r>
+                  <a:rPr lang="en-US" sz="1600" dirty="0" err="1"/>
+                  <a:t>mlrF.overall</a:t>
+                </a:r>
+                <a:r>
+                  <a:rPr lang="en-US" sz="1600" dirty="0"/>
+                  <a:t> (</a:t>
+                </a:r>
+                <a:r>
+                  <a:rPr lang="en-US" sz="1600" dirty="0" err="1"/>
+                  <a:t>powertools</a:t>
+                </a:r>
+                <a:r>
+                  <a:rPr lang="en-US" sz="1600" dirty="0"/>
+                  <a:t>)</a:t>
+                </a:r>
+              </a:p>
+              <a:p>
+                <a:pPr lvl="1"/>
+                <a:r>
+                  <a:rPr lang="en-US" sz="1600" dirty="0"/>
+                  <a:t>Single Predictors: corr.1samp (</a:t>
+                </a:r>
+                <a:r>
+                  <a:rPr lang="en-US" sz="1600" dirty="0" err="1"/>
+                  <a:t>powertools</a:t>
+                </a:r>
+                <a:r>
+                  <a:rPr lang="en-US" sz="1600" dirty="0"/>
                   <a:t>)</a:t>
                 </a:r>
               </a:p>
@@ -5940,7 +5894,7 @@
               <a:blipFill>
                 <a:blip r:embed="rId2"/>
                 <a:stretch>
-                  <a:fillRect l="-233" t="-700"/>
+                  <a:fillRect l="-698" t="-1681"/>
                 </a:stretch>
               </a:blipFill>
             </p:spPr>
@@ -5981,7 +5935,7 @@
         </p:blipFill>
         <p:spPr>
           <a:xfrm>
-            <a:off x="8089365" y="900748"/>
+            <a:off x="7660897" y="2604294"/>
             <a:ext cx="1923738" cy="2794000"/>
           </a:xfrm>
           <a:prstGeom prst="rect">
@@ -6011,8 +5965,8 @@
         </p:blipFill>
         <p:spPr>
           <a:xfrm>
-            <a:off x="8267215" y="3830198"/>
-            <a:ext cx="1568037" cy="2873130"/>
+            <a:off x="10040950" y="2238851"/>
+            <a:ext cx="1923738" cy="3524885"/>
           </a:xfrm>
           <a:prstGeom prst="rect">
             <a:avLst/>
@@ -6048,7 +6002,7 @@
         <p:cNvPr id="1" name="">
           <a:extLst>
             <a:ext uri="{FF2B5EF4-FFF2-40B4-BE49-F238E27FC236}">
-              <a16:creationId xmlns:a16="http://schemas.microsoft.com/office/drawing/2014/main" id="{605CD82A-6B15-D3E5-8E3F-CFF347F81F66}"/>
+              <a16:creationId xmlns:a16="http://schemas.microsoft.com/office/drawing/2014/main" id="{E13067FC-01BB-FEE8-6A69-48B05BB8E427}"/>
             </a:ext>
           </a:extLst>
         </p:cNvPr>
@@ -6068,7 +6022,7 @@
           <p:cNvPr id="4" name="Rectangle 3">
             <a:extLst>
               <a:ext uri="{FF2B5EF4-FFF2-40B4-BE49-F238E27FC236}">
-                <a16:creationId xmlns:a16="http://schemas.microsoft.com/office/drawing/2014/main" id="{075319D8-E572-8B2A-1B13-3466A620231A}"/>
+                <a16:creationId xmlns:a16="http://schemas.microsoft.com/office/drawing/2014/main" id="{DF6AE4A9-3851-A584-581A-11CF53ECEF32}"/>
               </a:ext>
             </a:extLst>
           </p:cNvPr>
@@ -6117,7 +6071,7 @@
           <p:cNvPr id="2" name="Title 1">
             <a:extLst>
               <a:ext uri="{FF2B5EF4-FFF2-40B4-BE49-F238E27FC236}">
-                <a16:creationId xmlns:a16="http://schemas.microsoft.com/office/drawing/2014/main" id="{09317895-CA06-72EE-2C36-22FC96938388}"/>
+                <a16:creationId xmlns:a16="http://schemas.microsoft.com/office/drawing/2014/main" id="{B7E15DF0-49E9-0ACB-5E39-EFFA5F276AF2}"/>
               </a:ext>
             </a:extLst>
           </p:cNvPr>
@@ -6140,856 +6094,173 @@
           <a:p>
             <a:r>
               <a:rPr lang="en-US" dirty="0"/>
-              <a:t>Aim 1 Analysis Method</a:t>
-            </a:r>
-          </a:p>
-        </p:txBody>
-      </p:sp>
-      <mc:AlternateContent xmlns:mc="http://schemas.openxmlformats.org/markup-compatibility/2006">
-        <mc:Choice xmlns:a14="http://schemas.microsoft.com/office/drawing/2010/main" Requires="a14">
-          <p:graphicFrame>
-            <p:nvGraphicFramePr>
-              <p:cNvPr id="3" name="Table 2">
+              <a:t>Aim 2 Analysis</a:t>
+            </a:r>
+          </a:p>
+        </p:txBody>
+      </p:sp>
+      <mc:AlternateContent xmlns:mc="http://schemas.openxmlformats.org/markup-compatibility/2006" xmlns:a14="http://schemas.microsoft.com/office/drawing/2010/main">
+        <mc:Choice Requires="a14">
+          <p:sp>
+            <p:nvSpPr>
+              <p:cNvPr id="3" name="Content Placeholder 2">
                 <a:extLst>
                   <a:ext uri="{FF2B5EF4-FFF2-40B4-BE49-F238E27FC236}">
-                    <a16:creationId xmlns:a16="http://schemas.microsoft.com/office/drawing/2014/main" id="{5E329323-7F7E-C42F-4F39-121EF3CDFB5A}"/>
+                    <a16:creationId xmlns:a16="http://schemas.microsoft.com/office/drawing/2014/main" id="{02C28FE3-DE16-B5B9-C27A-53B0A3A05701}"/>
                   </a:ext>
                 </a:extLst>
               </p:cNvPr>
-              <p:cNvGraphicFramePr>
-                <a:graphicFrameLocks noGrp="1"/>
-              </p:cNvGraphicFramePr>
+              <p:cNvSpPr>
+                <a:spLocks noGrp="1"/>
+              </p:cNvSpPr>
               <p:nvPr>
-                <p:extLst>
-                  <p:ext uri="{D42A27DB-BD31-4B8C-83A1-F6EECF244321}">
-                    <p14:modId xmlns:p14="http://schemas.microsoft.com/office/powerpoint/2010/main" val="2216968037"/>
-                  </p:ext>
-                </p:extLst>
+                <p:ph idx="1"/>
               </p:nvPr>
-            </p:nvGraphicFramePr>
-            <p:xfrm>
-              <a:off x="1803775" y="4787156"/>
-              <a:ext cx="9419337" cy="1951575"/>
-            </p:xfrm>
-            <a:graphic>
-              <a:graphicData uri="http://schemas.openxmlformats.org/drawingml/2006/table">
-                <a:tbl>
-                  <a:tblPr firstRow="1" bandRow="1">
-                    <a:tableStyleId>{073A0DAA-6AF3-43AB-8588-CEC1D06C72B9}</a:tableStyleId>
-                  </a:tblPr>
-                  <a:tblGrid>
-                    <a:gridCol w="1140143">
-                      <a:extLst>
-                        <a:ext uri="{9D8B030D-6E8A-4147-A177-3AD203B41FA5}">
-                          <a16:colId xmlns:a16="http://schemas.microsoft.com/office/drawing/2014/main" val="3885695937"/>
-                        </a:ext>
-                      </a:extLst>
-                    </a:gridCol>
-                    <a:gridCol w="2824925">
-                      <a:extLst>
-                        <a:ext uri="{9D8B030D-6E8A-4147-A177-3AD203B41FA5}">
-                          <a16:colId xmlns:a16="http://schemas.microsoft.com/office/drawing/2014/main" val="1502429306"/>
-                        </a:ext>
-                      </a:extLst>
-                    </a:gridCol>
-                    <a:gridCol w="2632583">
-                      <a:extLst>
-                        <a:ext uri="{9D8B030D-6E8A-4147-A177-3AD203B41FA5}">
-                          <a16:colId xmlns:a16="http://schemas.microsoft.com/office/drawing/2014/main" val="3907131552"/>
-                        </a:ext>
-                      </a:extLst>
-                    </a:gridCol>
-                    <a:gridCol w="2821686">
-                      <a:extLst>
-                        <a:ext uri="{9D8B030D-6E8A-4147-A177-3AD203B41FA5}">
-                          <a16:colId xmlns:a16="http://schemas.microsoft.com/office/drawing/2014/main" val="780577694"/>
-                        </a:ext>
-                      </a:extLst>
-                    </a:gridCol>
-                  </a:tblGrid>
-                  <a:tr h="337816">
-                    <a:tc>
-                      <a:txBody>
-                        <a:bodyPr/>
-                        <a:lstStyle/>
-                        <a:p>
-                          <a:r>
-                            <a:rPr lang="en-US" sz="1400"/>
-                            <a:t>Hypothesis</a:t>
-                          </a:r>
-                          <a:endParaRPr lang="en-US" sz="1400" dirty="0"/>
-                        </a:p>
-                      </a:txBody>
-                      <a:tcPr/>
-                    </a:tc>
-                    <a:tc>
-                      <a:txBody>
-                        <a:bodyPr/>
-                        <a:lstStyle/>
-                        <a:p>
-                          <a:r>
-                            <a:rPr lang="en-US" sz="1400" dirty="0"/>
-                            <a:t>Primary Outcomes (</a:t>
-                          </a:r>
-                          <a14:m>
-                            <m:oMath xmlns:m="http://schemas.openxmlformats.org/officeDocument/2006/math">
-                              <m:r>
-                                <a:rPr lang="en-US" sz="1400" b="1" i="1" smtClean="0">
-                                  <a:latin typeface="Cambria Math" panose="02040503050406030204" pitchFamily="18" charset="0"/>
-                                </a:rPr>
-                                <m:t>𝒀</m:t>
-                              </m:r>
-                            </m:oMath>
-                          </a14:m>
-                          <a:r>
-                            <a:rPr lang="en-US" sz="1400" dirty="0"/>
-                            <a:t>)</a:t>
-                          </a:r>
-                        </a:p>
-                      </a:txBody>
-                      <a:tcPr/>
-                    </a:tc>
-                    <a:tc>
-                      <a:txBody>
-                        <a:bodyPr/>
-                        <a:lstStyle/>
-                        <a:p>
-                          <a:r>
-                            <a:rPr lang="en-US" sz="1400" dirty="0"/>
-                            <a:t>Primary Predictors (</a:t>
-                          </a:r>
-                          <a14:m>
-                            <m:oMath xmlns:m="http://schemas.openxmlformats.org/officeDocument/2006/math">
-                              <m:r>
-                                <a:rPr lang="en-US" sz="1400" b="1" i="1" smtClean="0">
-                                  <a:latin typeface="Cambria Math" panose="02040503050406030204" pitchFamily="18" charset="0"/>
-                                </a:rPr>
-                                <m:t>𝑿</m:t>
-                              </m:r>
-                            </m:oMath>
-                          </a14:m>
-                          <a:r>
-                            <a:rPr lang="en-US" sz="1400" dirty="0"/>
-                            <a:t>)</a:t>
-                          </a:r>
-                        </a:p>
-                      </a:txBody>
-                      <a:tcPr/>
-                    </a:tc>
-                    <a:tc>
-                      <a:txBody>
-                        <a:bodyPr/>
-                        <a:lstStyle/>
-                        <a:p>
-                          <a:r>
-                            <a:rPr lang="en-US" sz="1400" dirty="0"/>
-                            <a:t>Covariates</a:t>
-                          </a:r>
-                        </a:p>
-                      </a:txBody>
-                      <a:tcPr/>
-                    </a:tc>
-                    <a:extLst>
-                      <a:ext uri="{0D108BD9-81ED-4DB2-BD59-A6C34878D82A}">
-                        <a16:rowId xmlns:a16="http://schemas.microsoft.com/office/drawing/2014/main" val="3804010600"/>
-                      </a:ext>
-                    </a:extLst>
-                  </a:tr>
-                  <a:tr h="773961">
-                    <a:tc>
-                      <a:txBody>
-                        <a:bodyPr/>
-                        <a:lstStyle/>
-                        <a:p>
-                          <a:r>
-                            <a:rPr lang="en-US" sz="1200" dirty="0"/>
-                            <a:t>1a</a:t>
-                          </a:r>
-                        </a:p>
-                      </a:txBody>
-                      <a:tcPr/>
-                    </a:tc>
-                    <a:tc>
-                      <a:txBody>
-                        <a:bodyPr/>
-                        <a:lstStyle/>
-                        <a:p>
-                          <a:r>
-                            <a:rPr lang="en-US" sz="1200"/>
-                            <a:t>Change in Cortical Thickness</a:t>
-                          </a:r>
-                        </a:p>
-                        <a:p>
-                          <a:r>
-                            <a:rPr lang="en-US" sz="1200"/>
-                            <a:t>Change in Cognitive Measures</a:t>
-                          </a:r>
-                        </a:p>
-                        <a:p>
-                          <a:r>
-                            <a:rPr lang="en-US" sz="1200"/>
-                            <a:t>(CVLT, Benson Figure, MST, Story Recall)</a:t>
-                          </a:r>
-                          <a:endParaRPr lang="en-US" sz="1200" dirty="0"/>
-                        </a:p>
-                      </a:txBody>
-                      <a:tcPr/>
-                    </a:tc>
-                    <a:tc>
-                      <a:txBody>
-                        <a:bodyPr/>
-                        <a:lstStyle/>
-                        <a:p>
-                          <a:r>
-                            <a:rPr lang="en-US" sz="1200"/>
-                            <a:t>Baseline Measures of Inflammation</a:t>
-                          </a:r>
-                        </a:p>
-                        <a:p>
-                          <a:r>
-                            <a:rPr lang="en-US" sz="1200"/>
-                            <a:t>(IL-6, TNF-alpha, MCP-1, eotaxin-1)</a:t>
-                          </a:r>
-                          <a:endParaRPr lang="en-US" sz="1200" dirty="0"/>
-                        </a:p>
-                      </a:txBody>
-                      <a:tcPr/>
-                    </a:tc>
-                    <a:tc>
-                      <a:txBody>
-                        <a:bodyPr/>
-                        <a:lstStyle/>
-                        <a:p>
-                          <a:r>
-                            <a:rPr lang="en-US" sz="1200"/>
-                            <a:t>Baseline Outcome,</a:t>
-                          </a:r>
-                        </a:p>
-                        <a:p>
-                          <a:r>
-                            <a:rPr lang="en-US" sz="1200"/>
-                            <a:t>Age, Sex,</a:t>
-                          </a:r>
-                        </a:p>
-                        <a:p>
-                          <a:r>
-                            <a:rPr lang="en-US" sz="1200"/>
-                            <a:t>Variables Associated with Inflammation</a:t>
-                          </a:r>
-                          <a:endParaRPr lang="en-US" sz="1200" dirty="0"/>
-                        </a:p>
-                      </a:txBody>
-                      <a:tcPr/>
-                    </a:tc>
-                    <a:extLst>
-                      <a:ext uri="{0D108BD9-81ED-4DB2-BD59-A6C34878D82A}">
-                        <a16:rowId xmlns:a16="http://schemas.microsoft.com/office/drawing/2014/main" val="2112868750"/>
-                      </a:ext>
-                    </a:extLst>
-                  </a:tr>
-                  <a:tr h="839798">
-                    <a:tc>
-                      <a:txBody>
-                        <a:bodyPr/>
-                        <a:lstStyle/>
-                        <a:p>
-                          <a:r>
-                            <a:rPr lang="en-US" sz="1200"/>
-                            <a:t>1b</a:t>
-                          </a:r>
-                          <a:endParaRPr lang="en-US" sz="1200" dirty="0"/>
-                        </a:p>
-                      </a:txBody>
-                      <a:tcPr/>
-                    </a:tc>
-                    <a:tc>
-                      <a:txBody>
-                        <a:bodyPr/>
-                        <a:lstStyle/>
-                        <a:p>
-                          <a:r>
-                            <a:rPr lang="en-US" sz="1200" dirty="0"/>
-                            <a:t>Change in Cortical Thickness</a:t>
-                          </a:r>
-                        </a:p>
-                        <a:p>
-                          <a:r>
-                            <a:rPr lang="en-US" sz="1200" dirty="0"/>
-                            <a:t>Change in Cognitive Measures</a:t>
-                          </a:r>
-                        </a:p>
-                        <a:p>
-                          <a:r>
-                            <a:rPr lang="en-US" sz="1200" dirty="0"/>
-                            <a:t>(CVLT, Benson Figure, MST, Story Recall)</a:t>
-                          </a:r>
-                        </a:p>
-                      </a:txBody>
-                      <a:tcPr/>
-                    </a:tc>
-                    <a:tc>
-                      <a:txBody>
-                        <a:bodyPr/>
-                        <a:lstStyle/>
-                        <a:p>
-                          <a:r>
-                            <a:rPr lang="en-US" sz="1200" dirty="0"/>
-                            <a:t>Change in Measures of Inflammation</a:t>
-                          </a:r>
-                        </a:p>
-                        <a:p>
-                          <a:r>
-                            <a:rPr lang="en-US" sz="1200" dirty="0"/>
-                            <a:t>(IL-6, TNF-alpha, MCP-1, eotaxin-1)</a:t>
-                          </a:r>
-                        </a:p>
-                        <a:p>
-                          <a:endParaRPr lang="en-US" sz="1200" dirty="0"/>
-                        </a:p>
-                      </a:txBody>
-                      <a:tcPr/>
-                    </a:tc>
-                    <a:tc>
-                      <a:txBody>
-                        <a:bodyPr/>
-                        <a:lstStyle/>
-                        <a:p>
-                          <a:r>
-                            <a:rPr lang="en-US" sz="1200" dirty="0"/>
-                            <a:t>Baseline Outcome,</a:t>
-                          </a:r>
-                        </a:p>
-                        <a:p>
-                          <a:r>
-                            <a:rPr lang="en-US" sz="1200" dirty="0"/>
-                            <a:t>Age, Sex,</a:t>
-                          </a:r>
-                        </a:p>
-                        <a:p>
-                          <a:r>
-                            <a:rPr lang="en-US" sz="1200" dirty="0"/>
-                            <a:t>Variables Associated with Inflammation</a:t>
-                          </a:r>
-                        </a:p>
-                        <a:p>
-                          <a:endParaRPr lang="en-US" sz="1200" dirty="0"/>
-                        </a:p>
-                      </a:txBody>
-                      <a:tcPr/>
-                    </a:tc>
-                    <a:extLst>
-                      <a:ext uri="{0D108BD9-81ED-4DB2-BD59-A6C34878D82A}">
-                        <a16:rowId xmlns:a16="http://schemas.microsoft.com/office/drawing/2014/main" val="126878836"/>
-                      </a:ext>
-                    </a:extLst>
-                  </a:tr>
-                </a:tbl>
-              </a:graphicData>
-            </a:graphic>
-          </p:graphicFrame>
-        </mc:Choice>
-        <mc:Fallback>
-          <p:graphicFrame>
-            <p:nvGraphicFramePr>
-              <p:cNvPr id="3" name="Table 2">
-                <a:extLst>
-                  <a:ext uri="{FF2B5EF4-FFF2-40B4-BE49-F238E27FC236}">
-                    <a16:creationId xmlns:a16="http://schemas.microsoft.com/office/drawing/2014/main" id="{5E329323-7F7E-C42F-4F39-121EF3CDFB5A}"/>
-                  </a:ext>
-                </a:extLst>
-              </p:cNvPr>
-              <p:cNvGraphicFramePr>
-                <a:graphicFrameLocks noGrp="1"/>
-              </p:cNvGraphicFramePr>
-              <p:nvPr>
-                <p:extLst>
-                  <p:ext uri="{D42A27DB-BD31-4B8C-83A1-F6EECF244321}">
-                    <p14:modId xmlns:p14="http://schemas.microsoft.com/office/powerpoint/2010/main" val="2216968037"/>
-                  </p:ext>
-                </p:extLst>
-              </p:nvPr>
-            </p:nvGraphicFramePr>
-            <p:xfrm>
-              <a:off x="1803775" y="4787156"/>
-              <a:ext cx="9419337" cy="1951575"/>
-            </p:xfrm>
-            <a:graphic>
-              <a:graphicData uri="http://schemas.openxmlformats.org/drawingml/2006/table">
-                <a:tbl>
-                  <a:tblPr firstRow="1" bandRow="1">
-                    <a:tableStyleId>{073A0DAA-6AF3-43AB-8588-CEC1D06C72B9}</a:tableStyleId>
-                  </a:tblPr>
-                  <a:tblGrid>
-                    <a:gridCol w="1140143">
-                      <a:extLst>
-                        <a:ext uri="{9D8B030D-6E8A-4147-A177-3AD203B41FA5}">
-                          <a16:colId xmlns:a16="http://schemas.microsoft.com/office/drawing/2014/main" val="3885695937"/>
-                        </a:ext>
-                      </a:extLst>
-                    </a:gridCol>
-                    <a:gridCol w="2824925">
-                      <a:extLst>
-                        <a:ext uri="{9D8B030D-6E8A-4147-A177-3AD203B41FA5}">
-                          <a16:colId xmlns:a16="http://schemas.microsoft.com/office/drawing/2014/main" val="1502429306"/>
-                        </a:ext>
-                      </a:extLst>
-                    </a:gridCol>
-                    <a:gridCol w="2632583">
-                      <a:extLst>
-                        <a:ext uri="{9D8B030D-6E8A-4147-A177-3AD203B41FA5}">
-                          <a16:colId xmlns:a16="http://schemas.microsoft.com/office/drawing/2014/main" val="3907131552"/>
-                        </a:ext>
-                      </a:extLst>
-                    </a:gridCol>
-                    <a:gridCol w="2821686">
-                      <a:extLst>
-                        <a:ext uri="{9D8B030D-6E8A-4147-A177-3AD203B41FA5}">
-                          <a16:colId xmlns:a16="http://schemas.microsoft.com/office/drawing/2014/main" val="780577694"/>
-                        </a:ext>
-                      </a:extLst>
-                    </a:gridCol>
-                  </a:tblGrid>
-                  <a:tr h="337816">
-                    <a:tc>
-                      <a:txBody>
-                        <a:bodyPr/>
-                        <a:lstStyle/>
-                        <a:p>
-                          <a:r>
-                            <a:rPr lang="en-US" sz="1400"/>
-                            <a:t>Hypothesis</a:t>
-                          </a:r>
-                          <a:endParaRPr lang="en-US" sz="1400" dirty="0"/>
-                        </a:p>
-                      </a:txBody>
-                      <a:tcPr/>
-                    </a:tc>
-                    <a:tc>
-                      <a:txBody>
-                        <a:bodyPr/>
-                        <a:lstStyle/>
-                        <a:p>
-                          <a:endParaRPr lang="en-US"/>
-                        </a:p>
-                      </a:txBody>
-                      <a:tcPr>
-                        <a:blipFill>
-                          <a:blip r:embed="rId3"/>
-                          <a:stretch>
-                            <a:fillRect l="-40517" t="-1786" r="-193966" b="-476786"/>
-                          </a:stretch>
-                        </a:blipFill>
-                      </a:tcPr>
-                    </a:tc>
-                    <a:tc>
-                      <a:txBody>
-                        <a:bodyPr/>
-                        <a:lstStyle/>
-                        <a:p>
-                          <a:endParaRPr lang="en-US"/>
-                        </a:p>
-                      </a:txBody>
-                      <a:tcPr>
-                        <a:blipFill>
-                          <a:blip r:embed="rId3"/>
-                          <a:stretch>
-                            <a:fillRect l="-150577" t="-1786" r="-107852" b="-476786"/>
-                          </a:stretch>
-                        </a:blipFill>
-                      </a:tcPr>
-                    </a:tc>
-                    <a:tc>
-                      <a:txBody>
-                        <a:bodyPr/>
-                        <a:lstStyle/>
-                        <a:p>
-                          <a:r>
-                            <a:rPr lang="en-US" sz="1400" dirty="0"/>
-                            <a:t>Covariates</a:t>
-                          </a:r>
-                        </a:p>
-                      </a:txBody>
-                      <a:tcPr/>
-                    </a:tc>
-                    <a:extLst>
-                      <a:ext uri="{0D108BD9-81ED-4DB2-BD59-A6C34878D82A}">
-                        <a16:rowId xmlns:a16="http://schemas.microsoft.com/office/drawing/2014/main" val="3804010600"/>
-                      </a:ext>
-                    </a:extLst>
-                  </a:tr>
-                  <a:tr h="773961">
-                    <a:tc>
-                      <a:txBody>
-                        <a:bodyPr/>
-                        <a:lstStyle/>
-                        <a:p>
-                          <a:r>
-                            <a:rPr lang="en-US" sz="1200" dirty="0"/>
-                            <a:t>1a</a:t>
-                          </a:r>
-                        </a:p>
-                      </a:txBody>
-                      <a:tcPr/>
-                    </a:tc>
-                    <a:tc>
-                      <a:txBody>
-                        <a:bodyPr/>
-                        <a:lstStyle/>
-                        <a:p>
-                          <a:r>
-                            <a:rPr lang="en-US" sz="1200"/>
-                            <a:t>Change in Cortical Thickness</a:t>
-                          </a:r>
-                        </a:p>
-                        <a:p>
-                          <a:r>
-                            <a:rPr lang="en-US" sz="1200"/>
-                            <a:t>Change in Cognitive Measures</a:t>
-                          </a:r>
-                        </a:p>
-                        <a:p>
-                          <a:r>
-                            <a:rPr lang="en-US" sz="1200"/>
-                            <a:t>(CVLT, Benson Figure, MST, Story Recall)</a:t>
-                          </a:r>
-                          <a:endParaRPr lang="en-US" sz="1200" dirty="0"/>
-                        </a:p>
-                      </a:txBody>
-                      <a:tcPr/>
-                    </a:tc>
-                    <a:tc>
-                      <a:txBody>
-                        <a:bodyPr/>
-                        <a:lstStyle/>
-                        <a:p>
-                          <a:r>
-                            <a:rPr lang="en-US" sz="1200"/>
-                            <a:t>Baseline Measures of Inflammation</a:t>
-                          </a:r>
-                        </a:p>
-                        <a:p>
-                          <a:r>
-                            <a:rPr lang="en-US" sz="1200"/>
-                            <a:t>(IL-6, TNF-alpha, MCP-1, eotaxin-1)</a:t>
-                          </a:r>
-                          <a:endParaRPr lang="en-US" sz="1200" dirty="0"/>
-                        </a:p>
-                      </a:txBody>
-                      <a:tcPr/>
-                    </a:tc>
-                    <a:tc>
-                      <a:txBody>
-                        <a:bodyPr/>
-                        <a:lstStyle/>
-                        <a:p>
-                          <a:r>
-                            <a:rPr lang="en-US" sz="1200"/>
-                            <a:t>Baseline Outcome,</a:t>
-                          </a:r>
-                        </a:p>
-                        <a:p>
-                          <a:r>
-                            <a:rPr lang="en-US" sz="1200"/>
-                            <a:t>Age, Sex,</a:t>
-                          </a:r>
-                        </a:p>
-                        <a:p>
-                          <a:r>
-                            <a:rPr lang="en-US" sz="1200"/>
-                            <a:t>Variables Associated with Inflammation</a:t>
-                          </a:r>
-                          <a:endParaRPr lang="en-US" sz="1200" dirty="0"/>
-                        </a:p>
-                      </a:txBody>
-                      <a:tcPr/>
-                    </a:tc>
-                    <a:extLst>
-                      <a:ext uri="{0D108BD9-81ED-4DB2-BD59-A6C34878D82A}">
-                        <a16:rowId xmlns:a16="http://schemas.microsoft.com/office/drawing/2014/main" val="2112868750"/>
-                      </a:ext>
-                    </a:extLst>
-                  </a:tr>
-                  <a:tr h="839798">
-                    <a:tc>
-                      <a:txBody>
-                        <a:bodyPr/>
-                        <a:lstStyle/>
-                        <a:p>
-                          <a:r>
-                            <a:rPr lang="en-US" sz="1200"/>
-                            <a:t>1b</a:t>
-                          </a:r>
-                          <a:endParaRPr lang="en-US" sz="1200" dirty="0"/>
-                        </a:p>
-                      </a:txBody>
-                      <a:tcPr/>
-                    </a:tc>
-                    <a:tc>
-                      <a:txBody>
-                        <a:bodyPr/>
-                        <a:lstStyle/>
-                        <a:p>
-                          <a:r>
-                            <a:rPr lang="en-US" sz="1200" dirty="0"/>
-                            <a:t>Change in Cortical Thickness</a:t>
-                          </a:r>
-                        </a:p>
-                        <a:p>
-                          <a:r>
-                            <a:rPr lang="en-US" sz="1200" dirty="0"/>
-                            <a:t>Change in Cognitive Measures</a:t>
-                          </a:r>
-                        </a:p>
-                        <a:p>
-                          <a:r>
-                            <a:rPr lang="en-US" sz="1200" dirty="0"/>
-                            <a:t>(CVLT, Benson Figure, MST, Story Recall)</a:t>
-                          </a:r>
-                        </a:p>
-                      </a:txBody>
-                      <a:tcPr/>
-                    </a:tc>
-                    <a:tc>
-                      <a:txBody>
-                        <a:bodyPr/>
-                        <a:lstStyle/>
-                        <a:p>
-                          <a:r>
-                            <a:rPr lang="en-US" sz="1200" dirty="0"/>
-                            <a:t>Change in Measures of Inflammation</a:t>
-                          </a:r>
-                        </a:p>
-                        <a:p>
-                          <a:r>
-                            <a:rPr lang="en-US" sz="1200" dirty="0"/>
-                            <a:t>(IL-6, TNF-alpha, MCP-1, eotaxin-1)</a:t>
-                          </a:r>
-                        </a:p>
-                        <a:p>
-                          <a:endParaRPr lang="en-US" sz="1200" dirty="0"/>
-                        </a:p>
-                      </a:txBody>
-                      <a:tcPr/>
-                    </a:tc>
-                    <a:tc>
-                      <a:txBody>
-                        <a:bodyPr/>
-                        <a:lstStyle/>
-                        <a:p>
-                          <a:r>
-                            <a:rPr lang="en-US" sz="1200" dirty="0"/>
-                            <a:t>Baseline Outcome,</a:t>
-                          </a:r>
-                        </a:p>
-                        <a:p>
-                          <a:r>
-                            <a:rPr lang="en-US" sz="1200" dirty="0"/>
-                            <a:t>Age, Sex,</a:t>
-                          </a:r>
-                        </a:p>
-                        <a:p>
-                          <a:r>
-                            <a:rPr lang="en-US" sz="1200" dirty="0"/>
-                            <a:t>Variables Associated with Inflammation</a:t>
-                          </a:r>
-                        </a:p>
-                        <a:p>
-                          <a:endParaRPr lang="en-US" sz="1200" dirty="0"/>
-                        </a:p>
-                      </a:txBody>
-                      <a:tcPr/>
-                    </a:tc>
-                    <a:extLst>
-                      <a:ext uri="{0D108BD9-81ED-4DB2-BD59-A6C34878D82A}">
-                        <a16:rowId xmlns:a16="http://schemas.microsoft.com/office/drawing/2014/main" val="126878836"/>
-                      </a:ext>
-                    </a:extLst>
-                  </a:tr>
-                </a:tbl>
-              </a:graphicData>
-            </a:graphic>
-          </p:graphicFrame>
-        </mc:Fallback>
-      </mc:AlternateContent>
-      <mc:AlternateContent xmlns:mc="http://schemas.openxmlformats.org/markup-compatibility/2006">
-        <mc:Choice xmlns:a14="http://schemas.microsoft.com/office/drawing/2010/main" Requires="a14">
-          <p:sp>
-            <p:nvSpPr>
-              <p:cNvPr id="7" name="TextBox 6">
-                <a:extLst>
-                  <a:ext uri="{FF2B5EF4-FFF2-40B4-BE49-F238E27FC236}">
-                    <a16:creationId xmlns:a16="http://schemas.microsoft.com/office/drawing/2014/main" id="{805ECCB4-7538-BD6F-B3F3-094DBA08FD7F}"/>
-                  </a:ext>
-                </a:extLst>
-              </p:cNvPr>
-              <p:cNvSpPr txBox="1"/>
-              <p:nvPr/>
             </p:nvSpPr>
             <p:spPr>
               <a:xfrm>
-                <a:off x="1189181" y="1787267"/>
-                <a:ext cx="6079436" cy="646331"/>
+                <a:off x="1189181" y="1825625"/>
+                <a:ext cx="8290721" cy="4575175"/>
               </a:xfrm>
-              <a:prstGeom prst="rect">
-                <a:avLst/>
-              </a:prstGeom>
-              <a:noFill/>
             </p:spPr>
             <p:txBody>
-              <a:bodyPr wrap="square" rtlCol="0">
-                <a:spAutoFit/>
+              <a:bodyPr>
+                <a:normAutofit/>
               </a:bodyPr>
               <a:lstStyle/>
               <a:p>
                 <a:r>
-                  <a:rPr lang="en-US" b="0" i="0" dirty="0">
-                    <a:latin typeface="Cambria Math" panose="02040503050406030204" pitchFamily="18" charset="0"/>
-                  </a:rPr>
-                  <a:t>Linear Regression</a:t>
+                  <a:rPr lang="en-US" sz="2000" dirty="0"/>
+                  <a:t>Primary models</a:t>
                 </a:r>
               </a:p>
               <a:p>
+                <a:pPr lvl="1"/>
+                <a:r>
+                  <a:rPr lang="en-US" sz="1600" dirty="0"/>
+                  <a:t>Extend Hypothesis 1b models to include </a:t>
+                </a:r>
+                <a:r>
+                  <a:rPr lang="en-US" sz="1600" b="1" dirty="0"/>
+                  <a:t>Amyloid Deposition Interaction</a:t>
+                </a:r>
+              </a:p>
+              <a:p>
+                <a:r>
+                  <a:rPr lang="en-US" sz="2000" dirty="0"/>
+                  <a:t>Covariates</a:t>
+                </a:r>
+              </a:p>
+              <a:p>
+                <a:pPr lvl="1"/>
+                <a:r>
+                  <a:rPr lang="en-US" sz="1600" dirty="0"/>
+                  <a:t>Age, Sex, Variables Related to Inflammation (determined with exploratory analysis)</a:t>
+                </a:r>
+              </a:p>
+              <a:p>
+                <a:r>
+                  <a:rPr lang="en-US" sz="2000" dirty="0"/>
+                  <a:t>Testing</a:t>
+                </a:r>
+              </a:p>
+              <a:p>
+                <a:pPr lvl="1"/>
+                <a:r>
+                  <a:rPr lang="en-US" sz="1600" dirty="0"/>
+                  <a:t>Tests for significant interaction effects</a:t>
+                </a:r>
+              </a:p>
+              <a:p>
+                <a:pPr lvl="1"/>
+                <a:r>
+                  <a:rPr lang="en-US" sz="1600" dirty="0"/>
+                  <a:t>Interpret inflammation-outcome relationship across levels of amyloid deposition</a:t>
+                </a:r>
+              </a:p>
+              <a:p>
+                <a:r>
+                  <a:rPr lang="en-US" sz="2000" dirty="0"/>
+                  <a:t>Multicollinearity Plan</a:t>
+                </a:r>
+              </a:p>
+              <a:p>
+                <a:pPr lvl="1"/>
+                <a:r>
+                  <a:rPr lang="en-US" sz="1600" dirty="0"/>
+                  <a:t>Fit outcome change by each inflammation-amyloid deposition interaction </a:t>
+                </a:r>
+                <a:r>
+                  <a:rPr lang="en-US" sz="1600" b="1" dirty="0"/>
+                  <a:t>separately</a:t>
+                </a:r>
+              </a:p>
+              <a:p>
+                <a:r>
+                  <a:rPr lang="en-US" sz="2000" dirty="0"/>
+                  <a:t>Type I Error Control</a:t>
+                </a:r>
+                <a:endParaRPr lang="en-US" sz="1600" dirty="0"/>
+              </a:p>
+              <a:p>
+                <a:pPr lvl="1"/>
+                <a:r>
+                  <a:rPr lang="en-US" sz="1600" dirty="0"/>
+                  <a:t>Bonferroni correction for testing two main outcomes</a:t>
+                </a:r>
+              </a:p>
+              <a:p>
+                <a:pPr lvl="1"/>
                 <a14:m>
-                  <m:oMathPara xmlns:m="http://schemas.openxmlformats.org/officeDocument/2006/math">
-                    <m:oMathParaPr>
-                      <m:jc m:val="centerGroup"/>
-                    </m:oMathParaPr>
-                    <m:oMath xmlns:m="http://schemas.openxmlformats.org/officeDocument/2006/math">
-                      <m:r>
-                        <m:rPr>
-                          <m:sty m:val="p"/>
-                        </m:rPr>
-                        <a:rPr lang="en-US" b="0" i="0" smtClean="0">
-                          <a:latin typeface="Cambria Math" panose="02040503050406030204" pitchFamily="18" charset="0"/>
-                        </a:rPr>
-                        <m:t>Δ</m:t>
-                      </m:r>
-                      <m:r>
-                        <a:rPr lang="en-US" b="0" i="1" smtClean="0">
-                          <a:latin typeface="Cambria Math" panose="02040503050406030204" pitchFamily="18" charset="0"/>
-                        </a:rPr>
-                        <m:t>𝐶𝑉𝐿𝑇</m:t>
-                      </m:r>
-                      <m:r>
-                        <a:rPr lang="en-US" b="0" i="1" smtClean="0">
-                          <a:latin typeface="Cambria Math" panose="02040503050406030204" pitchFamily="18" charset="0"/>
-                        </a:rPr>
-                        <m:t>~</m:t>
-                      </m:r>
-                      <m:r>
-                        <a:rPr lang="en-US" b="0" i="1" smtClean="0">
-                          <a:latin typeface="Cambria Math" panose="02040503050406030204" pitchFamily="18" charset="0"/>
-                        </a:rPr>
-                        <m:t>𝑋</m:t>
-                      </m:r>
-                      <m:r>
-                        <a:rPr lang="en-US" b="0" i="1" smtClean="0">
-                          <a:latin typeface="Cambria Math" panose="02040503050406030204" pitchFamily="18" charset="0"/>
-                        </a:rPr>
-                        <m:t>+</m:t>
-                      </m:r>
-                      <m:r>
-                        <a:rPr lang="en-US" b="0" i="1" smtClean="0">
-                          <a:latin typeface="Cambria Math" panose="02040503050406030204" pitchFamily="18" charset="0"/>
-                        </a:rPr>
-                        <m:t>𝐶𝑉𝐿</m:t>
-                      </m:r>
-                      <m:sSub>
-                        <m:sSubPr>
-                          <m:ctrlPr>
-                            <a:rPr lang="en-US" b="0" i="1" smtClean="0">
-                              <a:latin typeface="Cambria Math" panose="02040503050406030204" pitchFamily="18" charset="0"/>
-                            </a:rPr>
-                          </m:ctrlPr>
-                        </m:sSubPr>
-                        <m:e>
-                          <m:r>
-                            <a:rPr lang="en-US" b="0" i="1" smtClean="0">
-                              <a:latin typeface="Cambria Math" panose="02040503050406030204" pitchFamily="18" charset="0"/>
-                            </a:rPr>
-                            <m:t>𝑇</m:t>
-                          </m:r>
-                        </m:e>
-                        <m:sub>
-                          <m:r>
-                            <a:rPr lang="en-US" b="0" i="1" smtClean="0">
-                              <a:latin typeface="Cambria Math" panose="02040503050406030204" pitchFamily="18" charset="0"/>
-                            </a:rPr>
-                            <m:t>𝑏𝑎𝑠𝑒𝑙𝑖𝑛𝑒</m:t>
-                          </m:r>
-                        </m:sub>
-                      </m:sSub>
-                      <m:r>
-                        <a:rPr lang="en-US" b="0" i="1" smtClean="0">
-                          <a:latin typeface="Cambria Math" panose="02040503050406030204" pitchFamily="18" charset="0"/>
-                        </a:rPr>
-                        <m:t>+</m:t>
-                      </m:r>
-                      <m:r>
-                        <a:rPr lang="en-US" b="0" i="1" smtClean="0">
-                          <a:latin typeface="Cambria Math" panose="02040503050406030204" pitchFamily="18" charset="0"/>
-                        </a:rPr>
-                        <m:t>𝐴𝑔𝑒</m:t>
-                      </m:r>
-                      <m:r>
-                        <a:rPr lang="en-US" b="0" i="1" smtClean="0">
-                          <a:latin typeface="Cambria Math" panose="02040503050406030204" pitchFamily="18" charset="0"/>
-                        </a:rPr>
-                        <m:t>+</m:t>
-                      </m:r>
-                      <m:r>
-                        <a:rPr lang="en-US" b="0" i="1" smtClean="0">
-                          <a:latin typeface="Cambria Math" panose="02040503050406030204" pitchFamily="18" charset="0"/>
-                        </a:rPr>
-                        <m:t>𝑆𝑒𝑥</m:t>
-                      </m:r>
-                      <m:r>
-                        <a:rPr lang="en-US" b="0" i="1" smtClean="0">
-                          <a:latin typeface="Cambria Math" panose="02040503050406030204" pitchFamily="18" charset="0"/>
-                        </a:rPr>
-                        <m:t>+</m:t>
-                      </m:r>
-                      <m:r>
-                        <a:rPr lang="en-US" b="0" i="1" smtClean="0">
-                          <a:latin typeface="Cambria Math" panose="02040503050406030204" pitchFamily="18" charset="0"/>
-                        </a:rPr>
-                        <m:t>𝐶𝑜𝑣𝑎𝑟𝑖𝑎𝑡𝑒𝑠</m:t>
-                      </m:r>
-                    </m:oMath>
-                  </m:oMathPara>
+                  <m:oMath xmlns:m="http://schemas.openxmlformats.org/officeDocument/2006/math">
+                    <m:r>
+                      <m:rPr>
+                        <m:sty m:val="p"/>
+                      </m:rPr>
+                      <a:rPr lang="en-US" sz="1600" b="0" i="1" smtClean="0">
+                        <a:latin typeface="Cambria Math" panose="02040503050406030204" pitchFamily="18" charset="0"/>
+                      </a:rPr>
+                      <m:t>α</m:t>
+                    </m:r>
+                    <m:r>
+                      <a:rPr lang="en-US" sz="1600" b="0" i="1" smtClean="0">
+                        <a:latin typeface="Cambria Math" panose="02040503050406030204" pitchFamily="18" charset="0"/>
+                      </a:rPr>
+                      <m:t>=0.05/2=0.025</m:t>
+                    </m:r>
+                  </m:oMath>
                 </a14:m>
-                <a:endParaRPr lang="en-US" dirty="0"/>
+                <a:endParaRPr lang="en-US" sz="1600" dirty="0"/>
               </a:p>
             </p:txBody>
           </p:sp>
         </mc:Choice>
-        <mc:Fallback>
+        <mc:Fallback xmlns="">
           <p:sp>
             <p:nvSpPr>
-              <p:cNvPr id="7" name="TextBox 6">
+              <p:cNvPr id="3" name="Content Placeholder 2">
                 <a:extLst>
                   <a:ext uri="{FF2B5EF4-FFF2-40B4-BE49-F238E27FC236}">
-                    <a16:creationId xmlns:a16="http://schemas.microsoft.com/office/drawing/2014/main" id="{805ECCB4-7538-BD6F-B3F3-094DBA08FD7F}"/>
+                    <a16:creationId xmlns:a16="http://schemas.microsoft.com/office/drawing/2014/main" id="{02C28FE3-DE16-B5B9-C27A-53B0A3A05701}"/>
                   </a:ext>
                 </a:extLst>
               </p:cNvPr>
-              <p:cNvSpPr txBox="1">
-                <a:spLocks noRot="1" noChangeAspect="1" noMove="1" noResize="1" noEditPoints="1" noAdjustHandles="1" noChangeArrowheads="1" noChangeShapeType="1" noTextEdit="1"/>
+              <p:cNvSpPr>
+                <a:spLocks noGrp="1" noRot="1" noChangeAspect="1" noMove="1" noResize="1" noEditPoints="1" noAdjustHandles="1" noChangeArrowheads="1" noChangeShapeType="1" noTextEdit="1"/>
               </p:cNvSpPr>
-              <p:nvPr/>
+              <p:nvPr>
+                <p:ph idx="1"/>
+              </p:nvPr>
             </p:nvSpPr>
             <p:spPr>
               <a:xfrm>
-                <a:off x="1189181" y="1787267"/>
-                <a:ext cx="6079436" cy="646331"/>
+                <a:off x="1189181" y="1825625"/>
+                <a:ext cx="8290721" cy="4575175"/>
               </a:xfrm>
-              <a:prstGeom prst="rect">
-                <a:avLst/>
-              </a:prstGeom>
               <a:blipFill>
-                <a:blip r:embed="rId4"/>
+                <a:blip r:embed="rId2"/>
                 <a:stretch>
-                  <a:fillRect l="-802" t="-5660" b="-6604"/>
+                  <a:fillRect l="-662" t="-1198"/>
                 </a:stretch>
               </a:blipFill>
             </p:spPr>
@@ -7011,7 +6282,7 @@
     </p:spTree>
     <p:extLst>
       <p:ext uri="{BB962C8B-B14F-4D97-AF65-F5344CB8AC3E}">
-        <p14:creationId xmlns:p14="http://schemas.microsoft.com/office/powerpoint/2010/main" val="3889094601"/>
+        <p14:creationId xmlns:p14="http://schemas.microsoft.com/office/powerpoint/2010/main" val="1923005346"/>
       </p:ext>
     </p:extLst>
   </p:cSld>
@@ -7037,7 +6308,7 @@
         <p:cNvPr id="1" name="">
           <a:extLst>
             <a:ext uri="{FF2B5EF4-FFF2-40B4-BE49-F238E27FC236}">
-              <a16:creationId xmlns:a16="http://schemas.microsoft.com/office/drawing/2014/main" id="{01AE0B9E-F67C-AEE4-24CE-6135D09340B2}"/>
+              <a16:creationId xmlns:a16="http://schemas.microsoft.com/office/drawing/2014/main" id="{B948B496-6E72-135E-CCDA-75987A060126}"/>
             </a:ext>
           </a:extLst>
         </p:cNvPr>
@@ -7057,7 +6328,7 @@
           <p:cNvPr id="4" name="Rectangle 3">
             <a:extLst>
               <a:ext uri="{FF2B5EF4-FFF2-40B4-BE49-F238E27FC236}">
-                <a16:creationId xmlns:a16="http://schemas.microsoft.com/office/drawing/2014/main" id="{1755F6C4-591F-7369-F575-47CE73AC4F86}"/>
+                <a16:creationId xmlns:a16="http://schemas.microsoft.com/office/drawing/2014/main" id="{269B47B7-EE88-5ABA-14DD-BB63A06298E2}"/>
               </a:ext>
             </a:extLst>
           </p:cNvPr>
@@ -7106,7 +6377,7 @@
           <p:cNvPr id="2" name="Title 1">
             <a:extLst>
               <a:ext uri="{FF2B5EF4-FFF2-40B4-BE49-F238E27FC236}">
-                <a16:creationId xmlns:a16="http://schemas.microsoft.com/office/drawing/2014/main" id="{77BE81DA-4F52-08D4-80BC-5FAC9B0DA750}"/>
+                <a16:creationId xmlns:a16="http://schemas.microsoft.com/office/drawing/2014/main" id="{FA787F43-16FC-B2B3-E4E4-1CB095759AC0}"/>
               </a:ext>
             </a:extLst>
           </p:cNvPr>
@@ -7129,837 +6400,223 @@
           <a:p>
             <a:r>
               <a:rPr lang="en-US" dirty="0"/>
-              <a:t>Aim 2 Analysis Method</a:t>
-            </a:r>
-          </a:p>
-        </p:txBody>
-      </p:sp>
-      <mc:AlternateContent xmlns:mc="http://schemas.openxmlformats.org/markup-compatibility/2006">
-        <mc:Choice xmlns:a14="http://schemas.microsoft.com/office/drawing/2010/main" Requires="a14">
-          <p:graphicFrame>
-            <p:nvGraphicFramePr>
-              <p:cNvPr id="3" name="Table 2">
+              <a:t>Aim 2 Power</a:t>
+            </a:r>
+          </a:p>
+        </p:txBody>
+      </p:sp>
+      <mc:AlternateContent xmlns:mc="http://schemas.openxmlformats.org/markup-compatibility/2006" xmlns:a14="http://schemas.microsoft.com/office/drawing/2010/main">
+        <mc:Choice Requires="a14">
+          <p:sp>
+            <p:nvSpPr>
+              <p:cNvPr id="3" name="Content Placeholder 2">
                 <a:extLst>
                   <a:ext uri="{FF2B5EF4-FFF2-40B4-BE49-F238E27FC236}">
-                    <a16:creationId xmlns:a16="http://schemas.microsoft.com/office/drawing/2014/main" id="{1209DFEE-7795-93AF-A2E9-F0E331B8C62F}"/>
+                    <a16:creationId xmlns:a16="http://schemas.microsoft.com/office/drawing/2014/main" id="{F1FBDDB5-737A-F6D8-7EBA-503A951DEA3C}"/>
                   </a:ext>
                 </a:extLst>
               </p:cNvPr>
-              <p:cNvGraphicFramePr>
-                <a:graphicFrameLocks noGrp="1"/>
-              </p:cNvGraphicFramePr>
-              <p:nvPr/>
-            </p:nvGraphicFramePr>
-            <p:xfrm>
-              <a:off x="1386331" y="2910258"/>
-              <a:ext cx="9419337" cy="3503104"/>
-            </p:xfrm>
-            <a:graphic>
-              <a:graphicData uri="http://schemas.openxmlformats.org/drawingml/2006/table">
-                <a:tbl>
-                  <a:tblPr firstRow="1" bandRow="1">
-                    <a:tableStyleId>{073A0DAA-6AF3-43AB-8588-CEC1D06C72B9}</a:tableStyleId>
-                  </a:tblPr>
-                  <a:tblGrid>
-                    <a:gridCol w="1140143">
-                      <a:extLst>
-                        <a:ext uri="{9D8B030D-6E8A-4147-A177-3AD203B41FA5}">
-                          <a16:colId xmlns:a16="http://schemas.microsoft.com/office/drawing/2014/main" val="3885695937"/>
-                        </a:ext>
-                      </a:extLst>
-                    </a:gridCol>
-                    <a:gridCol w="2824925">
-                      <a:extLst>
-                        <a:ext uri="{9D8B030D-6E8A-4147-A177-3AD203B41FA5}">
-                          <a16:colId xmlns:a16="http://schemas.microsoft.com/office/drawing/2014/main" val="1502429306"/>
-                        </a:ext>
-                      </a:extLst>
-                    </a:gridCol>
-                    <a:gridCol w="2632583">
-                      <a:extLst>
-                        <a:ext uri="{9D8B030D-6E8A-4147-A177-3AD203B41FA5}">
-                          <a16:colId xmlns:a16="http://schemas.microsoft.com/office/drawing/2014/main" val="3907131552"/>
-                        </a:ext>
-                      </a:extLst>
-                    </a:gridCol>
-                    <a:gridCol w="2821686">
-                      <a:extLst>
-                        <a:ext uri="{9D8B030D-6E8A-4147-A177-3AD203B41FA5}">
-                          <a16:colId xmlns:a16="http://schemas.microsoft.com/office/drawing/2014/main" val="780577694"/>
-                        </a:ext>
-                      </a:extLst>
-                    </a:gridCol>
-                  </a:tblGrid>
-                  <a:tr h="337816">
-                    <a:tc>
-                      <a:txBody>
-                        <a:bodyPr/>
-                        <a:lstStyle/>
-                        <a:p>
-                          <a:r>
-                            <a:rPr lang="en-US" sz="1400"/>
-                            <a:t>Hypothesis</a:t>
-                          </a:r>
-                          <a:endParaRPr lang="en-US" sz="1400" dirty="0"/>
-                        </a:p>
-                      </a:txBody>
-                      <a:tcPr/>
-                    </a:tc>
-                    <a:tc>
-                      <a:txBody>
-                        <a:bodyPr/>
-                        <a:lstStyle/>
-                        <a:p>
-                          <a:r>
-                            <a:rPr lang="en-US" sz="1400" dirty="0"/>
-                            <a:t>Primary Outcomes (</a:t>
-                          </a:r>
-                          <a14:m>
-                            <m:oMath xmlns:m="http://schemas.openxmlformats.org/officeDocument/2006/math">
-                              <m:r>
-                                <a:rPr lang="en-US" sz="1400" b="1" i="1" smtClean="0">
-                                  <a:latin typeface="Cambria Math" panose="02040503050406030204" pitchFamily="18" charset="0"/>
-                                </a:rPr>
-                                <m:t>𝒀</m:t>
-                              </m:r>
-                            </m:oMath>
-                          </a14:m>
-                          <a:r>
-                            <a:rPr lang="en-US" sz="1400" dirty="0"/>
-                            <a:t>)</a:t>
-                          </a:r>
-                        </a:p>
-                      </a:txBody>
-                      <a:tcPr/>
-                    </a:tc>
-                    <a:tc>
-                      <a:txBody>
-                        <a:bodyPr/>
-                        <a:lstStyle/>
-                        <a:p>
-                          <a:r>
-                            <a:rPr lang="en-US" sz="1400" dirty="0"/>
-                            <a:t>Primary Predictors (</a:t>
-                          </a:r>
-                          <a14:m>
-                            <m:oMath xmlns:m="http://schemas.openxmlformats.org/officeDocument/2006/math">
-                              <m:r>
-                                <a:rPr lang="en-US" sz="1400" b="1" i="1" smtClean="0">
-                                  <a:latin typeface="Cambria Math" panose="02040503050406030204" pitchFamily="18" charset="0"/>
-                                </a:rPr>
-                                <m:t>𝑿</m:t>
-                              </m:r>
-                            </m:oMath>
-                          </a14:m>
-                          <a:r>
-                            <a:rPr lang="en-US" sz="1400" dirty="0"/>
-                            <a:t>)</a:t>
-                          </a:r>
-                        </a:p>
-                      </a:txBody>
-                      <a:tcPr/>
-                    </a:tc>
-                    <a:tc>
-                      <a:txBody>
-                        <a:bodyPr/>
-                        <a:lstStyle/>
-                        <a:p>
-                          <a:r>
-                            <a:rPr lang="en-US" sz="1400" dirty="0"/>
-                            <a:t>Covariates</a:t>
-                          </a:r>
-                        </a:p>
-                      </a:txBody>
-                      <a:tcPr/>
-                    </a:tc>
-                    <a:extLst>
-                      <a:ext uri="{0D108BD9-81ED-4DB2-BD59-A6C34878D82A}">
-                        <a16:rowId xmlns:a16="http://schemas.microsoft.com/office/drawing/2014/main" val="3804010600"/>
-                      </a:ext>
-                    </a:extLst>
-                  </a:tr>
-                  <a:tr h="1582644">
-                    <a:tc>
-                      <a:txBody>
-                        <a:bodyPr/>
-                        <a:lstStyle/>
-                        <a:p>
-                          <a:r>
-                            <a:rPr lang="en-US" sz="1200" dirty="0"/>
-                            <a:t>1a</a:t>
-                          </a:r>
-                        </a:p>
-                      </a:txBody>
-                      <a:tcPr/>
-                    </a:tc>
-                    <a:tc>
-                      <a:txBody>
-                        <a:bodyPr/>
-                        <a:lstStyle/>
-                        <a:p>
-                          <a:r>
-                            <a:rPr lang="en-US" sz="1200"/>
-                            <a:t>Change in Cortical Thickness</a:t>
-                          </a:r>
-                        </a:p>
-                        <a:p>
-                          <a:r>
-                            <a:rPr lang="en-US" sz="1200"/>
-                            <a:t>Change in Cognitive Measures</a:t>
-                          </a:r>
-                        </a:p>
-                        <a:p>
-                          <a:r>
-                            <a:rPr lang="en-US" sz="1200"/>
-                            <a:t>(CVLT, Benson Figure, MST, Story Recall)</a:t>
-                          </a:r>
-                          <a:endParaRPr lang="en-US" sz="1200" dirty="0"/>
-                        </a:p>
-                      </a:txBody>
-                      <a:tcPr/>
-                    </a:tc>
-                    <a:tc>
-                      <a:txBody>
-                        <a:bodyPr/>
-                        <a:lstStyle/>
-                        <a:p>
-                          <a:r>
-                            <a:rPr lang="en-US" sz="1200"/>
-                            <a:t>Baseline Measures of Inflammation</a:t>
-                          </a:r>
-                        </a:p>
-                        <a:p>
-                          <a:r>
-                            <a:rPr lang="en-US" sz="1200"/>
-                            <a:t>(IL-6, TNF-alpha, MCP-1, eotaxin-1)</a:t>
-                          </a:r>
-                          <a:endParaRPr lang="en-US" sz="1200" dirty="0"/>
-                        </a:p>
-                      </a:txBody>
-                      <a:tcPr/>
-                    </a:tc>
-                    <a:tc>
-                      <a:txBody>
-                        <a:bodyPr/>
-                        <a:lstStyle/>
-                        <a:p>
-                          <a:r>
-                            <a:rPr lang="en-US" sz="1200"/>
-                            <a:t>Baseline Outcome,</a:t>
-                          </a:r>
-                        </a:p>
-                        <a:p>
-                          <a:r>
-                            <a:rPr lang="en-US" sz="1200"/>
-                            <a:t>Age, Sex,</a:t>
-                          </a:r>
-                        </a:p>
-                        <a:p>
-                          <a:r>
-                            <a:rPr lang="en-US" sz="1200"/>
-                            <a:t>Variables Associated with Inflammation</a:t>
-                          </a:r>
-                          <a:endParaRPr lang="en-US" sz="1200" dirty="0"/>
-                        </a:p>
-                      </a:txBody>
-                      <a:tcPr/>
-                    </a:tc>
-                    <a:extLst>
-                      <a:ext uri="{0D108BD9-81ED-4DB2-BD59-A6C34878D82A}">
-                        <a16:rowId xmlns:a16="http://schemas.microsoft.com/office/drawing/2014/main" val="2112868750"/>
-                      </a:ext>
-                    </a:extLst>
-                  </a:tr>
-                  <a:tr h="1582644">
-                    <a:tc>
-                      <a:txBody>
-                        <a:bodyPr/>
-                        <a:lstStyle/>
-                        <a:p>
-                          <a:r>
-                            <a:rPr lang="en-US" sz="1200"/>
-                            <a:t>1b</a:t>
-                          </a:r>
-                          <a:endParaRPr lang="en-US" sz="1200" dirty="0"/>
-                        </a:p>
-                      </a:txBody>
-                      <a:tcPr/>
-                    </a:tc>
-                    <a:tc>
-                      <a:txBody>
-                        <a:bodyPr/>
-                        <a:lstStyle/>
-                        <a:p>
-                          <a:r>
-                            <a:rPr lang="en-US" sz="1200" dirty="0"/>
-                            <a:t>Chang in Cortical Thickness</a:t>
-                          </a:r>
-                        </a:p>
-                        <a:p>
-                          <a:r>
-                            <a:rPr lang="en-US" sz="1200" dirty="0"/>
-                            <a:t>Change in Cognitive Measures</a:t>
-                          </a:r>
-                        </a:p>
-                        <a:p>
-                          <a:r>
-                            <a:rPr lang="en-US" sz="1200" dirty="0"/>
-                            <a:t>(CVLT, Benson Figure, MST, Story Recall)</a:t>
-                          </a:r>
-                        </a:p>
-                      </a:txBody>
-                      <a:tcPr/>
-                    </a:tc>
-                    <a:tc>
-                      <a:txBody>
-                        <a:bodyPr/>
-                        <a:lstStyle/>
-                        <a:p>
-                          <a:r>
-                            <a:rPr lang="en-US" sz="1200"/>
-                            <a:t>Change in Measures of Inflammation</a:t>
-                          </a:r>
-                        </a:p>
-                        <a:p>
-                          <a:r>
-                            <a:rPr lang="en-US" sz="1200"/>
-                            <a:t>(IL-6, TNF-alpha, MCP-1, eotaxin-1)</a:t>
-                          </a:r>
-                        </a:p>
-                        <a:p>
-                          <a:endParaRPr lang="en-US" sz="1200" dirty="0"/>
-                        </a:p>
-                      </a:txBody>
-                      <a:tcPr/>
-                    </a:tc>
-                    <a:tc>
-                      <a:txBody>
-                        <a:bodyPr/>
-                        <a:lstStyle/>
-                        <a:p>
-                          <a:r>
-                            <a:rPr lang="en-US" sz="1200" dirty="0"/>
-                            <a:t>Baseline Outcome,</a:t>
-                          </a:r>
-                        </a:p>
-                        <a:p>
-                          <a:r>
-                            <a:rPr lang="en-US" sz="1200" dirty="0"/>
-                            <a:t>Age, Sex,</a:t>
-                          </a:r>
-                        </a:p>
-                        <a:p>
-                          <a:r>
-                            <a:rPr lang="en-US" sz="1200" dirty="0"/>
-                            <a:t>Variables Associated with Inflammation</a:t>
-                          </a:r>
-                        </a:p>
-                        <a:p>
-                          <a:endParaRPr lang="en-US" sz="1200" dirty="0"/>
-                        </a:p>
-                      </a:txBody>
-                      <a:tcPr/>
-                    </a:tc>
-                    <a:extLst>
-                      <a:ext uri="{0D108BD9-81ED-4DB2-BD59-A6C34878D82A}">
-                        <a16:rowId xmlns:a16="http://schemas.microsoft.com/office/drawing/2014/main" val="126878836"/>
-                      </a:ext>
-                    </a:extLst>
-                  </a:tr>
-                </a:tbl>
-              </a:graphicData>
-            </a:graphic>
-          </p:graphicFrame>
-        </mc:Choice>
-        <mc:Fallback>
-          <p:graphicFrame>
-            <p:nvGraphicFramePr>
-              <p:cNvPr id="3" name="Table 2">
-                <a:extLst>
-                  <a:ext uri="{FF2B5EF4-FFF2-40B4-BE49-F238E27FC236}">
-                    <a16:creationId xmlns:a16="http://schemas.microsoft.com/office/drawing/2014/main" id="{1209DFEE-7795-93AF-A2E9-F0E331B8C62F}"/>
-                  </a:ext>
-                </a:extLst>
-              </p:cNvPr>
-              <p:cNvGraphicFramePr>
-                <a:graphicFrameLocks noGrp="1"/>
-              </p:cNvGraphicFramePr>
-              <p:nvPr/>
-            </p:nvGraphicFramePr>
-            <p:xfrm>
-              <a:off x="1386331" y="2910258"/>
-              <a:ext cx="9419337" cy="3503104"/>
-            </p:xfrm>
-            <a:graphic>
-              <a:graphicData uri="http://schemas.openxmlformats.org/drawingml/2006/table">
-                <a:tbl>
-                  <a:tblPr firstRow="1" bandRow="1">
-                    <a:tableStyleId>{073A0DAA-6AF3-43AB-8588-CEC1D06C72B9}</a:tableStyleId>
-                  </a:tblPr>
-                  <a:tblGrid>
-                    <a:gridCol w="1140143">
-                      <a:extLst>
-                        <a:ext uri="{9D8B030D-6E8A-4147-A177-3AD203B41FA5}">
-                          <a16:colId xmlns:a16="http://schemas.microsoft.com/office/drawing/2014/main" val="3885695937"/>
-                        </a:ext>
-                      </a:extLst>
-                    </a:gridCol>
-                    <a:gridCol w="2824925">
-                      <a:extLst>
-                        <a:ext uri="{9D8B030D-6E8A-4147-A177-3AD203B41FA5}">
-                          <a16:colId xmlns:a16="http://schemas.microsoft.com/office/drawing/2014/main" val="1502429306"/>
-                        </a:ext>
-                      </a:extLst>
-                    </a:gridCol>
-                    <a:gridCol w="2632583">
-                      <a:extLst>
-                        <a:ext uri="{9D8B030D-6E8A-4147-A177-3AD203B41FA5}">
-                          <a16:colId xmlns:a16="http://schemas.microsoft.com/office/drawing/2014/main" val="3907131552"/>
-                        </a:ext>
-                      </a:extLst>
-                    </a:gridCol>
-                    <a:gridCol w="2821686">
-                      <a:extLst>
-                        <a:ext uri="{9D8B030D-6E8A-4147-A177-3AD203B41FA5}">
-                          <a16:colId xmlns:a16="http://schemas.microsoft.com/office/drawing/2014/main" val="780577694"/>
-                        </a:ext>
-                      </a:extLst>
-                    </a:gridCol>
-                  </a:tblGrid>
-                  <a:tr h="337816">
-                    <a:tc>
-                      <a:txBody>
-                        <a:bodyPr/>
-                        <a:lstStyle/>
-                        <a:p>
-                          <a:r>
-                            <a:rPr lang="en-US" sz="1400"/>
-                            <a:t>Hypothesis</a:t>
-                          </a:r>
-                          <a:endParaRPr lang="en-US" sz="1400" dirty="0"/>
-                        </a:p>
-                      </a:txBody>
-                      <a:tcPr/>
-                    </a:tc>
-                    <a:tc>
-                      <a:txBody>
-                        <a:bodyPr/>
-                        <a:lstStyle/>
-                        <a:p>
-                          <a:endParaRPr lang="en-US"/>
-                        </a:p>
-                      </a:txBody>
-                      <a:tcPr>
-                        <a:blipFill>
-                          <a:blip r:embed="rId3"/>
-                          <a:stretch>
-                            <a:fillRect l="-40517" t="-1786" r="-193750" b="-932143"/>
-                          </a:stretch>
-                        </a:blipFill>
-                      </a:tcPr>
-                    </a:tc>
-                    <a:tc>
-                      <a:txBody>
-                        <a:bodyPr/>
-                        <a:lstStyle/>
-                        <a:p>
-                          <a:endParaRPr lang="en-US"/>
-                        </a:p>
-                      </a:txBody>
-                      <a:tcPr>
-                        <a:blipFill>
-                          <a:blip r:embed="rId3"/>
-                          <a:stretch>
-                            <a:fillRect l="-150926" t="-1786" r="-108102" b="-932143"/>
-                          </a:stretch>
-                        </a:blipFill>
-                      </a:tcPr>
-                    </a:tc>
-                    <a:tc>
-                      <a:txBody>
-                        <a:bodyPr/>
-                        <a:lstStyle/>
-                        <a:p>
-                          <a:r>
-                            <a:rPr lang="en-US" sz="1400" dirty="0"/>
-                            <a:t>Covariates</a:t>
-                          </a:r>
-                        </a:p>
-                      </a:txBody>
-                      <a:tcPr/>
-                    </a:tc>
-                    <a:extLst>
-                      <a:ext uri="{0D108BD9-81ED-4DB2-BD59-A6C34878D82A}">
-                        <a16:rowId xmlns:a16="http://schemas.microsoft.com/office/drawing/2014/main" val="3804010600"/>
-                      </a:ext>
-                    </a:extLst>
-                  </a:tr>
-                  <a:tr h="1582644">
-                    <a:tc>
-                      <a:txBody>
-                        <a:bodyPr/>
-                        <a:lstStyle/>
-                        <a:p>
-                          <a:r>
-                            <a:rPr lang="en-US" sz="1200" dirty="0"/>
-                            <a:t>1a</a:t>
-                          </a:r>
-                        </a:p>
-                      </a:txBody>
-                      <a:tcPr/>
-                    </a:tc>
-                    <a:tc>
-                      <a:txBody>
-                        <a:bodyPr/>
-                        <a:lstStyle/>
-                        <a:p>
-                          <a:r>
-                            <a:rPr lang="en-US" sz="1200"/>
-                            <a:t>Change in Cortical Thickness</a:t>
-                          </a:r>
-                        </a:p>
-                        <a:p>
-                          <a:r>
-                            <a:rPr lang="en-US" sz="1200"/>
-                            <a:t>Change in Cognitive Measures</a:t>
-                          </a:r>
-                        </a:p>
-                        <a:p>
-                          <a:r>
-                            <a:rPr lang="en-US" sz="1200"/>
-                            <a:t>(CVLT, Benson Figure, MST, Story Recall)</a:t>
-                          </a:r>
-                          <a:endParaRPr lang="en-US" sz="1200" dirty="0"/>
-                        </a:p>
-                      </a:txBody>
-                      <a:tcPr/>
-                    </a:tc>
-                    <a:tc>
-                      <a:txBody>
-                        <a:bodyPr/>
-                        <a:lstStyle/>
-                        <a:p>
-                          <a:r>
-                            <a:rPr lang="en-US" sz="1200"/>
-                            <a:t>Baseline Measures of Inflammation</a:t>
-                          </a:r>
-                        </a:p>
-                        <a:p>
-                          <a:r>
-                            <a:rPr lang="en-US" sz="1200"/>
-                            <a:t>(IL-6, TNF-alpha, MCP-1, eotaxin-1)</a:t>
-                          </a:r>
-                          <a:endParaRPr lang="en-US" sz="1200" dirty="0"/>
-                        </a:p>
-                      </a:txBody>
-                      <a:tcPr/>
-                    </a:tc>
-                    <a:tc>
-                      <a:txBody>
-                        <a:bodyPr/>
-                        <a:lstStyle/>
-                        <a:p>
-                          <a:r>
-                            <a:rPr lang="en-US" sz="1200"/>
-                            <a:t>Baseline Outcome,</a:t>
-                          </a:r>
-                        </a:p>
-                        <a:p>
-                          <a:r>
-                            <a:rPr lang="en-US" sz="1200"/>
-                            <a:t>Age, Sex,</a:t>
-                          </a:r>
-                        </a:p>
-                        <a:p>
-                          <a:r>
-                            <a:rPr lang="en-US" sz="1200"/>
-                            <a:t>Variables Associated with Inflammation</a:t>
-                          </a:r>
-                          <a:endParaRPr lang="en-US" sz="1200" dirty="0"/>
-                        </a:p>
-                      </a:txBody>
-                      <a:tcPr/>
-                    </a:tc>
-                    <a:extLst>
-                      <a:ext uri="{0D108BD9-81ED-4DB2-BD59-A6C34878D82A}">
-                        <a16:rowId xmlns:a16="http://schemas.microsoft.com/office/drawing/2014/main" val="2112868750"/>
-                      </a:ext>
-                    </a:extLst>
-                  </a:tr>
-                  <a:tr h="1582644">
-                    <a:tc>
-                      <a:txBody>
-                        <a:bodyPr/>
-                        <a:lstStyle/>
-                        <a:p>
-                          <a:r>
-                            <a:rPr lang="en-US" sz="1200"/>
-                            <a:t>1b</a:t>
-                          </a:r>
-                          <a:endParaRPr lang="en-US" sz="1200" dirty="0"/>
-                        </a:p>
-                      </a:txBody>
-                      <a:tcPr/>
-                    </a:tc>
-                    <a:tc>
-                      <a:txBody>
-                        <a:bodyPr/>
-                        <a:lstStyle/>
-                        <a:p>
-                          <a:r>
-                            <a:rPr lang="en-US" sz="1200" dirty="0"/>
-                            <a:t>Chang in Cortical Thickness</a:t>
-                          </a:r>
-                        </a:p>
-                        <a:p>
-                          <a:r>
-                            <a:rPr lang="en-US" sz="1200" dirty="0"/>
-                            <a:t>Change in Cognitive Measures</a:t>
-                          </a:r>
-                        </a:p>
-                        <a:p>
-                          <a:r>
-                            <a:rPr lang="en-US" sz="1200" dirty="0"/>
-                            <a:t>(CVLT, Benson Figure, MST, Story Recall)</a:t>
-                          </a:r>
-                        </a:p>
-                      </a:txBody>
-                      <a:tcPr/>
-                    </a:tc>
-                    <a:tc>
-                      <a:txBody>
-                        <a:bodyPr/>
-                        <a:lstStyle/>
-                        <a:p>
-                          <a:r>
-                            <a:rPr lang="en-US" sz="1200"/>
-                            <a:t>Change in Measures of Inflammation</a:t>
-                          </a:r>
-                        </a:p>
-                        <a:p>
-                          <a:r>
-                            <a:rPr lang="en-US" sz="1200"/>
-                            <a:t>(IL-6, TNF-alpha, MCP-1, eotaxin-1)</a:t>
-                          </a:r>
-                        </a:p>
-                        <a:p>
-                          <a:endParaRPr lang="en-US" sz="1200" dirty="0"/>
-                        </a:p>
-                      </a:txBody>
-                      <a:tcPr/>
-                    </a:tc>
-                    <a:tc>
-                      <a:txBody>
-                        <a:bodyPr/>
-                        <a:lstStyle/>
-                        <a:p>
-                          <a:r>
-                            <a:rPr lang="en-US" sz="1200" dirty="0"/>
-                            <a:t>Baseline Outcome,</a:t>
-                          </a:r>
-                        </a:p>
-                        <a:p>
-                          <a:r>
-                            <a:rPr lang="en-US" sz="1200" dirty="0"/>
-                            <a:t>Age, Sex,</a:t>
-                          </a:r>
-                        </a:p>
-                        <a:p>
-                          <a:r>
-                            <a:rPr lang="en-US" sz="1200" dirty="0"/>
-                            <a:t>Variables Associated with Inflammation</a:t>
-                          </a:r>
-                        </a:p>
-                        <a:p>
-                          <a:endParaRPr lang="en-US" sz="1200" dirty="0"/>
-                        </a:p>
-                      </a:txBody>
-                      <a:tcPr/>
-                    </a:tc>
-                    <a:extLst>
-                      <a:ext uri="{0D108BD9-81ED-4DB2-BD59-A6C34878D82A}">
-                        <a16:rowId xmlns:a16="http://schemas.microsoft.com/office/drawing/2014/main" val="126878836"/>
-                      </a:ext>
-                    </a:extLst>
-                  </a:tr>
-                </a:tbl>
-              </a:graphicData>
-            </a:graphic>
-          </p:graphicFrame>
-        </mc:Fallback>
-      </mc:AlternateContent>
-      <mc:AlternateContent xmlns:mc="http://schemas.openxmlformats.org/markup-compatibility/2006">
-        <mc:Choice xmlns:a14="http://schemas.microsoft.com/office/drawing/2010/main" Requires="a14">
-          <p:sp>
-            <p:nvSpPr>
-              <p:cNvPr id="7" name="TextBox 6">
-                <a:extLst>
-                  <a:ext uri="{FF2B5EF4-FFF2-40B4-BE49-F238E27FC236}">
-                    <a16:creationId xmlns:a16="http://schemas.microsoft.com/office/drawing/2014/main" id="{F127795A-1D93-3DD2-B2CE-8D20D079231F}"/>
-                  </a:ext>
-                </a:extLst>
-              </p:cNvPr>
-              <p:cNvSpPr txBox="1"/>
-              <p:nvPr/>
+              <p:cNvSpPr>
+                <a:spLocks noGrp="1"/>
+              </p:cNvSpPr>
+              <p:nvPr>
+                <p:ph idx="1"/>
+              </p:nvPr>
             </p:nvSpPr>
             <p:spPr>
               <a:xfrm>
-                <a:off x="3056281" y="1767389"/>
-                <a:ext cx="6079436" cy="369332"/>
+                <a:off x="1189181" y="1825625"/>
+                <a:ext cx="5711951" cy="4351338"/>
               </a:xfrm>
-              <a:prstGeom prst="rect">
-                <a:avLst/>
-              </a:prstGeom>
-              <a:noFill/>
             </p:spPr>
             <p:txBody>
-              <a:bodyPr wrap="square" rtlCol="0">
-                <a:spAutoFit/>
+              <a:bodyPr>
+                <a:normAutofit/>
               </a:bodyPr>
               <a:lstStyle/>
               <a:p>
-                <a:pPr/>
+                <a:r>
+                  <a:rPr lang="en-US" sz="2400" dirty="0"/>
+                  <a:t>Sample Size: </a:t>
+                </a:r>
                 <a14:m>
-                  <m:oMathPara xmlns:m="http://schemas.openxmlformats.org/officeDocument/2006/math">
-                    <m:oMathParaPr>
-                      <m:jc m:val="centerGroup"/>
-                    </m:oMathParaPr>
-                    <m:oMath xmlns:m="http://schemas.openxmlformats.org/officeDocument/2006/math">
-                      <m:r>
-                        <m:rPr>
-                          <m:sty m:val="p"/>
-                        </m:rPr>
-                        <a:rPr lang="en-US" b="0" i="0" smtClean="0">
-                          <a:latin typeface="Cambria Math" panose="02040503050406030204" pitchFamily="18" charset="0"/>
-                        </a:rPr>
-                        <m:t>Δ</m:t>
-                      </m:r>
-                      <m:r>
-                        <a:rPr lang="en-US" b="0" i="1" smtClean="0">
-                          <a:latin typeface="Cambria Math" panose="02040503050406030204" pitchFamily="18" charset="0"/>
-                        </a:rPr>
-                        <m:t>𝐶𝑉𝐿𝑇</m:t>
-                      </m:r>
-                      <m:r>
-                        <a:rPr lang="en-US" b="0" i="1" smtClean="0">
-                          <a:latin typeface="Cambria Math" panose="02040503050406030204" pitchFamily="18" charset="0"/>
-                        </a:rPr>
-                        <m:t>~</m:t>
-                      </m:r>
-                      <m:r>
-                        <a:rPr lang="en-US" b="0" i="1" smtClean="0">
-                          <a:latin typeface="Cambria Math" panose="02040503050406030204" pitchFamily="18" charset="0"/>
-                        </a:rPr>
-                        <m:t>𝑋</m:t>
-                      </m:r>
-                      <m:r>
-                        <a:rPr lang="en-US" b="0" i="1" smtClean="0">
-                          <a:latin typeface="Cambria Math" panose="02040503050406030204" pitchFamily="18" charset="0"/>
-                        </a:rPr>
-                        <m:t>+</m:t>
-                      </m:r>
-                      <m:r>
-                        <a:rPr lang="en-US" b="0" i="1" smtClean="0">
-                          <a:latin typeface="Cambria Math" panose="02040503050406030204" pitchFamily="18" charset="0"/>
-                        </a:rPr>
-                        <m:t>𝐶𝑉𝐿</m:t>
-                      </m:r>
-                      <m:sSub>
-                        <m:sSubPr>
-                          <m:ctrlPr>
-                            <a:rPr lang="en-US" b="0" i="1" smtClean="0">
-                              <a:latin typeface="Cambria Math" panose="02040503050406030204" pitchFamily="18" charset="0"/>
-                            </a:rPr>
-                          </m:ctrlPr>
-                        </m:sSubPr>
-                        <m:e>
-                          <m:r>
-                            <a:rPr lang="en-US" b="0" i="1" smtClean="0">
-                              <a:latin typeface="Cambria Math" panose="02040503050406030204" pitchFamily="18" charset="0"/>
-                            </a:rPr>
-                            <m:t>𝑇</m:t>
-                          </m:r>
-                        </m:e>
-                        <m:sub>
-                          <m:r>
-                            <a:rPr lang="en-US" b="0" i="1" smtClean="0">
-                              <a:latin typeface="Cambria Math" panose="02040503050406030204" pitchFamily="18" charset="0"/>
-                            </a:rPr>
-                            <m:t>𝑏𝑎𝑠𝑒𝑙𝑖𝑛𝑒</m:t>
-                          </m:r>
-                        </m:sub>
-                      </m:sSub>
-                      <m:r>
-                        <a:rPr lang="en-US" b="0" i="1" smtClean="0">
-                          <a:latin typeface="Cambria Math" panose="02040503050406030204" pitchFamily="18" charset="0"/>
-                        </a:rPr>
-                        <m:t>+</m:t>
-                      </m:r>
-                      <m:r>
-                        <a:rPr lang="en-US" b="0" i="1" smtClean="0">
-                          <a:latin typeface="Cambria Math" panose="02040503050406030204" pitchFamily="18" charset="0"/>
-                        </a:rPr>
-                        <m:t>𝐴𝑔𝑒</m:t>
-                      </m:r>
-                      <m:r>
-                        <a:rPr lang="en-US" b="0" i="1" smtClean="0">
-                          <a:latin typeface="Cambria Math" panose="02040503050406030204" pitchFamily="18" charset="0"/>
-                        </a:rPr>
-                        <m:t>+</m:t>
-                      </m:r>
-                      <m:r>
-                        <a:rPr lang="en-US" b="0" i="1" smtClean="0">
-                          <a:latin typeface="Cambria Math" panose="02040503050406030204" pitchFamily="18" charset="0"/>
-                        </a:rPr>
-                        <m:t>𝑆𝑒𝑥</m:t>
-                      </m:r>
-                      <m:r>
-                        <a:rPr lang="en-US" b="0" i="1" smtClean="0">
-                          <a:latin typeface="Cambria Math" panose="02040503050406030204" pitchFamily="18" charset="0"/>
-                        </a:rPr>
-                        <m:t>+</m:t>
-                      </m:r>
-                      <m:r>
-                        <a:rPr lang="en-US" b="0" i="1" smtClean="0">
-                          <a:latin typeface="Cambria Math" panose="02040503050406030204" pitchFamily="18" charset="0"/>
-                        </a:rPr>
-                        <m:t>𝐶𝑜𝑣𝑎𝑟𝑖𝑎𝑡𝑒𝑠</m:t>
-                      </m:r>
-                    </m:oMath>
-                  </m:oMathPara>
+                  <m:oMath xmlns:m="http://schemas.openxmlformats.org/officeDocument/2006/math">
+                    <m:r>
+                      <m:rPr>
+                        <m:sty m:val="p"/>
+                      </m:rPr>
+                      <a:rPr lang="en-US" sz="2400" b="0" i="1" smtClean="0">
+                        <a:latin typeface="Cambria Math" panose="02040503050406030204" pitchFamily="18" charset="0"/>
+                      </a:rPr>
+                      <m:t>n</m:t>
+                    </m:r>
+                    <m:r>
+                      <a:rPr lang="en-US" sz="2400" b="0" i="1" smtClean="0">
+                        <a:latin typeface="Cambria Math" panose="02040503050406030204" pitchFamily="18" charset="0"/>
+                      </a:rPr>
+                      <m:t>=175</m:t>
+                    </m:r>
+                  </m:oMath>
                 </a14:m>
-                <a:endParaRPr lang="en-US" dirty="0"/>
+                <a:endParaRPr lang="en-US" sz="2400" dirty="0"/>
+              </a:p>
+              <a:p>
+                <a:r>
+                  <a:rPr lang="en-US" sz="2400" dirty="0"/>
+                  <a:t>Type I Error Rate: </a:t>
+                </a:r>
+                <a14:m>
+                  <m:oMath xmlns:m="http://schemas.openxmlformats.org/officeDocument/2006/math">
+                    <m:r>
+                      <m:rPr>
+                        <m:sty m:val="p"/>
+                      </m:rPr>
+                      <a:rPr lang="en-US" sz="2400" b="0" i="1" smtClean="0">
+                        <a:latin typeface="Cambria Math" panose="02040503050406030204" pitchFamily="18" charset="0"/>
+                      </a:rPr>
+                      <m:t>α</m:t>
+                    </m:r>
+                    <m:r>
+                      <a:rPr lang="en-US" sz="2400" b="0" i="1" smtClean="0">
+                        <a:latin typeface="Cambria Math" panose="02040503050406030204" pitchFamily="18" charset="0"/>
+                      </a:rPr>
+                      <m:t>=0.025</m:t>
+                    </m:r>
+                  </m:oMath>
+                </a14:m>
+                <a:endParaRPr lang="en-US" sz="2400" dirty="0"/>
+              </a:p>
+              <a:p>
+                <a:r>
+                  <a:rPr lang="en-US" sz="2400" dirty="0"/>
+                  <a:t>Dichotomous Amyloid Deposition (positive/negative)</a:t>
+                </a:r>
+              </a:p>
+              <a:p>
+                <a:r>
+                  <a:rPr lang="en-US" sz="2400" dirty="0"/>
+                  <a:t>Assume weak correlation in amyloid-negative group (</a:t>
+                </a:r>
+                <a14:m>
+                  <m:oMath xmlns:m="http://schemas.openxmlformats.org/officeDocument/2006/math">
+                    <m:r>
+                      <a:rPr lang="en-US" sz="2400" b="0" i="1" smtClean="0">
+                        <a:latin typeface="Cambria Math" panose="02040503050406030204" pitchFamily="18" charset="0"/>
+                      </a:rPr>
+                      <m:t>𝜌</m:t>
+                    </m:r>
+                    <m:r>
+                      <a:rPr lang="en-US" sz="2400" b="0" i="1" smtClean="0">
+                        <a:latin typeface="Cambria Math" panose="02040503050406030204" pitchFamily="18" charset="0"/>
+                      </a:rPr>
+                      <m:t>=0.1</m:t>
+                    </m:r>
+                  </m:oMath>
+                </a14:m>
+                <a:r>
+                  <a:rPr lang="en-US" sz="2400" dirty="0"/>
+                  <a:t>)</a:t>
+                </a:r>
+              </a:p>
+              <a:p>
+                <a:r>
+                  <a:rPr lang="en-US" sz="2400" dirty="0"/>
+                  <a:t>Effect Estimates</a:t>
+                </a:r>
+              </a:p>
+              <a:p>
+                <a:pPr lvl="1"/>
+                <a14:m>
+                  <m:oMath xmlns:m="http://schemas.openxmlformats.org/officeDocument/2006/math">
+                    <m:r>
+                      <a:rPr lang="en-US" sz="2000" b="0" i="1" smtClean="0">
+                        <a:latin typeface="Cambria Math" panose="02040503050406030204" pitchFamily="18" charset="0"/>
+                      </a:rPr>
+                      <m:t>≥80%</m:t>
+                    </m:r>
+                  </m:oMath>
+                </a14:m>
+                <a:r>
+                  <a:rPr lang="en-US" sz="2000" dirty="0"/>
+                  <a:t> power for large effects (</a:t>
+                </a:r>
+                <a14:m>
+                  <m:oMath xmlns:m="http://schemas.openxmlformats.org/officeDocument/2006/math">
+                    <m:r>
+                      <m:rPr>
+                        <m:sty m:val="p"/>
+                      </m:rPr>
+                      <a:rPr lang="en-US" sz="2000" b="0" i="1" smtClean="0">
+                        <a:latin typeface="Cambria Math" panose="02040503050406030204" pitchFamily="18" charset="0"/>
+                      </a:rPr>
+                      <m:t>Δρ</m:t>
+                    </m:r>
+                    <m:r>
+                      <a:rPr lang="en-US" sz="2000" b="0" i="1" smtClean="0">
+                        <a:latin typeface="Cambria Math" panose="02040503050406030204" pitchFamily="18" charset="0"/>
+                      </a:rPr>
+                      <m:t>≥0.5</m:t>
+                    </m:r>
+                  </m:oMath>
+                </a14:m>
+                <a:r>
+                  <a:rPr lang="en-US" sz="2000" dirty="0"/>
+                  <a:t>) and balanced groups (30-70%)</a:t>
+                </a:r>
+              </a:p>
+              <a:p>
+                <a:r>
+                  <a:rPr lang="en-US" sz="2400" dirty="0"/>
+                  <a:t>Software</a:t>
+                </a:r>
+              </a:p>
+              <a:p>
+                <a:pPr lvl="1"/>
+                <a:r>
+                  <a:rPr lang="en-US" sz="2000" dirty="0"/>
+                  <a:t>corr.2samp (</a:t>
+                </a:r>
+                <a:r>
+                  <a:rPr lang="en-US" sz="2000" dirty="0" err="1"/>
+                  <a:t>powertools</a:t>
+                </a:r>
+                <a:r>
+                  <a:rPr lang="en-US" sz="2000" dirty="0"/>
+                  <a:t>)</a:t>
+                </a:r>
+              </a:p>
+              <a:p>
+                <a:endParaRPr lang="en-US" sz="1800" dirty="0"/>
               </a:p>
             </p:txBody>
           </p:sp>
         </mc:Choice>
-        <mc:Fallback>
+        <mc:Fallback xmlns="">
           <p:sp>
             <p:nvSpPr>
-              <p:cNvPr id="7" name="TextBox 6">
+              <p:cNvPr id="3" name="Content Placeholder 2">
                 <a:extLst>
                   <a:ext uri="{FF2B5EF4-FFF2-40B4-BE49-F238E27FC236}">
-                    <a16:creationId xmlns:a16="http://schemas.microsoft.com/office/drawing/2014/main" id="{F127795A-1D93-3DD2-B2CE-8D20D079231F}"/>
+                    <a16:creationId xmlns:a16="http://schemas.microsoft.com/office/drawing/2014/main" id="{F1FBDDB5-737A-F6D8-7EBA-503A951DEA3C}"/>
                   </a:ext>
                 </a:extLst>
               </p:cNvPr>
-              <p:cNvSpPr txBox="1">
-                <a:spLocks noRot="1" noChangeAspect="1" noMove="1" noResize="1" noEditPoints="1" noAdjustHandles="1" noChangeArrowheads="1" noChangeShapeType="1" noTextEdit="1"/>
+              <p:cNvSpPr>
+                <a:spLocks noGrp="1" noRot="1" noChangeAspect="1" noMove="1" noResize="1" noEditPoints="1" noAdjustHandles="1" noChangeArrowheads="1" noChangeShapeType="1" noTextEdit="1"/>
               </p:cNvSpPr>
-              <p:nvPr/>
+              <p:nvPr>
+                <p:ph idx="1"/>
+              </p:nvPr>
             </p:nvSpPr>
             <p:spPr>
               <a:xfrm>
-                <a:off x="3056281" y="1767389"/>
-                <a:ext cx="6079436" cy="369332"/>
+                <a:off x="1189181" y="1825625"/>
+                <a:ext cx="5711951" cy="4351338"/>
               </a:xfrm>
-              <a:prstGeom prst="rect">
-                <a:avLst/>
-              </a:prstGeom>
               <a:blipFill>
-                <a:blip r:embed="rId4"/>
+                <a:blip r:embed="rId2"/>
                 <a:stretch>
-                  <a:fillRect b="-11475"/>
+                  <a:fillRect l="-1387" t="-1821" b="-1681"/>
                 </a:stretch>
               </a:blipFill>
             </p:spPr>
@@ -7978,1950 +6635,40 @@
           </p:sp>
         </mc:Fallback>
       </mc:AlternateContent>
-    </p:spTree>
-    <p:extLst>
-      <p:ext uri="{BB962C8B-B14F-4D97-AF65-F5344CB8AC3E}">
-        <p14:creationId xmlns:p14="http://schemas.microsoft.com/office/powerpoint/2010/main" val="3053330656"/>
-      </p:ext>
-    </p:extLst>
-  </p:cSld>
-  <p:clrMapOvr>
-    <a:masterClrMapping/>
-  </p:clrMapOvr>
-</p:sld>
-</file>
-
-<file path=ppt/slides/slide8.xml><?xml version="1.0" encoding="utf-8"?>
-<p:sld xmlns:a="http://schemas.openxmlformats.org/drawingml/2006/main" xmlns:r="http://schemas.openxmlformats.org/officeDocument/2006/relationships" xmlns:p="http://schemas.openxmlformats.org/presentationml/2006/main">
-  <p:cSld>
-    <p:bg>
-      <p:bgPr>
-        <a:solidFill>
-          <a:srgbClr val="EFEDE3"/>
-        </a:solidFill>
-        <a:effectLst/>
-      </p:bgPr>
-    </p:bg>
-    <p:spTree>
-      <p:nvGrpSpPr>
-        <p:cNvPr id="1" name="">
-          <a:extLst>
-            <a:ext uri="{FF2B5EF4-FFF2-40B4-BE49-F238E27FC236}">
-              <a16:creationId xmlns:a16="http://schemas.microsoft.com/office/drawing/2014/main" id="{155C8C01-30F5-1370-2FEF-D3940261A028}"/>
-            </a:ext>
-          </a:extLst>
-        </p:cNvPr>
-        <p:cNvGrpSpPr/>
-        <p:nvPr/>
-      </p:nvGrpSpPr>
-      <p:grpSpPr>
-        <a:xfrm>
-          <a:off x="0" y="0"/>
-          <a:ext cx="0" cy="0"/>
-          <a:chOff x="0" y="0"/>
-          <a:chExt cx="0" cy="0"/>
-        </a:xfrm>
-      </p:grpSpPr>
-      <p:sp>
-        <p:nvSpPr>
-          <p:cNvPr id="4" name="Rectangle 3">
-            <a:extLst>
-              <a:ext uri="{FF2B5EF4-FFF2-40B4-BE49-F238E27FC236}">
-                <a16:creationId xmlns:a16="http://schemas.microsoft.com/office/drawing/2014/main" id="{D6A50DBA-999B-882B-58C9-D67BA3E74185}"/>
-              </a:ext>
-            </a:extLst>
-          </p:cNvPr>
-          <p:cNvSpPr/>
+      <p:pic>
+        <p:nvPicPr>
+          <p:cNvPr id="10" name="Picture 9">
+            <a:extLst>
+              <a:ext uri="{FF2B5EF4-FFF2-40B4-BE49-F238E27FC236}">
+                <a16:creationId xmlns:a16="http://schemas.microsoft.com/office/drawing/2014/main" id="{2B55E850-0884-AA74-BC0A-E8ED0CC215C9}"/>
+              </a:ext>
+            </a:extLst>
+          </p:cNvPr>
+          <p:cNvPicPr>
+            <a:picLocks noChangeAspect="1"/>
+          </p:cNvPicPr>
           <p:nvPr/>
-        </p:nvSpPr>
+        </p:nvPicPr>
+        <p:blipFill>
+          <a:blip r:embed="rId3"/>
+          <a:stretch>
+            <a:fillRect/>
+          </a:stretch>
+        </p:blipFill>
         <p:spPr>
           <a:xfrm>
-            <a:off x="443344" y="0"/>
-            <a:ext cx="212436" cy="6857999"/>
+            <a:off x="6901132" y="1825625"/>
+            <a:ext cx="5068429" cy="3811600"/>
           </a:xfrm>
           <a:prstGeom prst="rect">
             <a:avLst/>
           </a:prstGeom>
-          <a:solidFill>
-            <a:schemeClr val="tx1"/>
-          </a:solidFill>
         </p:spPr>
-        <p:style>
-          <a:lnRef idx="2">
-            <a:schemeClr val="accent1">
-              <a:shade val="15000"/>
-            </a:schemeClr>
-          </a:lnRef>
-          <a:fillRef idx="1">
-            <a:schemeClr val="accent1"/>
-          </a:fillRef>
-          <a:effectRef idx="0">
-            <a:schemeClr val="accent1"/>
-          </a:effectRef>
-          <a:fontRef idx="minor">
-            <a:schemeClr val="lt1"/>
-          </a:fontRef>
-        </p:style>
-        <p:txBody>
-          <a:bodyPr rtlCol="0" anchor="ctr"/>
-          <a:lstStyle/>
-          <a:p>
-            <a:pPr algn="ctr"/>
-            <a:endParaRPr lang="en-US"/>
-          </a:p>
-        </p:txBody>
-      </p:sp>
-      <p:sp>
-        <p:nvSpPr>
-          <p:cNvPr id="2" name="Title 1">
-            <a:extLst>
-              <a:ext uri="{FF2B5EF4-FFF2-40B4-BE49-F238E27FC236}">
-                <a16:creationId xmlns:a16="http://schemas.microsoft.com/office/drawing/2014/main" id="{25FCD198-1D7B-0893-092C-BBBDD693402A}"/>
-              </a:ext>
-            </a:extLst>
-          </p:cNvPr>
-          <p:cNvSpPr>
-            <a:spLocks noGrp="1"/>
-          </p:cNvSpPr>
-          <p:nvPr>
-            <p:ph type="title"/>
-          </p:nvPr>
-        </p:nvSpPr>
-        <p:spPr>
-          <a:xfrm>
-            <a:off x="1189181" y="365125"/>
-            <a:ext cx="10515600" cy="1325563"/>
-          </a:xfrm>
-        </p:spPr>
-        <p:txBody>
-          <a:bodyPr/>
-          <a:lstStyle/>
-          <a:p>
-            <a:r>
-              <a:rPr lang="en-US" dirty="0"/>
-              <a:t>Aim 2 Analysis Method</a:t>
-            </a:r>
-          </a:p>
-        </p:txBody>
-      </p:sp>
-      <mc:AlternateContent xmlns:mc="http://schemas.openxmlformats.org/markup-compatibility/2006">
-        <mc:Choice xmlns:a14="http://schemas.microsoft.com/office/drawing/2010/main" Requires="a14">
-          <p:graphicFrame>
-            <p:nvGraphicFramePr>
-              <p:cNvPr id="3" name="Table 2">
-                <a:extLst>
-                  <a:ext uri="{FF2B5EF4-FFF2-40B4-BE49-F238E27FC236}">
-                    <a16:creationId xmlns:a16="http://schemas.microsoft.com/office/drawing/2014/main" id="{15318ABA-24F7-FD51-2CD1-C58BE6B37BB8}"/>
-                  </a:ext>
-                </a:extLst>
-              </p:cNvPr>
-              <p:cNvGraphicFramePr>
-                <a:graphicFrameLocks noGrp="1"/>
-              </p:cNvGraphicFramePr>
-              <p:nvPr/>
-            </p:nvGraphicFramePr>
-            <p:xfrm>
-              <a:off x="1386331" y="2910258"/>
-              <a:ext cx="9419337" cy="3503104"/>
-            </p:xfrm>
-            <a:graphic>
-              <a:graphicData uri="http://schemas.openxmlformats.org/drawingml/2006/table">
-                <a:tbl>
-                  <a:tblPr firstRow="1" bandRow="1">
-                    <a:tableStyleId>{073A0DAA-6AF3-43AB-8588-CEC1D06C72B9}</a:tableStyleId>
-                  </a:tblPr>
-                  <a:tblGrid>
-                    <a:gridCol w="1140143">
-                      <a:extLst>
-                        <a:ext uri="{9D8B030D-6E8A-4147-A177-3AD203B41FA5}">
-                          <a16:colId xmlns:a16="http://schemas.microsoft.com/office/drawing/2014/main" val="3885695937"/>
-                        </a:ext>
-                      </a:extLst>
-                    </a:gridCol>
-                    <a:gridCol w="2824925">
-                      <a:extLst>
-                        <a:ext uri="{9D8B030D-6E8A-4147-A177-3AD203B41FA5}">
-                          <a16:colId xmlns:a16="http://schemas.microsoft.com/office/drawing/2014/main" val="1502429306"/>
-                        </a:ext>
-                      </a:extLst>
-                    </a:gridCol>
-                    <a:gridCol w="2632583">
-                      <a:extLst>
-                        <a:ext uri="{9D8B030D-6E8A-4147-A177-3AD203B41FA5}">
-                          <a16:colId xmlns:a16="http://schemas.microsoft.com/office/drawing/2014/main" val="3907131552"/>
-                        </a:ext>
-                      </a:extLst>
-                    </a:gridCol>
-                    <a:gridCol w="2821686">
-                      <a:extLst>
-                        <a:ext uri="{9D8B030D-6E8A-4147-A177-3AD203B41FA5}">
-                          <a16:colId xmlns:a16="http://schemas.microsoft.com/office/drawing/2014/main" val="780577694"/>
-                        </a:ext>
-                      </a:extLst>
-                    </a:gridCol>
-                  </a:tblGrid>
-                  <a:tr h="337816">
-                    <a:tc>
-                      <a:txBody>
-                        <a:bodyPr/>
-                        <a:lstStyle/>
-                        <a:p>
-                          <a:r>
-                            <a:rPr lang="en-US" sz="1400"/>
-                            <a:t>Hypothesis</a:t>
-                          </a:r>
-                          <a:endParaRPr lang="en-US" sz="1400" dirty="0"/>
-                        </a:p>
-                      </a:txBody>
-                      <a:tcPr/>
-                    </a:tc>
-                    <a:tc>
-                      <a:txBody>
-                        <a:bodyPr/>
-                        <a:lstStyle/>
-                        <a:p>
-                          <a:r>
-                            <a:rPr lang="en-US" sz="1400" dirty="0"/>
-                            <a:t>Primary Outcomes (</a:t>
-                          </a:r>
-                          <a14:m>
-                            <m:oMath xmlns:m="http://schemas.openxmlformats.org/officeDocument/2006/math">
-                              <m:r>
-                                <a:rPr lang="en-US" sz="1400" b="1" i="1" smtClean="0">
-                                  <a:latin typeface="Cambria Math" panose="02040503050406030204" pitchFamily="18" charset="0"/>
-                                </a:rPr>
-                                <m:t>𝒀</m:t>
-                              </m:r>
-                            </m:oMath>
-                          </a14:m>
-                          <a:r>
-                            <a:rPr lang="en-US" sz="1400" dirty="0"/>
-                            <a:t>)</a:t>
-                          </a:r>
-                        </a:p>
-                      </a:txBody>
-                      <a:tcPr/>
-                    </a:tc>
-                    <a:tc>
-                      <a:txBody>
-                        <a:bodyPr/>
-                        <a:lstStyle/>
-                        <a:p>
-                          <a:r>
-                            <a:rPr lang="en-US" sz="1400" dirty="0"/>
-                            <a:t>Primary Predictors (</a:t>
-                          </a:r>
-                          <a14:m>
-                            <m:oMath xmlns:m="http://schemas.openxmlformats.org/officeDocument/2006/math">
-                              <m:r>
-                                <a:rPr lang="en-US" sz="1400" b="1" i="1" smtClean="0">
-                                  <a:latin typeface="Cambria Math" panose="02040503050406030204" pitchFamily="18" charset="0"/>
-                                </a:rPr>
-                                <m:t>𝑿</m:t>
-                              </m:r>
-                            </m:oMath>
-                          </a14:m>
-                          <a:r>
-                            <a:rPr lang="en-US" sz="1400" dirty="0"/>
-                            <a:t>)</a:t>
-                          </a:r>
-                        </a:p>
-                      </a:txBody>
-                      <a:tcPr/>
-                    </a:tc>
-                    <a:tc>
-                      <a:txBody>
-                        <a:bodyPr/>
-                        <a:lstStyle/>
-                        <a:p>
-                          <a:r>
-                            <a:rPr lang="en-US" sz="1400" dirty="0"/>
-                            <a:t>Covariates</a:t>
-                          </a:r>
-                        </a:p>
-                      </a:txBody>
-                      <a:tcPr/>
-                    </a:tc>
-                    <a:extLst>
-                      <a:ext uri="{0D108BD9-81ED-4DB2-BD59-A6C34878D82A}">
-                        <a16:rowId xmlns:a16="http://schemas.microsoft.com/office/drawing/2014/main" val="3804010600"/>
-                      </a:ext>
-                    </a:extLst>
-                  </a:tr>
-                  <a:tr h="1582644">
-                    <a:tc>
-                      <a:txBody>
-                        <a:bodyPr/>
-                        <a:lstStyle/>
-                        <a:p>
-                          <a:r>
-                            <a:rPr lang="en-US" sz="1200" dirty="0"/>
-                            <a:t>1a</a:t>
-                          </a:r>
-                        </a:p>
-                      </a:txBody>
-                      <a:tcPr/>
-                    </a:tc>
-                    <a:tc>
-                      <a:txBody>
-                        <a:bodyPr/>
-                        <a:lstStyle/>
-                        <a:p>
-                          <a:r>
-                            <a:rPr lang="en-US" sz="1200"/>
-                            <a:t>Change in Cortical Thickness</a:t>
-                          </a:r>
-                        </a:p>
-                        <a:p>
-                          <a:r>
-                            <a:rPr lang="en-US" sz="1200"/>
-                            <a:t>Change in Cognitive Measures</a:t>
-                          </a:r>
-                        </a:p>
-                        <a:p>
-                          <a:r>
-                            <a:rPr lang="en-US" sz="1200"/>
-                            <a:t>(CVLT, Benson Figure, MST, Story Recall)</a:t>
-                          </a:r>
-                          <a:endParaRPr lang="en-US" sz="1200" dirty="0"/>
-                        </a:p>
-                      </a:txBody>
-                      <a:tcPr/>
-                    </a:tc>
-                    <a:tc>
-                      <a:txBody>
-                        <a:bodyPr/>
-                        <a:lstStyle/>
-                        <a:p>
-                          <a:r>
-                            <a:rPr lang="en-US" sz="1200"/>
-                            <a:t>Baseline Measures of Inflammation</a:t>
-                          </a:r>
-                        </a:p>
-                        <a:p>
-                          <a:r>
-                            <a:rPr lang="en-US" sz="1200"/>
-                            <a:t>(IL-6, TNF-alpha, MCP-1, eotaxin-1)</a:t>
-                          </a:r>
-                          <a:endParaRPr lang="en-US" sz="1200" dirty="0"/>
-                        </a:p>
-                      </a:txBody>
-                      <a:tcPr/>
-                    </a:tc>
-                    <a:tc>
-                      <a:txBody>
-                        <a:bodyPr/>
-                        <a:lstStyle/>
-                        <a:p>
-                          <a:r>
-                            <a:rPr lang="en-US" sz="1200"/>
-                            <a:t>Baseline Outcome,</a:t>
-                          </a:r>
-                        </a:p>
-                        <a:p>
-                          <a:r>
-                            <a:rPr lang="en-US" sz="1200"/>
-                            <a:t>Age, Sex,</a:t>
-                          </a:r>
-                        </a:p>
-                        <a:p>
-                          <a:r>
-                            <a:rPr lang="en-US" sz="1200"/>
-                            <a:t>Variables Associated with Inflammation</a:t>
-                          </a:r>
-                          <a:endParaRPr lang="en-US" sz="1200" dirty="0"/>
-                        </a:p>
-                      </a:txBody>
-                      <a:tcPr/>
-                    </a:tc>
-                    <a:extLst>
-                      <a:ext uri="{0D108BD9-81ED-4DB2-BD59-A6C34878D82A}">
-                        <a16:rowId xmlns:a16="http://schemas.microsoft.com/office/drawing/2014/main" val="2112868750"/>
-                      </a:ext>
-                    </a:extLst>
-                  </a:tr>
-                  <a:tr h="1582644">
-                    <a:tc>
-                      <a:txBody>
-                        <a:bodyPr/>
-                        <a:lstStyle/>
-                        <a:p>
-                          <a:r>
-                            <a:rPr lang="en-US" sz="1200"/>
-                            <a:t>1b</a:t>
-                          </a:r>
-                          <a:endParaRPr lang="en-US" sz="1200" dirty="0"/>
-                        </a:p>
-                      </a:txBody>
-                      <a:tcPr/>
-                    </a:tc>
-                    <a:tc>
-                      <a:txBody>
-                        <a:bodyPr/>
-                        <a:lstStyle/>
-                        <a:p>
-                          <a:r>
-                            <a:rPr lang="en-US" sz="1200" dirty="0"/>
-                            <a:t>Chang in Cortical Thickness</a:t>
-                          </a:r>
-                        </a:p>
-                        <a:p>
-                          <a:r>
-                            <a:rPr lang="en-US" sz="1200" dirty="0"/>
-                            <a:t>Change in Cognitive Measures</a:t>
-                          </a:r>
-                        </a:p>
-                        <a:p>
-                          <a:r>
-                            <a:rPr lang="en-US" sz="1200" dirty="0"/>
-                            <a:t>(CVLT, Benson Figure, MST, Story Recall)</a:t>
-                          </a:r>
-                        </a:p>
-                      </a:txBody>
-                      <a:tcPr/>
-                    </a:tc>
-                    <a:tc>
-                      <a:txBody>
-                        <a:bodyPr/>
-                        <a:lstStyle/>
-                        <a:p>
-                          <a:r>
-                            <a:rPr lang="en-US" sz="1200"/>
-                            <a:t>Change in Measures of Inflammation</a:t>
-                          </a:r>
-                        </a:p>
-                        <a:p>
-                          <a:r>
-                            <a:rPr lang="en-US" sz="1200"/>
-                            <a:t>(IL-6, TNF-alpha, MCP-1, eotaxin-1)</a:t>
-                          </a:r>
-                        </a:p>
-                        <a:p>
-                          <a:endParaRPr lang="en-US" sz="1200" dirty="0"/>
-                        </a:p>
-                      </a:txBody>
-                      <a:tcPr/>
-                    </a:tc>
-                    <a:tc>
-                      <a:txBody>
-                        <a:bodyPr/>
-                        <a:lstStyle/>
-                        <a:p>
-                          <a:r>
-                            <a:rPr lang="en-US" sz="1200" dirty="0"/>
-                            <a:t>Baseline Outcome,</a:t>
-                          </a:r>
-                        </a:p>
-                        <a:p>
-                          <a:r>
-                            <a:rPr lang="en-US" sz="1200" dirty="0"/>
-                            <a:t>Age, Sex,</a:t>
-                          </a:r>
-                        </a:p>
-                        <a:p>
-                          <a:r>
-                            <a:rPr lang="en-US" sz="1200" dirty="0"/>
-                            <a:t>Variables Associated with Inflammation</a:t>
-                          </a:r>
-                        </a:p>
-                        <a:p>
-                          <a:endParaRPr lang="en-US" sz="1200" dirty="0"/>
-                        </a:p>
-                      </a:txBody>
-                      <a:tcPr/>
-                    </a:tc>
-                    <a:extLst>
-                      <a:ext uri="{0D108BD9-81ED-4DB2-BD59-A6C34878D82A}">
-                        <a16:rowId xmlns:a16="http://schemas.microsoft.com/office/drawing/2014/main" val="126878836"/>
-                      </a:ext>
-                    </a:extLst>
-                  </a:tr>
-                </a:tbl>
-              </a:graphicData>
-            </a:graphic>
-          </p:graphicFrame>
-        </mc:Choice>
-        <mc:Fallback>
-          <p:graphicFrame>
-            <p:nvGraphicFramePr>
-              <p:cNvPr id="3" name="Table 2">
-                <a:extLst>
-                  <a:ext uri="{FF2B5EF4-FFF2-40B4-BE49-F238E27FC236}">
-                    <a16:creationId xmlns:a16="http://schemas.microsoft.com/office/drawing/2014/main" id="{15318ABA-24F7-FD51-2CD1-C58BE6B37BB8}"/>
-                  </a:ext>
-                </a:extLst>
-              </p:cNvPr>
-              <p:cNvGraphicFramePr>
-                <a:graphicFrameLocks noGrp="1"/>
-              </p:cNvGraphicFramePr>
-              <p:nvPr/>
-            </p:nvGraphicFramePr>
-            <p:xfrm>
-              <a:off x="1386331" y="2910258"/>
-              <a:ext cx="9419337" cy="3503104"/>
-            </p:xfrm>
-            <a:graphic>
-              <a:graphicData uri="http://schemas.openxmlformats.org/drawingml/2006/table">
-                <a:tbl>
-                  <a:tblPr firstRow="1" bandRow="1">
-                    <a:tableStyleId>{073A0DAA-6AF3-43AB-8588-CEC1D06C72B9}</a:tableStyleId>
-                  </a:tblPr>
-                  <a:tblGrid>
-                    <a:gridCol w="1140143">
-                      <a:extLst>
-                        <a:ext uri="{9D8B030D-6E8A-4147-A177-3AD203B41FA5}">
-                          <a16:colId xmlns:a16="http://schemas.microsoft.com/office/drawing/2014/main" val="3885695937"/>
-                        </a:ext>
-                      </a:extLst>
-                    </a:gridCol>
-                    <a:gridCol w="2824925">
-                      <a:extLst>
-                        <a:ext uri="{9D8B030D-6E8A-4147-A177-3AD203B41FA5}">
-                          <a16:colId xmlns:a16="http://schemas.microsoft.com/office/drawing/2014/main" val="1502429306"/>
-                        </a:ext>
-                      </a:extLst>
-                    </a:gridCol>
-                    <a:gridCol w="2632583">
-                      <a:extLst>
-                        <a:ext uri="{9D8B030D-6E8A-4147-A177-3AD203B41FA5}">
-                          <a16:colId xmlns:a16="http://schemas.microsoft.com/office/drawing/2014/main" val="3907131552"/>
-                        </a:ext>
-                      </a:extLst>
-                    </a:gridCol>
-                    <a:gridCol w="2821686">
-                      <a:extLst>
-                        <a:ext uri="{9D8B030D-6E8A-4147-A177-3AD203B41FA5}">
-                          <a16:colId xmlns:a16="http://schemas.microsoft.com/office/drawing/2014/main" val="780577694"/>
-                        </a:ext>
-                      </a:extLst>
-                    </a:gridCol>
-                  </a:tblGrid>
-                  <a:tr h="337816">
-                    <a:tc>
-                      <a:txBody>
-                        <a:bodyPr/>
-                        <a:lstStyle/>
-                        <a:p>
-                          <a:r>
-                            <a:rPr lang="en-US" sz="1400"/>
-                            <a:t>Hypothesis</a:t>
-                          </a:r>
-                          <a:endParaRPr lang="en-US" sz="1400" dirty="0"/>
-                        </a:p>
-                      </a:txBody>
-                      <a:tcPr/>
-                    </a:tc>
-                    <a:tc>
-                      <a:txBody>
-                        <a:bodyPr/>
-                        <a:lstStyle/>
-                        <a:p>
-                          <a:endParaRPr lang="en-US"/>
-                        </a:p>
-                      </a:txBody>
-                      <a:tcPr>
-                        <a:blipFill>
-                          <a:blip r:embed="rId3"/>
-                          <a:stretch>
-                            <a:fillRect l="-40517" t="-1786" r="-193750" b="-932143"/>
-                          </a:stretch>
-                        </a:blipFill>
-                      </a:tcPr>
-                    </a:tc>
-                    <a:tc>
-                      <a:txBody>
-                        <a:bodyPr/>
-                        <a:lstStyle/>
-                        <a:p>
-                          <a:endParaRPr lang="en-US"/>
-                        </a:p>
-                      </a:txBody>
-                      <a:tcPr>
-                        <a:blipFill>
-                          <a:blip r:embed="rId3"/>
-                          <a:stretch>
-                            <a:fillRect l="-150926" t="-1786" r="-108102" b="-932143"/>
-                          </a:stretch>
-                        </a:blipFill>
-                      </a:tcPr>
-                    </a:tc>
-                    <a:tc>
-                      <a:txBody>
-                        <a:bodyPr/>
-                        <a:lstStyle/>
-                        <a:p>
-                          <a:r>
-                            <a:rPr lang="en-US" sz="1400" dirty="0"/>
-                            <a:t>Covariates</a:t>
-                          </a:r>
-                        </a:p>
-                      </a:txBody>
-                      <a:tcPr/>
-                    </a:tc>
-                    <a:extLst>
-                      <a:ext uri="{0D108BD9-81ED-4DB2-BD59-A6C34878D82A}">
-                        <a16:rowId xmlns:a16="http://schemas.microsoft.com/office/drawing/2014/main" val="3804010600"/>
-                      </a:ext>
-                    </a:extLst>
-                  </a:tr>
-                  <a:tr h="1582644">
-                    <a:tc>
-                      <a:txBody>
-                        <a:bodyPr/>
-                        <a:lstStyle/>
-                        <a:p>
-                          <a:r>
-                            <a:rPr lang="en-US" sz="1200" dirty="0"/>
-                            <a:t>1a</a:t>
-                          </a:r>
-                        </a:p>
-                      </a:txBody>
-                      <a:tcPr/>
-                    </a:tc>
-                    <a:tc>
-                      <a:txBody>
-                        <a:bodyPr/>
-                        <a:lstStyle/>
-                        <a:p>
-                          <a:r>
-                            <a:rPr lang="en-US" sz="1200"/>
-                            <a:t>Change in Cortical Thickness</a:t>
-                          </a:r>
-                        </a:p>
-                        <a:p>
-                          <a:r>
-                            <a:rPr lang="en-US" sz="1200"/>
-                            <a:t>Change in Cognitive Measures</a:t>
-                          </a:r>
-                        </a:p>
-                        <a:p>
-                          <a:r>
-                            <a:rPr lang="en-US" sz="1200"/>
-                            <a:t>(CVLT, Benson Figure, MST, Story Recall)</a:t>
-                          </a:r>
-                          <a:endParaRPr lang="en-US" sz="1200" dirty="0"/>
-                        </a:p>
-                      </a:txBody>
-                      <a:tcPr/>
-                    </a:tc>
-                    <a:tc>
-                      <a:txBody>
-                        <a:bodyPr/>
-                        <a:lstStyle/>
-                        <a:p>
-                          <a:r>
-                            <a:rPr lang="en-US" sz="1200"/>
-                            <a:t>Baseline Measures of Inflammation</a:t>
-                          </a:r>
-                        </a:p>
-                        <a:p>
-                          <a:r>
-                            <a:rPr lang="en-US" sz="1200"/>
-                            <a:t>(IL-6, TNF-alpha, MCP-1, eotaxin-1)</a:t>
-                          </a:r>
-                          <a:endParaRPr lang="en-US" sz="1200" dirty="0"/>
-                        </a:p>
-                      </a:txBody>
-                      <a:tcPr/>
-                    </a:tc>
-                    <a:tc>
-                      <a:txBody>
-                        <a:bodyPr/>
-                        <a:lstStyle/>
-                        <a:p>
-                          <a:r>
-                            <a:rPr lang="en-US" sz="1200"/>
-                            <a:t>Baseline Outcome,</a:t>
-                          </a:r>
-                        </a:p>
-                        <a:p>
-                          <a:r>
-                            <a:rPr lang="en-US" sz="1200"/>
-                            <a:t>Age, Sex,</a:t>
-                          </a:r>
-                        </a:p>
-                        <a:p>
-                          <a:r>
-                            <a:rPr lang="en-US" sz="1200"/>
-                            <a:t>Variables Associated with Inflammation</a:t>
-                          </a:r>
-                          <a:endParaRPr lang="en-US" sz="1200" dirty="0"/>
-                        </a:p>
-                      </a:txBody>
-                      <a:tcPr/>
-                    </a:tc>
-                    <a:extLst>
-                      <a:ext uri="{0D108BD9-81ED-4DB2-BD59-A6C34878D82A}">
-                        <a16:rowId xmlns:a16="http://schemas.microsoft.com/office/drawing/2014/main" val="2112868750"/>
-                      </a:ext>
-                    </a:extLst>
-                  </a:tr>
-                  <a:tr h="1582644">
-                    <a:tc>
-                      <a:txBody>
-                        <a:bodyPr/>
-                        <a:lstStyle/>
-                        <a:p>
-                          <a:r>
-                            <a:rPr lang="en-US" sz="1200"/>
-                            <a:t>1b</a:t>
-                          </a:r>
-                          <a:endParaRPr lang="en-US" sz="1200" dirty="0"/>
-                        </a:p>
-                      </a:txBody>
-                      <a:tcPr/>
-                    </a:tc>
-                    <a:tc>
-                      <a:txBody>
-                        <a:bodyPr/>
-                        <a:lstStyle/>
-                        <a:p>
-                          <a:r>
-                            <a:rPr lang="en-US" sz="1200" dirty="0"/>
-                            <a:t>Chang in Cortical Thickness</a:t>
-                          </a:r>
-                        </a:p>
-                        <a:p>
-                          <a:r>
-                            <a:rPr lang="en-US" sz="1200" dirty="0"/>
-                            <a:t>Change in Cognitive Measures</a:t>
-                          </a:r>
-                        </a:p>
-                        <a:p>
-                          <a:r>
-                            <a:rPr lang="en-US" sz="1200" dirty="0"/>
-                            <a:t>(CVLT, Benson Figure, MST, Story Recall)</a:t>
-                          </a:r>
-                        </a:p>
-                      </a:txBody>
-                      <a:tcPr/>
-                    </a:tc>
-                    <a:tc>
-                      <a:txBody>
-                        <a:bodyPr/>
-                        <a:lstStyle/>
-                        <a:p>
-                          <a:r>
-                            <a:rPr lang="en-US" sz="1200"/>
-                            <a:t>Change in Measures of Inflammation</a:t>
-                          </a:r>
-                        </a:p>
-                        <a:p>
-                          <a:r>
-                            <a:rPr lang="en-US" sz="1200"/>
-                            <a:t>(IL-6, TNF-alpha, MCP-1, eotaxin-1)</a:t>
-                          </a:r>
-                        </a:p>
-                        <a:p>
-                          <a:endParaRPr lang="en-US" sz="1200" dirty="0"/>
-                        </a:p>
-                      </a:txBody>
-                      <a:tcPr/>
-                    </a:tc>
-                    <a:tc>
-                      <a:txBody>
-                        <a:bodyPr/>
-                        <a:lstStyle/>
-                        <a:p>
-                          <a:r>
-                            <a:rPr lang="en-US" sz="1200" dirty="0"/>
-                            <a:t>Baseline Outcome,</a:t>
-                          </a:r>
-                        </a:p>
-                        <a:p>
-                          <a:r>
-                            <a:rPr lang="en-US" sz="1200" dirty="0"/>
-                            <a:t>Age, Sex,</a:t>
-                          </a:r>
-                        </a:p>
-                        <a:p>
-                          <a:r>
-                            <a:rPr lang="en-US" sz="1200" dirty="0"/>
-                            <a:t>Variables Associated with Inflammation</a:t>
-                          </a:r>
-                        </a:p>
-                        <a:p>
-                          <a:endParaRPr lang="en-US" sz="1200" dirty="0"/>
-                        </a:p>
-                      </a:txBody>
-                      <a:tcPr/>
-                    </a:tc>
-                    <a:extLst>
-                      <a:ext uri="{0D108BD9-81ED-4DB2-BD59-A6C34878D82A}">
-                        <a16:rowId xmlns:a16="http://schemas.microsoft.com/office/drawing/2014/main" val="126878836"/>
-                      </a:ext>
-                    </a:extLst>
-                  </a:tr>
-                </a:tbl>
-              </a:graphicData>
-            </a:graphic>
-          </p:graphicFrame>
-        </mc:Fallback>
-      </mc:AlternateContent>
-      <mc:AlternateContent xmlns:mc="http://schemas.openxmlformats.org/markup-compatibility/2006">
-        <mc:Choice xmlns:a14="http://schemas.microsoft.com/office/drawing/2010/main" Requires="a14">
-          <p:sp>
-            <p:nvSpPr>
-              <p:cNvPr id="7" name="TextBox 6">
-                <a:extLst>
-                  <a:ext uri="{FF2B5EF4-FFF2-40B4-BE49-F238E27FC236}">
-                    <a16:creationId xmlns:a16="http://schemas.microsoft.com/office/drawing/2014/main" id="{187B16B1-73DB-5B55-348F-8488EC935BEE}"/>
-                  </a:ext>
-                </a:extLst>
-              </p:cNvPr>
-              <p:cNvSpPr txBox="1"/>
-              <p:nvPr/>
-            </p:nvSpPr>
-            <p:spPr>
-              <a:xfrm>
-                <a:off x="3056281" y="1767389"/>
-                <a:ext cx="6079436" cy="369332"/>
-              </a:xfrm>
-              <a:prstGeom prst="rect">
-                <a:avLst/>
-              </a:prstGeom>
-              <a:noFill/>
-            </p:spPr>
-            <p:txBody>
-              <a:bodyPr wrap="square" rtlCol="0">
-                <a:spAutoFit/>
-              </a:bodyPr>
-              <a:lstStyle/>
-              <a:p>
-                <a:pPr/>
-                <a14:m>
-                  <m:oMathPara xmlns:m="http://schemas.openxmlformats.org/officeDocument/2006/math">
-                    <m:oMathParaPr>
-                      <m:jc m:val="centerGroup"/>
-                    </m:oMathParaPr>
-                    <m:oMath xmlns:m="http://schemas.openxmlformats.org/officeDocument/2006/math">
-                      <m:r>
-                        <m:rPr>
-                          <m:sty m:val="p"/>
-                        </m:rPr>
-                        <a:rPr lang="en-US" b="0" i="0" smtClean="0">
-                          <a:latin typeface="Cambria Math" panose="02040503050406030204" pitchFamily="18" charset="0"/>
-                        </a:rPr>
-                        <m:t>Δ</m:t>
-                      </m:r>
-                      <m:r>
-                        <a:rPr lang="en-US" b="0" i="1" smtClean="0">
-                          <a:latin typeface="Cambria Math" panose="02040503050406030204" pitchFamily="18" charset="0"/>
-                        </a:rPr>
-                        <m:t>𝐶𝑉𝐿𝑇</m:t>
-                      </m:r>
-                      <m:r>
-                        <a:rPr lang="en-US" b="0" i="1" smtClean="0">
-                          <a:latin typeface="Cambria Math" panose="02040503050406030204" pitchFamily="18" charset="0"/>
-                        </a:rPr>
-                        <m:t>~</m:t>
-                      </m:r>
-                      <m:r>
-                        <a:rPr lang="en-US" b="0" i="1" smtClean="0">
-                          <a:latin typeface="Cambria Math" panose="02040503050406030204" pitchFamily="18" charset="0"/>
-                        </a:rPr>
-                        <m:t>𝑋</m:t>
-                      </m:r>
-                      <m:r>
-                        <a:rPr lang="en-US" b="0" i="1" smtClean="0">
-                          <a:latin typeface="Cambria Math" panose="02040503050406030204" pitchFamily="18" charset="0"/>
-                        </a:rPr>
-                        <m:t>+</m:t>
-                      </m:r>
-                      <m:r>
-                        <a:rPr lang="en-US" b="0" i="1" smtClean="0">
-                          <a:latin typeface="Cambria Math" panose="02040503050406030204" pitchFamily="18" charset="0"/>
-                        </a:rPr>
-                        <m:t>𝐶𝑉𝐿</m:t>
-                      </m:r>
-                      <m:sSub>
-                        <m:sSubPr>
-                          <m:ctrlPr>
-                            <a:rPr lang="en-US" b="0" i="1" smtClean="0">
-                              <a:latin typeface="Cambria Math" panose="02040503050406030204" pitchFamily="18" charset="0"/>
-                            </a:rPr>
-                          </m:ctrlPr>
-                        </m:sSubPr>
-                        <m:e>
-                          <m:r>
-                            <a:rPr lang="en-US" b="0" i="1" smtClean="0">
-                              <a:latin typeface="Cambria Math" panose="02040503050406030204" pitchFamily="18" charset="0"/>
-                            </a:rPr>
-                            <m:t>𝑇</m:t>
-                          </m:r>
-                        </m:e>
-                        <m:sub>
-                          <m:r>
-                            <a:rPr lang="en-US" b="0" i="1" smtClean="0">
-                              <a:latin typeface="Cambria Math" panose="02040503050406030204" pitchFamily="18" charset="0"/>
-                            </a:rPr>
-                            <m:t>𝑏𝑎𝑠𝑒𝑙𝑖𝑛𝑒</m:t>
-                          </m:r>
-                        </m:sub>
-                      </m:sSub>
-                      <m:r>
-                        <a:rPr lang="en-US" b="0" i="1" smtClean="0">
-                          <a:latin typeface="Cambria Math" panose="02040503050406030204" pitchFamily="18" charset="0"/>
-                        </a:rPr>
-                        <m:t>+</m:t>
-                      </m:r>
-                      <m:r>
-                        <a:rPr lang="en-US" b="0" i="1" smtClean="0">
-                          <a:latin typeface="Cambria Math" panose="02040503050406030204" pitchFamily="18" charset="0"/>
-                        </a:rPr>
-                        <m:t>𝐴𝑔𝑒</m:t>
-                      </m:r>
-                      <m:r>
-                        <a:rPr lang="en-US" b="0" i="1" smtClean="0">
-                          <a:latin typeface="Cambria Math" panose="02040503050406030204" pitchFamily="18" charset="0"/>
-                        </a:rPr>
-                        <m:t>+</m:t>
-                      </m:r>
-                      <m:r>
-                        <a:rPr lang="en-US" b="0" i="1" smtClean="0">
-                          <a:latin typeface="Cambria Math" panose="02040503050406030204" pitchFamily="18" charset="0"/>
-                        </a:rPr>
-                        <m:t>𝑆𝑒𝑥</m:t>
-                      </m:r>
-                      <m:r>
-                        <a:rPr lang="en-US" b="0" i="1" smtClean="0">
-                          <a:latin typeface="Cambria Math" panose="02040503050406030204" pitchFamily="18" charset="0"/>
-                        </a:rPr>
-                        <m:t>+</m:t>
-                      </m:r>
-                      <m:r>
-                        <a:rPr lang="en-US" b="0" i="1" smtClean="0">
-                          <a:latin typeface="Cambria Math" panose="02040503050406030204" pitchFamily="18" charset="0"/>
-                        </a:rPr>
-                        <m:t>𝐶𝑜𝑣𝑎𝑟𝑖𝑎𝑡𝑒𝑠</m:t>
-                      </m:r>
-                    </m:oMath>
-                  </m:oMathPara>
-                </a14:m>
-                <a:endParaRPr lang="en-US" dirty="0"/>
-              </a:p>
-            </p:txBody>
-          </p:sp>
-        </mc:Choice>
-        <mc:Fallback>
-          <p:sp>
-            <p:nvSpPr>
-              <p:cNvPr id="7" name="TextBox 6">
-                <a:extLst>
-                  <a:ext uri="{FF2B5EF4-FFF2-40B4-BE49-F238E27FC236}">
-                    <a16:creationId xmlns:a16="http://schemas.microsoft.com/office/drawing/2014/main" id="{187B16B1-73DB-5B55-348F-8488EC935BEE}"/>
-                  </a:ext>
-                </a:extLst>
-              </p:cNvPr>
-              <p:cNvSpPr txBox="1">
-                <a:spLocks noRot="1" noChangeAspect="1" noMove="1" noResize="1" noEditPoints="1" noAdjustHandles="1" noChangeArrowheads="1" noChangeShapeType="1" noTextEdit="1"/>
-              </p:cNvSpPr>
-              <p:nvPr/>
-            </p:nvSpPr>
-            <p:spPr>
-              <a:xfrm>
-                <a:off x="3056281" y="1767389"/>
-                <a:ext cx="6079436" cy="369332"/>
-              </a:xfrm>
-              <a:prstGeom prst="rect">
-                <a:avLst/>
-              </a:prstGeom>
-              <a:blipFill>
-                <a:blip r:embed="rId4"/>
-                <a:stretch>
-                  <a:fillRect b="-11475"/>
-                </a:stretch>
-              </a:blipFill>
-            </p:spPr>
-            <p:txBody>
-              <a:bodyPr/>
-              <a:lstStyle/>
-              <a:p>
-                <a:r>
-                  <a:rPr lang="en-US">
-                    <a:noFill/>
-                  </a:rPr>
-                  <a:t> </a:t>
-                </a:r>
-              </a:p>
-            </p:txBody>
-          </p:sp>
-        </mc:Fallback>
-      </mc:AlternateContent>
+      </p:pic>
     </p:spTree>
     <p:extLst>
       <p:ext uri="{BB962C8B-B14F-4D97-AF65-F5344CB8AC3E}">
-        <p14:creationId xmlns:p14="http://schemas.microsoft.com/office/powerpoint/2010/main" val="2057151651"/>
-      </p:ext>
-    </p:extLst>
-  </p:cSld>
-  <p:clrMapOvr>
-    <a:masterClrMapping/>
-  </p:clrMapOvr>
-</p:sld>
-</file>
-
-<file path=ppt/slides/slide9.xml><?xml version="1.0" encoding="utf-8"?>
-<p:sld xmlns:a="http://schemas.openxmlformats.org/drawingml/2006/main" xmlns:r="http://schemas.openxmlformats.org/officeDocument/2006/relationships" xmlns:p="http://schemas.openxmlformats.org/presentationml/2006/main">
-  <p:cSld>
-    <p:bg>
-      <p:bgPr>
-        <a:solidFill>
-          <a:srgbClr val="EFEDE3"/>
-        </a:solidFill>
-        <a:effectLst/>
-      </p:bgPr>
-    </p:bg>
-    <p:spTree>
-      <p:nvGrpSpPr>
-        <p:cNvPr id="1" name="">
-          <a:extLst>
-            <a:ext uri="{FF2B5EF4-FFF2-40B4-BE49-F238E27FC236}">
-              <a16:creationId xmlns:a16="http://schemas.microsoft.com/office/drawing/2014/main" id="{C14A2395-DFE9-AF81-F437-B1094E48F630}"/>
-            </a:ext>
-          </a:extLst>
-        </p:cNvPr>
-        <p:cNvGrpSpPr/>
-        <p:nvPr/>
-      </p:nvGrpSpPr>
-      <p:grpSpPr>
-        <a:xfrm>
-          <a:off x="0" y="0"/>
-          <a:ext cx="0" cy="0"/>
-          <a:chOff x="0" y="0"/>
-          <a:chExt cx="0" cy="0"/>
-        </a:xfrm>
-      </p:grpSpPr>
-      <p:sp>
-        <p:nvSpPr>
-          <p:cNvPr id="4" name="Rectangle 3">
-            <a:extLst>
-              <a:ext uri="{FF2B5EF4-FFF2-40B4-BE49-F238E27FC236}">
-                <a16:creationId xmlns:a16="http://schemas.microsoft.com/office/drawing/2014/main" id="{FFEBF976-F1E8-59B9-D82D-C6F3538527E1}"/>
-              </a:ext>
-            </a:extLst>
-          </p:cNvPr>
-          <p:cNvSpPr/>
-          <p:nvPr/>
-        </p:nvSpPr>
-        <p:spPr>
-          <a:xfrm>
-            <a:off x="443344" y="0"/>
-            <a:ext cx="212436" cy="6857999"/>
-          </a:xfrm>
-          <a:prstGeom prst="rect">
-            <a:avLst/>
-          </a:prstGeom>
-          <a:solidFill>
-            <a:schemeClr val="tx1"/>
-          </a:solidFill>
-        </p:spPr>
-        <p:style>
-          <a:lnRef idx="2">
-            <a:schemeClr val="accent1">
-              <a:shade val="15000"/>
-            </a:schemeClr>
-          </a:lnRef>
-          <a:fillRef idx="1">
-            <a:schemeClr val="accent1"/>
-          </a:fillRef>
-          <a:effectRef idx="0">
-            <a:schemeClr val="accent1"/>
-          </a:effectRef>
-          <a:fontRef idx="minor">
-            <a:schemeClr val="lt1"/>
-          </a:fontRef>
-        </p:style>
-        <p:txBody>
-          <a:bodyPr rtlCol="0" anchor="ctr"/>
-          <a:lstStyle/>
-          <a:p>
-            <a:pPr algn="ctr"/>
-            <a:endParaRPr lang="en-US"/>
-          </a:p>
-        </p:txBody>
-      </p:sp>
-      <p:sp>
-        <p:nvSpPr>
-          <p:cNvPr id="2" name="Title 1">
-            <a:extLst>
-              <a:ext uri="{FF2B5EF4-FFF2-40B4-BE49-F238E27FC236}">
-                <a16:creationId xmlns:a16="http://schemas.microsoft.com/office/drawing/2014/main" id="{79FE1E47-3336-6467-069B-F99B8517F045}"/>
-              </a:ext>
-            </a:extLst>
-          </p:cNvPr>
-          <p:cNvSpPr>
-            <a:spLocks noGrp="1"/>
-          </p:cNvSpPr>
-          <p:nvPr>
-            <p:ph type="title"/>
-          </p:nvPr>
-        </p:nvSpPr>
-        <p:spPr>
-          <a:xfrm>
-            <a:off x="1189181" y="365125"/>
-            <a:ext cx="10515600" cy="1325563"/>
-          </a:xfrm>
-        </p:spPr>
-        <p:txBody>
-          <a:bodyPr/>
-          <a:lstStyle/>
-          <a:p>
-            <a:r>
-              <a:rPr lang="en-US" dirty="0"/>
-              <a:t>Aim 2 Analysis Method</a:t>
-            </a:r>
-          </a:p>
-        </p:txBody>
-      </p:sp>
-      <mc:AlternateContent xmlns:mc="http://schemas.openxmlformats.org/markup-compatibility/2006">
-        <mc:Choice xmlns:a14="http://schemas.microsoft.com/office/drawing/2010/main" Requires="a14">
-          <p:graphicFrame>
-            <p:nvGraphicFramePr>
-              <p:cNvPr id="3" name="Table 2">
-                <a:extLst>
-                  <a:ext uri="{FF2B5EF4-FFF2-40B4-BE49-F238E27FC236}">
-                    <a16:creationId xmlns:a16="http://schemas.microsoft.com/office/drawing/2014/main" id="{CBB6CD93-0D70-46AD-5F9C-716E46304035}"/>
-                  </a:ext>
-                </a:extLst>
-              </p:cNvPr>
-              <p:cNvGraphicFramePr>
-                <a:graphicFrameLocks noGrp="1"/>
-              </p:cNvGraphicFramePr>
-              <p:nvPr/>
-            </p:nvGraphicFramePr>
-            <p:xfrm>
-              <a:off x="1386331" y="2910258"/>
-              <a:ext cx="9419337" cy="3503104"/>
-            </p:xfrm>
-            <a:graphic>
-              <a:graphicData uri="http://schemas.openxmlformats.org/drawingml/2006/table">
-                <a:tbl>
-                  <a:tblPr firstRow="1" bandRow="1">
-                    <a:tableStyleId>{073A0DAA-6AF3-43AB-8588-CEC1D06C72B9}</a:tableStyleId>
-                  </a:tblPr>
-                  <a:tblGrid>
-                    <a:gridCol w="1140143">
-                      <a:extLst>
-                        <a:ext uri="{9D8B030D-6E8A-4147-A177-3AD203B41FA5}">
-                          <a16:colId xmlns:a16="http://schemas.microsoft.com/office/drawing/2014/main" val="3885695937"/>
-                        </a:ext>
-                      </a:extLst>
-                    </a:gridCol>
-                    <a:gridCol w="2824925">
-                      <a:extLst>
-                        <a:ext uri="{9D8B030D-6E8A-4147-A177-3AD203B41FA5}">
-                          <a16:colId xmlns:a16="http://schemas.microsoft.com/office/drawing/2014/main" val="1502429306"/>
-                        </a:ext>
-                      </a:extLst>
-                    </a:gridCol>
-                    <a:gridCol w="2632583">
-                      <a:extLst>
-                        <a:ext uri="{9D8B030D-6E8A-4147-A177-3AD203B41FA5}">
-                          <a16:colId xmlns:a16="http://schemas.microsoft.com/office/drawing/2014/main" val="3907131552"/>
-                        </a:ext>
-                      </a:extLst>
-                    </a:gridCol>
-                    <a:gridCol w="2821686">
-                      <a:extLst>
-                        <a:ext uri="{9D8B030D-6E8A-4147-A177-3AD203B41FA5}">
-                          <a16:colId xmlns:a16="http://schemas.microsoft.com/office/drawing/2014/main" val="780577694"/>
-                        </a:ext>
-                      </a:extLst>
-                    </a:gridCol>
-                  </a:tblGrid>
-                  <a:tr h="337816">
-                    <a:tc>
-                      <a:txBody>
-                        <a:bodyPr/>
-                        <a:lstStyle/>
-                        <a:p>
-                          <a:r>
-                            <a:rPr lang="en-US" sz="1400"/>
-                            <a:t>Hypothesis</a:t>
-                          </a:r>
-                          <a:endParaRPr lang="en-US" sz="1400" dirty="0"/>
-                        </a:p>
-                      </a:txBody>
-                      <a:tcPr/>
-                    </a:tc>
-                    <a:tc>
-                      <a:txBody>
-                        <a:bodyPr/>
-                        <a:lstStyle/>
-                        <a:p>
-                          <a:r>
-                            <a:rPr lang="en-US" sz="1400" dirty="0"/>
-                            <a:t>Primary Outcomes (</a:t>
-                          </a:r>
-                          <a14:m>
-                            <m:oMath xmlns:m="http://schemas.openxmlformats.org/officeDocument/2006/math">
-                              <m:r>
-                                <a:rPr lang="en-US" sz="1400" b="1" i="1" smtClean="0">
-                                  <a:latin typeface="Cambria Math" panose="02040503050406030204" pitchFamily="18" charset="0"/>
-                                </a:rPr>
-                                <m:t>𝒀</m:t>
-                              </m:r>
-                            </m:oMath>
-                          </a14:m>
-                          <a:r>
-                            <a:rPr lang="en-US" sz="1400" dirty="0"/>
-                            <a:t>)</a:t>
-                          </a:r>
-                        </a:p>
-                      </a:txBody>
-                      <a:tcPr/>
-                    </a:tc>
-                    <a:tc>
-                      <a:txBody>
-                        <a:bodyPr/>
-                        <a:lstStyle/>
-                        <a:p>
-                          <a:r>
-                            <a:rPr lang="en-US" sz="1400" dirty="0"/>
-                            <a:t>Primary Predictors (</a:t>
-                          </a:r>
-                          <a14:m>
-                            <m:oMath xmlns:m="http://schemas.openxmlformats.org/officeDocument/2006/math">
-                              <m:r>
-                                <a:rPr lang="en-US" sz="1400" b="1" i="1" smtClean="0">
-                                  <a:latin typeface="Cambria Math" panose="02040503050406030204" pitchFamily="18" charset="0"/>
-                                </a:rPr>
-                                <m:t>𝑿</m:t>
-                              </m:r>
-                            </m:oMath>
-                          </a14:m>
-                          <a:r>
-                            <a:rPr lang="en-US" sz="1400" dirty="0"/>
-                            <a:t>)</a:t>
-                          </a:r>
-                        </a:p>
-                      </a:txBody>
-                      <a:tcPr/>
-                    </a:tc>
-                    <a:tc>
-                      <a:txBody>
-                        <a:bodyPr/>
-                        <a:lstStyle/>
-                        <a:p>
-                          <a:r>
-                            <a:rPr lang="en-US" sz="1400" dirty="0"/>
-                            <a:t>Covariates</a:t>
-                          </a:r>
-                        </a:p>
-                      </a:txBody>
-                      <a:tcPr/>
-                    </a:tc>
-                    <a:extLst>
-                      <a:ext uri="{0D108BD9-81ED-4DB2-BD59-A6C34878D82A}">
-                        <a16:rowId xmlns:a16="http://schemas.microsoft.com/office/drawing/2014/main" val="3804010600"/>
-                      </a:ext>
-                    </a:extLst>
-                  </a:tr>
-                  <a:tr h="1582644">
-                    <a:tc>
-                      <a:txBody>
-                        <a:bodyPr/>
-                        <a:lstStyle/>
-                        <a:p>
-                          <a:r>
-                            <a:rPr lang="en-US" sz="1200" dirty="0"/>
-                            <a:t>1a</a:t>
-                          </a:r>
-                        </a:p>
-                      </a:txBody>
-                      <a:tcPr/>
-                    </a:tc>
-                    <a:tc>
-                      <a:txBody>
-                        <a:bodyPr/>
-                        <a:lstStyle/>
-                        <a:p>
-                          <a:r>
-                            <a:rPr lang="en-US" sz="1200"/>
-                            <a:t>Change in Cortical Thickness</a:t>
-                          </a:r>
-                        </a:p>
-                        <a:p>
-                          <a:r>
-                            <a:rPr lang="en-US" sz="1200"/>
-                            <a:t>Change in Cognitive Measures</a:t>
-                          </a:r>
-                        </a:p>
-                        <a:p>
-                          <a:r>
-                            <a:rPr lang="en-US" sz="1200"/>
-                            <a:t>(CVLT, Benson Figure, MST, Story Recall)</a:t>
-                          </a:r>
-                          <a:endParaRPr lang="en-US" sz="1200" dirty="0"/>
-                        </a:p>
-                      </a:txBody>
-                      <a:tcPr/>
-                    </a:tc>
-                    <a:tc>
-                      <a:txBody>
-                        <a:bodyPr/>
-                        <a:lstStyle/>
-                        <a:p>
-                          <a:r>
-                            <a:rPr lang="en-US" sz="1200"/>
-                            <a:t>Baseline Measures of Inflammation</a:t>
-                          </a:r>
-                        </a:p>
-                        <a:p>
-                          <a:r>
-                            <a:rPr lang="en-US" sz="1200"/>
-                            <a:t>(IL-6, TNF-alpha, MCP-1, eotaxin-1)</a:t>
-                          </a:r>
-                          <a:endParaRPr lang="en-US" sz="1200" dirty="0"/>
-                        </a:p>
-                      </a:txBody>
-                      <a:tcPr/>
-                    </a:tc>
-                    <a:tc>
-                      <a:txBody>
-                        <a:bodyPr/>
-                        <a:lstStyle/>
-                        <a:p>
-                          <a:r>
-                            <a:rPr lang="en-US" sz="1200"/>
-                            <a:t>Baseline Outcome,</a:t>
-                          </a:r>
-                        </a:p>
-                        <a:p>
-                          <a:r>
-                            <a:rPr lang="en-US" sz="1200"/>
-                            <a:t>Age, Sex,</a:t>
-                          </a:r>
-                        </a:p>
-                        <a:p>
-                          <a:r>
-                            <a:rPr lang="en-US" sz="1200"/>
-                            <a:t>Variables Associated with Inflammation</a:t>
-                          </a:r>
-                          <a:endParaRPr lang="en-US" sz="1200" dirty="0"/>
-                        </a:p>
-                      </a:txBody>
-                      <a:tcPr/>
-                    </a:tc>
-                    <a:extLst>
-                      <a:ext uri="{0D108BD9-81ED-4DB2-BD59-A6C34878D82A}">
-                        <a16:rowId xmlns:a16="http://schemas.microsoft.com/office/drawing/2014/main" val="2112868750"/>
-                      </a:ext>
-                    </a:extLst>
-                  </a:tr>
-                  <a:tr h="1582644">
-                    <a:tc>
-                      <a:txBody>
-                        <a:bodyPr/>
-                        <a:lstStyle/>
-                        <a:p>
-                          <a:r>
-                            <a:rPr lang="en-US" sz="1200"/>
-                            <a:t>1b</a:t>
-                          </a:r>
-                          <a:endParaRPr lang="en-US" sz="1200" dirty="0"/>
-                        </a:p>
-                      </a:txBody>
-                      <a:tcPr/>
-                    </a:tc>
-                    <a:tc>
-                      <a:txBody>
-                        <a:bodyPr/>
-                        <a:lstStyle/>
-                        <a:p>
-                          <a:r>
-                            <a:rPr lang="en-US" sz="1200" dirty="0"/>
-                            <a:t>Chang in Cortical Thickness</a:t>
-                          </a:r>
-                        </a:p>
-                        <a:p>
-                          <a:r>
-                            <a:rPr lang="en-US" sz="1200" dirty="0"/>
-                            <a:t>Change in Cognitive Measures</a:t>
-                          </a:r>
-                        </a:p>
-                        <a:p>
-                          <a:r>
-                            <a:rPr lang="en-US" sz="1200" dirty="0"/>
-                            <a:t>(CVLT, Benson Figure, MST, Story Recall)</a:t>
-                          </a:r>
-                        </a:p>
-                      </a:txBody>
-                      <a:tcPr/>
-                    </a:tc>
-                    <a:tc>
-                      <a:txBody>
-                        <a:bodyPr/>
-                        <a:lstStyle/>
-                        <a:p>
-                          <a:r>
-                            <a:rPr lang="en-US" sz="1200"/>
-                            <a:t>Change in Measures of Inflammation</a:t>
-                          </a:r>
-                        </a:p>
-                        <a:p>
-                          <a:r>
-                            <a:rPr lang="en-US" sz="1200"/>
-                            <a:t>(IL-6, TNF-alpha, MCP-1, eotaxin-1)</a:t>
-                          </a:r>
-                        </a:p>
-                        <a:p>
-                          <a:endParaRPr lang="en-US" sz="1200" dirty="0"/>
-                        </a:p>
-                      </a:txBody>
-                      <a:tcPr/>
-                    </a:tc>
-                    <a:tc>
-                      <a:txBody>
-                        <a:bodyPr/>
-                        <a:lstStyle/>
-                        <a:p>
-                          <a:r>
-                            <a:rPr lang="en-US" sz="1200" dirty="0"/>
-                            <a:t>Baseline Outcome,</a:t>
-                          </a:r>
-                        </a:p>
-                        <a:p>
-                          <a:r>
-                            <a:rPr lang="en-US" sz="1200" dirty="0"/>
-                            <a:t>Age, Sex,</a:t>
-                          </a:r>
-                        </a:p>
-                        <a:p>
-                          <a:r>
-                            <a:rPr lang="en-US" sz="1200" dirty="0"/>
-                            <a:t>Variables Associated with Inflammation</a:t>
-                          </a:r>
-                        </a:p>
-                        <a:p>
-                          <a:endParaRPr lang="en-US" sz="1200" dirty="0"/>
-                        </a:p>
-                      </a:txBody>
-                      <a:tcPr/>
-                    </a:tc>
-                    <a:extLst>
-                      <a:ext uri="{0D108BD9-81ED-4DB2-BD59-A6C34878D82A}">
-                        <a16:rowId xmlns:a16="http://schemas.microsoft.com/office/drawing/2014/main" val="126878836"/>
-                      </a:ext>
-                    </a:extLst>
-                  </a:tr>
-                </a:tbl>
-              </a:graphicData>
-            </a:graphic>
-          </p:graphicFrame>
-        </mc:Choice>
-        <mc:Fallback>
-          <p:graphicFrame>
-            <p:nvGraphicFramePr>
-              <p:cNvPr id="3" name="Table 2">
-                <a:extLst>
-                  <a:ext uri="{FF2B5EF4-FFF2-40B4-BE49-F238E27FC236}">
-                    <a16:creationId xmlns:a16="http://schemas.microsoft.com/office/drawing/2014/main" id="{CBB6CD93-0D70-46AD-5F9C-716E46304035}"/>
-                  </a:ext>
-                </a:extLst>
-              </p:cNvPr>
-              <p:cNvGraphicFramePr>
-                <a:graphicFrameLocks noGrp="1"/>
-              </p:cNvGraphicFramePr>
-              <p:nvPr/>
-            </p:nvGraphicFramePr>
-            <p:xfrm>
-              <a:off x="1386331" y="2910258"/>
-              <a:ext cx="9419337" cy="3503104"/>
-            </p:xfrm>
-            <a:graphic>
-              <a:graphicData uri="http://schemas.openxmlformats.org/drawingml/2006/table">
-                <a:tbl>
-                  <a:tblPr firstRow="1" bandRow="1">
-                    <a:tableStyleId>{073A0DAA-6AF3-43AB-8588-CEC1D06C72B9}</a:tableStyleId>
-                  </a:tblPr>
-                  <a:tblGrid>
-                    <a:gridCol w="1140143">
-                      <a:extLst>
-                        <a:ext uri="{9D8B030D-6E8A-4147-A177-3AD203B41FA5}">
-                          <a16:colId xmlns:a16="http://schemas.microsoft.com/office/drawing/2014/main" val="3885695937"/>
-                        </a:ext>
-                      </a:extLst>
-                    </a:gridCol>
-                    <a:gridCol w="2824925">
-                      <a:extLst>
-                        <a:ext uri="{9D8B030D-6E8A-4147-A177-3AD203B41FA5}">
-                          <a16:colId xmlns:a16="http://schemas.microsoft.com/office/drawing/2014/main" val="1502429306"/>
-                        </a:ext>
-                      </a:extLst>
-                    </a:gridCol>
-                    <a:gridCol w="2632583">
-                      <a:extLst>
-                        <a:ext uri="{9D8B030D-6E8A-4147-A177-3AD203B41FA5}">
-                          <a16:colId xmlns:a16="http://schemas.microsoft.com/office/drawing/2014/main" val="3907131552"/>
-                        </a:ext>
-                      </a:extLst>
-                    </a:gridCol>
-                    <a:gridCol w="2821686">
-                      <a:extLst>
-                        <a:ext uri="{9D8B030D-6E8A-4147-A177-3AD203B41FA5}">
-                          <a16:colId xmlns:a16="http://schemas.microsoft.com/office/drawing/2014/main" val="780577694"/>
-                        </a:ext>
-                      </a:extLst>
-                    </a:gridCol>
-                  </a:tblGrid>
-                  <a:tr h="337816">
-                    <a:tc>
-                      <a:txBody>
-                        <a:bodyPr/>
-                        <a:lstStyle/>
-                        <a:p>
-                          <a:r>
-                            <a:rPr lang="en-US" sz="1400"/>
-                            <a:t>Hypothesis</a:t>
-                          </a:r>
-                          <a:endParaRPr lang="en-US" sz="1400" dirty="0"/>
-                        </a:p>
-                      </a:txBody>
-                      <a:tcPr/>
-                    </a:tc>
-                    <a:tc>
-                      <a:txBody>
-                        <a:bodyPr/>
-                        <a:lstStyle/>
-                        <a:p>
-                          <a:endParaRPr lang="en-US"/>
-                        </a:p>
-                      </a:txBody>
-                      <a:tcPr>
-                        <a:blipFill>
-                          <a:blip r:embed="rId3"/>
-                          <a:stretch>
-                            <a:fillRect l="-40517" t="-1786" r="-193750" b="-932143"/>
-                          </a:stretch>
-                        </a:blipFill>
-                      </a:tcPr>
-                    </a:tc>
-                    <a:tc>
-                      <a:txBody>
-                        <a:bodyPr/>
-                        <a:lstStyle/>
-                        <a:p>
-                          <a:endParaRPr lang="en-US"/>
-                        </a:p>
-                      </a:txBody>
-                      <a:tcPr>
-                        <a:blipFill>
-                          <a:blip r:embed="rId3"/>
-                          <a:stretch>
-                            <a:fillRect l="-150926" t="-1786" r="-108102" b="-932143"/>
-                          </a:stretch>
-                        </a:blipFill>
-                      </a:tcPr>
-                    </a:tc>
-                    <a:tc>
-                      <a:txBody>
-                        <a:bodyPr/>
-                        <a:lstStyle/>
-                        <a:p>
-                          <a:r>
-                            <a:rPr lang="en-US" sz="1400" dirty="0"/>
-                            <a:t>Covariates</a:t>
-                          </a:r>
-                        </a:p>
-                      </a:txBody>
-                      <a:tcPr/>
-                    </a:tc>
-                    <a:extLst>
-                      <a:ext uri="{0D108BD9-81ED-4DB2-BD59-A6C34878D82A}">
-                        <a16:rowId xmlns:a16="http://schemas.microsoft.com/office/drawing/2014/main" val="3804010600"/>
-                      </a:ext>
-                    </a:extLst>
-                  </a:tr>
-                  <a:tr h="1582644">
-                    <a:tc>
-                      <a:txBody>
-                        <a:bodyPr/>
-                        <a:lstStyle/>
-                        <a:p>
-                          <a:r>
-                            <a:rPr lang="en-US" sz="1200" dirty="0"/>
-                            <a:t>1a</a:t>
-                          </a:r>
-                        </a:p>
-                      </a:txBody>
-                      <a:tcPr/>
-                    </a:tc>
-                    <a:tc>
-                      <a:txBody>
-                        <a:bodyPr/>
-                        <a:lstStyle/>
-                        <a:p>
-                          <a:r>
-                            <a:rPr lang="en-US" sz="1200"/>
-                            <a:t>Change in Cortical Thickness</a:t>
-                          </a:r>
-                        </a:p>
-                        <a:p>
-                          <a:r>
-                            <a:rPr lang="en-US" sz="1200"/>
-                            <a:t>Change in Cognitive Measures</a:t>
-                          </a:r>
-                        </a:p>
-                        <a:p>
-                          <a:r>
-                            <a:rPr lang="en-US" sz="1200"/>
-                            <a:t>(CVLT, Benson Figure, MST, Story Recall)</a:t>
-                          </a:r>
-                          <a:endParaRPr lang="en-US" sz="1200" dirty="0"/>
-                        </a:p>
-                      </a:txBody>
-                      <a:tcPr/>
-                    </a:tc>
-                    <a:tc>
-                      <a:txBody>
-                        <a:bodyPr/>
-                        <a:lstStyle/>
-                        <a:p>
-                          <a:r>
-                            <a:rPr lang="en-US" sz="1200"/>
-                            <a:t>Baseline Measures of Inflammation</a:t>
-                          </a:r>
-                        </a:p>
-                        <a:p>
-                          <a:r>
-                            <a:rPr lang="en-US" sz="1200"/>
-                            <a:t>(IL-6, TNF-alpha, MCP-1, eotaxin-1)</a:t>
-                          </a:r>
-                          <a:endParaRPr lang="en-US" sz="1200" dirty="0"/>
-                        </a:p>
-                      </a:txBody>
-                      <a:tcPr/>
-                    </a:tc>
-                    <a:tc>
-                      <a:txBody>
-                        <a:bodyPr/>
-                        <a:lstStyle/>
-                        <a:p>
-                          <a:r>
-                            <a:rPr lang="en-US" sz="1200"/>
-                            <a:t>Baseline Outcome,</a:t>
-                          </a:r>
-                        </a:p>
-                        <a:p>
-                          <a:r>
-                            <a:rPr lang="en-US" sz="1200"/>
-                            <a:t>Age, Sex,</a:t>
-                          </a:r>
-                        </a:p>
-                        <a:p>
-                          <a:r>
-                            <a:rPr lang="en-US" sz="1200"/>
-                            <a:t>Variables Associated with Inflammation</a:t>
-                          </a:r>
-                          <a:endParaRPr lang="en-US" sz="1200" dirty="0"/>
-                        </a:p>
-                      </a:txBody>
-                      <a:tcPr/>
-                    </a:tc>
-                    <a:extLst>
-                      <a:ext uri="{0D108BD9-81ED-4DB2-BD59-A6C34878D82A}">
-                        <a16:rowId xmlns:a16="http://schemas.microsoft.com/office/drawing/2014/main" val="2112868750"/>
-                      </a:ext>
-                    </a:extLst>
-                  </a:tr>
-                  <a:tr h="1582644">
-                    <a:tc>
-                      <a:txBody>
-                        <a:bodyPr/>
-                        <a:lstStyle/>
-                        <a:p>
-                          <a:r>
-                            <a:rPr lang="en-US" sz="1200"/>
-                            <a:t>1b</a:t>
-                          </a:r>
-                          <a:endParaRPr lang="en-US" sz="1200" dirty="0"/>
-                        </a:p>
-                      </a:txBody>
-                      <a:tcPr/>
-                    </a:tc>
-                    <a:tc>
-                      <a:txBody>
-                        <a:bodyPr/>
-                        <a:lstStyle/>
-                        <a:p>
-                          <a:r>
-                            <a:rPr lang="en-US" sz="1200" dirty="0"/>
-                            <a:t>Chang in Cortical Thickness</a:t>
-                          </a:r>
-                        </a:p>
-                        <a:p>
-                          <a:r>
-                            <a:rPr lang="en-US" sz="1200" dirty="0"/>
-                            <a:t>Change in Cognitive Measures</a:t>
-                          </a:r>
-                        </a:p>
-                        <a:p>
-                          <a:r>
-                            <a:rPr lang="en-US" sz="1200" dirty="0"/>
-                            <a:t>(CVLT, Benson Figure, MST, Story Recall)</a:t>
-                          </a:r>
-                        </a:p>
-                      </a:txBody>
-                      <a:tcPr/>
-                    </a:tc>
-                    <a:tc>
-                      <a:txBody>
-                        <a:bodyPr/>
-                        <a:lstStyle/>
-                        <a:p>
-                          <a:r>
-                            <a:rPr lang="en-US" sz="1200"/>
-                            <a:t>Change in Measures of Inflammation</a:t>
-                          </a:r>
-                        </a:p>
-                        <a:p>
-                          <a:r>
-                            <a:rPr lang="en-US" sz="1200"/>
-                            <a:t>(IL-6, TNF-alpha, MCP-1, eotaxin-1)</a:t>
-                          </a:r>
-                        </a:p>
-                        <a:p>
-                          <a:endParaRPr lang="en-US" sz="1200" dirty="0"/>
-                        </a:p>
-                      </a:txBody>
-                      <a:tcPr/>
-                    </a:tc>
-                    <a:tc>
-                      <a:txBody>
-                        <a:bodyPr/>
-                        <a:lstStyle/>
-                        <a:p>
-                          <a:r>
-                            <a:rPr lang="en-US" sz="1200" dirty="0"/>
-                            <a:t>Baseline Outcome,</a:t>
-                          </a:r>
-                        </a:p>
-                        <a:p>
-                          <a:r>
-                            <a:rPr lang="en-US" sz="1200" dirty="0"/>
-                            <a:t>Age, Sex,</a:t>
-                          </a:r>
-                        </a:p>
-                        <a:p>
-                          <a:r>
-                            <a:rPr lang="en-US" sz="1200" dirty="0"/>
-                            <a:t>Variables Associated with Inflammation</a:t>
-                          </a:r>
-                        </a:p>
-                        <a:p>
-                          <a:endParaRPr lang="en-US" sz="1200" dirty="0"/>
-                        </a:p>
-                      </a:txBody>
-                      <a:tcPr/>
-                    </a:tc>
-                    <a:extLst>
-                      <a:ext uri="{0D108BD9-81ED-4DB2-BD59-A6C34878D82A}">
-                        <a16:rowId xmlns:a16="http://schemas.microsoft.com/office/drawing/2014/main" val="126878836"/>
-                      </a:ext>
-                    </a:extLst>
-                  </a:tr>
-                </a:tbl>
-              </a:graphicData>
-            </a:graphic>
-          </p:graphicFrame>
-        </mc:Fallback>
-      </mc:AlternateContent>
-      <mc:AlternateContent xmlns:mc="http://schemas.openxmlformats.org/markup-compatibility/2006">
-        <mc:Choice xmlns:a14="http://schemas.microsoft.com/office/drawing/2010/main" Requires="a14">
-          <p:sp>
-            <p:nvSpPr>
-              <p:cNvPr id="7" name="TextBox 6">
-                <a:extLst>
-                  <a:ext uri="{FF2B5EF4-FFF2-40B4-BE49-F238E27FC236}">
-                    <a16:creationId xmlns:a16="http://schemas.microsoft.com/office/drawing/2014/main" id="{6F10A880-06C1-97FC-3571-BFC4FF50E8A7}"/>
-                  </a:ext>
-                </a:extLst>
-              </p:cNvPr>
-              <p:cNvSpPr txBox="1"/>
-              <p:nvPr/>
-            </p:nvSpPr>
-            <p:spPr>
-              <a:xfrm>
-                <a:off x="3056281" y="1767389"/>
-                <a:ext cx="6079436" cy="369332"/>
-              </a:xfrm>
-              <a:prstGeom prst="rect">
-                <a:avLst/>
-              </a:prstGeom>
-              <a:noFill/>
-            </p:spPr>
-            <p:txBody>
-              <a:bodyPr wrap="square" rtlCol="0">
-                <a:spAutoFit/>
-              </a:bodyPr>
-              <a:lstStyle/>
-              <a:p>
-                <a:pPr/>
-                <a14:m>
-                  <m:oMathPara xmlns:m="http://schemas.openxmlformats.org/officeDocument/2006/math">
-                    <m:oMathParaPr>
-                      <m:jc m:val="centerGroup"/>
-                    </m:oMathParaPr>
-                    <m:oMath xmlns:m="http://schemas.openxmlformats.org/officeDocument/2006/math">
-                      <m:r>
-                        <m:rPr>
-                          <m:sty m:val="p"/>
-                        </m:rPr>
-                        <a:rPr lang="en-US" b="0" i="0" smtClean="0">
-                          <a:latin typeface="Cambria Math" panose="02040503050406030204" pitchFamily="18" charset="0"/>
-                        </a:rPr>
-                        <m:t>Δ</m:t>
-                      </m:r>
-                      <m:r>
-                        <a:rPr lang="en-US" b="0" i="1" smtClean="0">
-                          <a:latin typeface="Cambria Math" panose="02040503050406030204" pitchFamily="18" charset="0"/>
-                        </a:rPr>
-                        <m:t>𝐶𝑉𝐿𝑇</m:t>
-                      </m:r>
-                      <m:r>
-                        <a:rPr lang="en-US" b="0" i="1" smtClean="0">
-                          <a:latin typeface="Cambria Math" panose="02040503050406030204" pitchFamily="18" charset="0"/>
-                        </a:rPr>
-                        <m:t>~</m:t>
-                      </m:r>
-                      <m:r>
-                        <a:rPr lang="en-US" b="0" i="1" smtClean="0">
-                          <a:latin typeface="Cambria Math" panose="02040503050406030204" pitchFamily="18" charset="0"/>
-                        </a:rPr>
-                        <m:t>𝑋</m:t>
-                      </m:r>
-                      <m:r>
-                        <a:rPr lang="en-US" b="0" i="1" smtClean="0">
-                          <a:latin typeface="Cambria Math" panose="02040503050406030204" pitchFamily="18" charset="0"/>
-                        </a:rPr>
-                        <m:t>+</m:t>
-                      </m:r>
-                      <m:r>
-                        <a:rPr lang="en-US" b="0" i="1" smtClean="0">
-                          <a:latin typeface="Cambria Math" panose="02040503050406030204" pitchFamily="18" charset="0"/>
-                        </a:rPr>
-                        <m:t>𝐶𝑉𝐿</m:t>
-                      </m:r>
-                      <m:sSub>
-                        <m:sSubPr>
-                          <m:ctrlPr>
-                            <a:rPr lang="en-US" b="0" i="1" smtClean="0">
-                              <a:latin typeface="Cambria Math" panose="02040503050406030204" pitchFamily="18" charset="0"/>
-                            </a:rPr>
-                          </m:ctrlPr>
-                        </m:sSubPr>
-                        <m:e>
-                          <m:r>
-                            <a:rPr lang="en-US" b="0" i="1" smtClean="0">
-                              <a:latin typeface="Cambria Math" panose="02040503050406030204" pitchFamily="18" charset="0"/>
-                            </a:rPr>
-                            <m:t>𝑇</m:t>
-                          </m:r>
-                        </m:e>
-                        <m:sub>
-                          <m:r>
-                            <a:rPr lang="en-US" b="0" i="1" smtClean="0">
-                              <a:latin typeface="Cambria Math" panose="02040503050406030204" pitchFamily="18" charset="0"/>
-                            </a:rPr>
-                            <m:t>𝑏𝑎𝑠𝑒𝑙𝑖𝑛𝑒</m:t>
-                          </m:r>
-                        </m:sub>
-                      </m:sSub>
-                      <m:r>
-                        <a:rPr lang="en-US" b="0" i="1" smtClean="0">
-                          <a:latin typeface="Cambria Math" panose="02040503050406030204" pitchFamily="18" charset="0"/>
-                        </a:rPr>
-                        <m:t>+</m:t>
-                      </m:r>
-                      <m:r>
-                        <a:rPr lang="en-US" b="0" i="1" smtClean="0">
-                          <a:latin typeface="Cambria Math" panose="02040503050406030204" pitchFamily="18" charset="0"/>
-                        </a:rPr>
-                        <m:t>𝐴𝑔𝑒</m:t>
-                      </m:r>
-                      <m:r>
-                        <a:rPr lang="en-US" b="0" i="1" smtClean="0">
-                          <a:latin typeface="Cambria Math" panose="02040503050406030204" pitchFamily="18" charset="0"/>
-                        </a:rPr>
-                        <m:t>+</m:t>
-                      </m:r>
-                      <m:r>
-                        <a:rPr lang="en-US" b="0" i="1" smtClean="0">
-                          <a:latin typeface="Cambria Math" panose="02040503050406030204" pitchFamily="18" charset="0"/>
-                        </a:rPr>
-                        <m:t>𝑆𝑒𝑥</m:t>
-                      </m:r>
-                      <m:r>
-                        <a:rPr lang="en-US" b="0" i="1" smtClean="0">
-                          <a:latin typeface="Cambria Math" panose="02040503050406030204" pitchFamily="18" charset="0"/>
-                        </a:rPr>
-                        <m:t>+</m:t>
-                      </m:r>
-                      <m:r>
-                        <a:rPr lang="en-US" b="0" i="1" smtClean="0">
-                          <a:latin typeface="Cambria Math" panose="02040503050406030204" pitchFamily="18" charset="0"/>
-                        </a:rPr>
-                        <m:t>𝐶𝑜𝑣𝑎𝑟𝑖𝑎𝑡𝑒𝑠</m:t>
-                      </m:r>
-                    </m:oMath>
-                  </m:oMathPara>
-                </a14:m>
-                <a:endParaRPr lang="en-US" dirty="0"/>
-              </a:p>
-            </p:txBody>
-          </p:sp>
-        </mc:Choice>
-        <mc:Fallback>
-          <p:sp>
-            <p:nvSpPr>
-              <p:cNvPr id="7" name="TextBox 6">
-                <a:extLst>
-                  <a:ext uri="{FF2B5EF4-FFF2-40B4-BE49-F238E27FC236}">
-                    <a16:creationId xmlns:a16="http://schemas.microsoft.com/office/drawing/2014/main" id="{6F10A880-06C1-97FC-3571-BFC4FF50E8A7}"/>
-                  </a:ext>
-                </a:extLst>
-              </p:cNvPr>
-              <p:cNvSpPr txBox="1">
-                <a:spLocks noRot="1" noChangeAspect="1" noMove="1" noResize="1" noEditPoints="1" noAdjustHandles="1" noChangeArrowheads="1" noChangeShapeType="1" noTextEdit="1"/>
-              </p:cNvSpPr>
-              <p:nvPr/>
-            </p:nvSpPr>
-            <p:spPr>
-              <a:xfrm>
-                <a:off x="3056281" y="1767389"/>
-                <a:ext cx="6079436" cy="369332"/>
-              </a:xfrm>
-              <a:prstGeom prst="rect">
-                <a:avLst/>
-              </a:prstGeom>
-              <a:blipFill>
-                <a:blip r:embed="rId4"/>
-                <a:stretch>
-                  <a:fillRect b="-11475"/>
-                </a:stretch>
-              </a:blipFill>
-            </p:spPr>
-            <p:txBody>
-              <a:bodyPr/>
-              <a:lstStyle/>
-              <a:p>
-                <a:r>
-                  <a:rPr lang="en-US">
-                    <a:noFill/>
-                  </a:rPr>
-                  <a:t> </a:t>
-                </a:r>
-              </a:p>
-            </p:txBody>
-          </p:sp>
-        </mc:Fallback>
-      </mc:AlternateContent>
-    </p:spTree>
-    <p:extLst>
-      <p:ext uri="{BB962C8B-B14F-4D97-AF65-F5344CB8AC3E}">
-        <p14:creationId xmlns:p14="http://schemas.microsoft.com/office/powerpoint/2010/main" val="2926171787"/>
+        <p14:creationId xmlns:p14="http://schemas.microsoft.com/office/powerpoint/2010/main" val="2377842193"/>
       </p:ext>
     </p:extLst>
   </p:cSld>
